--- a/Presentations/Final Project Presentation.pptx
+++ b/Presentations/Final Project Presentation.pptx
@@ -9,13 +9,12 @@
     <p:sldId id="257" r:id="rId3"/>
     <p:sldId id="266" r:id="rId4"/>
     <p:sldId id="258" r:id="rId5"/>
-    <p:sldId id="261" r:id="rId6"/>
-    <p:sldId id="259" r:id="rId7"/>
+    <p:sldId id="259" r:id="rId6"/>
+    <p:sldId id="261" r:id="rId7"/>
     <p:sldId id="260" r:id="rId8"/>
     <p:sldId id="262" r:id="rId9"/>
-    <p:sldId id="263" r:id="rId10"/>
-    <p:sldId id="264" r:id="rId11"/>
-    <p:sldId id="265" r:id="rId12"/>
+    <p:sldId id="264" r:id="rId10"/>
+    <p:sldId id="265" r:id="rId11"/>
   </p:sldIdLst>
   <p:sldSz cx="12192000" cy="6858000"/>
   <p:notesSz cx="6858000" cy="9144000"/>
@@ -3116,8 +3115,8 @@
         </p:nvSpPr>
         <p:spPr>
           <a:xfrm>
-            <a:off x="777240" y="1143000"/>
-            <a:ext cx="6400800" cy="749808"/>
+            <a:off x="777240" y="1163961"/>
+            <a:ext cx="6400800" cy="707886"/>
           </a:xfrm>
           <a:prstGeom prst="rect">
             <a:avLst/>
@@ -3135,13 +3134,13 @@
           <a:p>
             <a:pPr algn="l"/>
             <a:r>
-              <a:rPr sz="4000" b="1">
+              <a:rPr sz="4000" b="1" dirty="0">
                 <a:solidFill>
                   <a:srgbClr val="FFFFFF"/>
                 </a:solidFill>
                 <a:latin typeface="Aptos"/>
               </a:rPr>
-              <a:t>GrantScopeAI</a:t>
+              <a:t>GrantScope</a:t>
             </a:r>
           </a:p>
         </p:txBody>
@@ -3976,927 +3975,6 @@
 </file>
 
 <file path=ppt/slides/slide10.xml><?xml version="1.0" encoding="utf-8"?>
-<p:sld xmlns:a="http://schemas.openxmlformats.org/drawingml/2006/main" xmlns:r="http://schemas.openxmlformats.org/officeDocument/2006/relationships" xmlns:p="http://schemas.openxmlformats.org/presentationml/2006/main">
-  <p:cSld>
-    <p:bg>
-      <p:bgPr>
-        <a:solidFill>
-          <a:srgbClr val="F7F8FC"/>
-        </a:solidFill>
-        <a:effectLst/>
-      </p:bgPr>
-    </p:bg>
-    <p:spTree>
-      <p:nvGrpSpPr>
-        <p:cNvPr id="1" name=""/>
-        <p:cNvGrpSpPr/>
-        <p:nvPr/>
-      </p:nvGrpSpPr>
-      <p:grpSpPr>
-        <a:xfrm>
-          <a:off x="0" y="0"/>
-          <a:ext cx="0" cy="0"/>
-          <a:chOff x="0" y="0"/>
-          <a:chExt cx="0" cy="0"/>
-        </a:xfrm>
-      </p:grpSpPr>
-      <p:sp>
-        <p:nvSpPr>
-          <p:cNvPr id="2" name="TextBox 1"/>
-          <p:cNvSpPr txBox="1"/>
-          <p:nvPr/>
-        </p:nvSpPr>
-        <p:spPr>
-          <a:xfrm>
-            <a:off x="658368" y="384048"/>
-            <a:ext cx="10789920" cy="548640"/>
-          </a:xfrm>
-          <a:prstGeom prst="rect">
-            <a:avLst/>
-          </a:prstGeom>
-          <a:noFill/>
-          <a:ln>
-            <a:noFill/>
-          </a:ln>
-        </p:spPr>
-        <p:txBody>
-          <a:bodyPr wrap="square" anchor="ctr">
-            <a:spAutoFit/>
-          </a:bodyPr>
-          <a:lstStyle/>
-          <a:p>
-            <a:pPr algn="l"/>
-            <a:r>
-              <a:rPr sz="2700" b="1">
-                <a:solidFill>
-                  <a:srgbClr val="182745"/>
-                </a:solidFill>
-                <a:latin typeface="Aptos"/>
-              </a:rPr>
-              <a:t>Where could GrantScopeAI go next?</a:t>
-            </a:r>
-          </a:p>
-        </p:txBody>
-      </p:sp>
-      <p:sp>
-        <p:nvSpPr>
-          <p:cNvPr id="3" name="Rounded Rectangle 2"/>
-          <p:cNvSpPr/>
-          <p:nvPr/>
-        </p:nvSpPr>
-        <p:spPr>
-          <a:xfrm>
-            <a:off x="658368" y="1033271"/>
-            <a:ext cx="841248" cy="59436"/>
-          </a:xfrm>
-          <a:prstGeom prst="roundRect">
-            <a:avLst/>
-          </a:prstGeom>
-          <a:solidFill>
-            <a:srgbClr val="7552BE"/>
-          </a:solidFill>
-          <a:ln>
-            <a:noFill/>
-          </a:ln>
-        </p:spPr>
-        <p:style>
-          <a:lnRef idx="1">
-            <a:schemeClr val="accent1"/>
-          </a:lnRef>
-          <a:fillRef idx="3">
-            <a:schemeClr val="accent1"/>
-          </a:fillRef>
-          <a:effectRef idx="2">
-            <a:schemeClr val="accent1"/>
-          </a:effectRef>
-          <a:fontRef idx="minor">
-            <a:schemeClr val="lt1"/>
-          </a:fontRef>
-        </p:style>
-        <p:txBody>
-          <a:bodyPr rtlCol="0" anchor="ctr"/>
-          <a:lstStyle/>
-          <a:p>
-            <a:pPr algn="ctr"/>
-            <a:endParaRPr/>
-          </a:p>
-        </p:txBody>
-      </p:sp>
-      <p:sp>
-        <p:nvSpPr>
-          <p:cNvPr id="4" name="TextBox 3"/>
-          <p:cNvSpPr txBox="1"/>
-          <p:nvPr/>
-        </p:nvSpPr>
-        <p:spPr>
-          <a:xfrm>
-            <a:off x="658368" y="1170432"/>
-            <a:ext cx="10789920" cy="420624"/>
-          </a:xfrm>
-          <a:prstGeom prst="rect">
-            <a:avLst/>
-          </a:prstGeom>
-          <a:noFill/>
-          <a:ln>
-            <a:noFill/>
-          </a:ln>
-        </p:spPr>
-        <p:txBody>
-          <a:bodyPr wrap="square" anchor="ctr">
-            <a:spAutoFit/>
-          </a:bodyPr>
-          <a:lstStyle/>
-          <a:p>
-            <a:pPr algn="l"/>
-            <a:r>
-              <a:rPr sz="1400" b="0">
-                <a:solidFill>
-                  <a:srgbClr val="636D82"/>
-                </a:solidFill>
-                <a:latin typeface="Aptos"/>
-              </a:rPr>
-              <a:t>The next version would move from historical orientation toward richer scientific and funding discovery.</a:t>
-            </a:r>
-          </a:p>
-        </p:txBody>
-      </p:sp>
-      <p:sp>
-        <p:nvSpPr>
-          <p:cNvPr id="5" name="Rounded Rectangle 4"/>
-          <p:cNvSpPr/>
-          <p:nvPr/>
-        </p:nvSpPr>
-        <p:spPr>
-          <a:xfrm>
-            <a:off x="685800" y="1828800"/>
-            <a:ext cx="2606040" cy="3429000"/>
-          </a:xfrm>
-          <a:prstGeom prst="roundRect">
-            <a:avLst/>
-          </a:prstGeom>
-          <a:solidFill>
-            <a:srgbClr val="FFFFFF"/>
-          </a:solidFill>
-          <a:ln>
-            <a:solidFill>
-              <a:srgbClr val="E1E5EF"/>
-            </a:solidFill>
-          </a:ln>
-        </p:spPr>
-        <p:style>
-          <a:lnRef idx="1">
-            <a:schemeClr val="accent1"/>
-          </a:lnRef>
-          <a:fillRef idx="3">
-            <a:schemeClr val="accent1"/>
-          </a:fillRef>
-          <a:effectRef idx="2">
-            <a:schemeClr val="accent1"/>
-          </a:effectRef>
-          <a:fontRef idx="minor">
-            <a:schemeClr val="lt1"/>
-          </a:fontRef>
-        </p:style>
-        <p:txBody>
-          <a:bodyPr rtlCol="0" anchor="ctr"/>
-          <a:lstStyle/>
-          <a:p>
-            <a:pPr algn="ctr"/>
-            <a:endParaRPr/>
-          </a:p>
-        </p:txBody>
-      </p:sp>
-      <p:sp>
-        <p:nvSpPr>
-          <p:cNvPr id="6" name="Rounded Rectangle 5"/>
-          <p:cNvSpPr/>
-          <p:nvPr/>
-        </p:nvSpPr>
-        <p:spPr>
-          <a:xfrm>
-            <a:off x="886968" y="2011680"/>
-            <a:ext cx="502920" cy="109728"/>
-          </a:xfrm>
-          <a:prstGeom prst="roundRect">
-            <a:avLst/>
-          </a:prstGeom>
-          <a:solidFill>
-            <a:srgbClr val="7552BE"/>
-          </a:solidFill>
-          <a:ln>
-            <a:noFill/>
-          </a:ln>
-        </p:spPr>
-        <p:style>
-          <a:lnRef idx="1">
-            <a:schemeClr val="accent1"/>
-          </a:lnRef>
-          <a:fillRef idx="3">
-            <a:schemeClr val="accent1"/>
-          </a:fillRef>
-          <a:effectRef idx="2">
-            <a:schemeClr val="accent1"/>
-          </a:effectRef>
-          <a:fontRef idx="minor">
-            <a:schemeClr val="lt1"/>
-          </a:fontRef>
-        </p:style>
-        <p:txBody>
-          <a:bodyPr rtlCol="0" anchor="ctr"/>
-          <a:lstStyle/>
-          <a:p>
-            <a:pPr algn="ctr"/>
-            <a:endParaRPr/>
-          </a:p>
-        </p:txBody>
-      </p:sp>
-      <p:sp>
-        <p:nvSpPr>
-          <p:cNvPr id="7" name="TextBox 6"/>
-          <p:cNvSpPr txBox="1"/>
-          <p:nvPr/>
-        </p:nvSpPr>
-        <p:spPr>
-          <a:xfrm>
-            <a:off x="905256" y="2212848"/>
-            <a:ext cx="2167128" cy="411480"/>
-          </a:xfrm>
-          <a:prstGeom prst="rect">
-            <a:avLst/>
-          </a:prstGeom>
-          <a:noFill/>
-          <a:ln>
-            <a:noFill/>
-          </a:ln>
-        </p:spPr>
-        <p:txBody>
-          <a:bodyPr wrap="square" anchor="ctr">
-            <a:spAutoFit/>
-          </a:bodyPr>
-          <a:lstStyle/>
-          <a:p>
-            <a:pPr algn="l"/>
-            <a:r>
-              <a:rPr sz="1700" b="1">
-                <a:solidFill>
-                  <a:srgbClr val="182745"/>
-                </a:solidFill>
-                <a:latin typeface="Aptos"/>
-              </a:rPr>
-              <a:t>Live opportunities</a:t>
-            </a:r>
-          </a:p>
-        </p:txBody>
-      </p:sp>
-      <p:sp>
-        <p:nvSpPr>
-          <p:cNvPr id="8" name="TextBox 7"/>
-          <p:cNvSpPr txBox="1"/>
-          <p:nvPr/>
-        </p:nvSpPr>
-        <p:spPr>
-          <a:xfrm>
-            <a:off x="905256" y="3410372"/>
-            <a:ext cx="2167128" cy="1015663"/>
-          </a:xfrm>
-          <a:prstGeom prst="rect">
-            <a:avLst/>
-          </a:prstGeom>
-          <a:noFill/>
-          <a:ln>
-            <a:noFill/>
-          </a:ln>
-        </p:spPr>
-        <p:txBody>
-          <a:bodyPr wrap="square" anchor="ctr">
-            <a:spAutoFit/>
-          </a:bodyPr>
-          <a:lstStyle/>
-          <a:p>
-            <a:pPr algn="l"/>
-            <a:r>
-              <a:rPr sz="1200" b="0" dirty="0">
-                <a:solidFill>
-                  <a:srgbClr val="1E2739"/>
-                </a:solidFill>
-                <a:latin typeface="Aptos"/>
-              </a:rPr>
-              <a:t>Integrate current grant calls, deadlines and eligibility.
-Historical discovery</a:t>
-            </a:r>
-            <a:r>
-              <a:rPr lang="en-US" sz="1200" b="0" dirty="0">
-                <a:solidFill>
-                  <a:srgbClr val="1E2739"/>
-                </a:solidFill>
-                <a:latin typeface="Aptos"/>
-              </a:rPr>
-              <a:t> to</a:t>
-            </a:r>
-            <a:r>
-              <a:rPr sz="1200" b="0" dirty="0">
-                <a:solidFill>
-                  <a:srgbClr val="1E2739"/>
-                </a:solidFill>
-                <a:latin typeface="Aptos"/>
-              </a:rPr>
-              <a:t> actionable funding search.</a:t>
-            </a:r>
-          </a:p>
-        </p:txBody>
-      </p:sp>
-      <p:sp>
-        <p:nvSpPr>
-          <p:cNvPr id="9" name="Rounded Rectangle 8"/>
-          <p:cNvSpPr/>
-          <p:nvPr/>
-        </p:nvSpPr>
-        <p:spPr>
-          <a:xfrm>
-            <a:off x="3474720" y="1828800"/>
-            <a:ext cx="2606040" cy="3429000"/>
-          </a:xfrm>
-          <a:prstGeom prst="roundRect">
-            <a:avLst/>
-          </a:prstGeom>
-          <a:solidFill>
-            <a:srgbClr val="FFFFFF"/>
-          </a:solidFill>
-          <a:ln>
-            <a:solidFill>
-              <a:srgbClr val="E1E5EF"/>
-            </a:solidFill>
-          </a:ln>
-        </p:spPr>
-        <p:style>
-          <a:lnRef idx="1">
-            <a:schemeClr val="accent1"/>
-          </a:lnRef>
-          <a:fillRef idx="3">
-            <a:schemeClr val="accent1"/>
-          </a:fillRef>
-          <a:effectRef idx="2">
-            <a:schemeClr val="accent1"/>
-          </a:effectRef>
-          <a:fontRef idx="minor">
-            <a:schemeClr val="lt1"/>
-          </a:fontRef>
-        </p:style>
-        <p:txBody>
-          <a:bodyPr rtlCol="0" anchor="ctr"/>
-          <a:lstStyle/>
-          <a:p>
-            <a:pPr algn="ctr"/>
-            <a:endParaRPr/>
-          </a:p>
-        </p:txBody>
-      </p:sp>
-      <p:sp>
-        <p:nvSpPr>
-          <p:cNvPr id="10" name="Rounded Rectangle 9"/>
-          <p:cNvSpPr/>
-          <p:nvPr/>
-        </p:nvSpPr>
-        <p:spPr>
-          <a:xfrm>
-            <a:off x="3675887" y="2011680"/>
-            <a:ext cx="502920" cy="109728"/>
-          </a:xfrm>
-          <a:prstGeom prst="roundRect">
-            <a:avLst/>
-          </a:prstGeom>
-          <a:solidFill>
-            <a:srgbClr val="8463C7"/>
-          </a:solidFill>
-          <a:ln>
-            <a:noFill/>
-          </a:ln>
-        </p:spPr>
-        <p:style>
-          <a:lnRef idx="1">
-            <a:schemeClr val="accent1"/>
-          </a:lnRef>
-          <a:fillRef idx="3">
-            <a:schemeClr val="accent1"/>
-          </a:fillRef>
-          <a:effectRef idx="2">
-            <a:schemeClr val="accent1"/>
-          </a:effectRef>
-          <a:fontRef idx="minor">
-            <a:schemeClr val="lt1"/>
-          </a:fontRef>
-        </p:style>
-        <p:txBody>
-          <a:bodyPr rtlCol="0" anchor="ctr"/>
-          <a:lstStyle/>
-          <a:p>
-            <a:pPr algn="ctr"/>
-            <a:endParaRPr/>
-          </a:p>
-        </p:txBody>
-      </p:sp>
-      <p:sp>
-        <p:nvSpPr>
-          <p:cNvPr id="11" name="TextBox 10"/>
-          <p:cNvSpPr txBox="1"/>
-          <p:nvPr/>
-        </p:nvSpPr>
-        <p:spPr>
-          <a:xfrm>
-            <a:off x="3694176" y="2212848"/>
-            <a:ext cx="2167128" cy="411480"/>
-          </a:xfrm>
-          <a:prstGeom prst="rect">
-            <a:avLst/>
-          </a:prstGeom>
-          <a:noFill/>
-          <a:ln>
-            <a:noFill/>
-          </a:ln>
-        </p:spPr>
-        <p:txBody>
-          <a:bodyPr wrap="square" anchor="ctr">
-            <a:spAutoFit/>
-          </a:bodyPr>
-          <a:lstStyle/>
-          <a:p>
-            <a:pPr algn="l"/>
-            <a:r>
-              <a:rPr sz="1700" b="1">
-                <a:solidFill>
-                  <a:srgbClr val="182745"/>
-                </a:solidFill>
-                <a:latin typeface="Aptos"/>
-              </a:rPr>
-              <a:t>Scientific literature</a:t>
-            </a:r>
-          </a:p>
-        </p:txBody>
-      </p:sp>
-      <p:sp>
-        <p:nvSpPr>
-          <p:cNvPr id="12" name="TextBox 11"/>
-          <p:cNvSpPr txBox="1"/>
-          <p:nvPr/>
-        </p:nvSpPr>
-        <p:spPr>
-          <a:xfrm>
-            <a:off x="3694176" y="2706624"/>
-            <a:ext cx="2167128" cy="2423160"/>
-          </a:xfrm>
-          <a:prstGeom prst="rect">
-            <a:avLst/>
-          </a:prstGeom>
-          <a:noFill/>
-          <a:ln>
-            <a:noFill/>
-          </a:ln>
-        </p:spPr>
-        <p:txBody>
-          <a:bodyPr wrap="square" anchor="ctr">
-            <a:spAutoFit/>
-          </a:bodyPr>
-          <a:lstStyle/>
-          <a:p>
-            <a:pPr algn="l"/>
-            <a:r>
-              <a:rPr sz="1200" b="0" dirty="0">
-                <a:solidFill>
-                  <a:srgbClr val="1E2739"/>
-                </a:solidFill>
-                <a:latin typeface="Aptos"/>
-              </a:rPr>
-              <a:t>Connect grants with publications, authors and research outputs.
-Start with metadata/abstracts; full text raises licensing and paywall constraints.</a:t>
-            </a:r>
-          </a:p>
-        </p:txBody>
-      </p:sp>
-      <p:sp>
-        <p:nvSpPr>
-          <p:cNvPr id="13" name="Rounded Rectangle 12"/>
-          <p:cNvSpPr/>
-          <p:nvPr/>
-        </p:nvSpPr>
-        <p:spPr>
-          <a:xfrm>
-            <a:off x="6263640" y="1828800"/>
-            <a:ext cx="2606040" cy="3429000"/>
-          </a:xfrm>
-          <a:prstGeom prst="roundRect">
-            <a:avLst/>
-          </a:prstGeom>
-          <a:solidFill>
-            <a:srgbClr val="FFFFFF"/>
-          </a:solidFill>
-          <a:ln>
-            <a:solidFill>
-              <a:srgbClr val="E1E5EF"/>
-            </a:solidFill>
-          </a:ln>
-        </p:spPr>
-        <p:style>
-          <a:lnRef idx="1">
-            <a:schemeClr val="accent1"/>
-          </a:lnRef>
-          <a:fillRef idx="3">
-            <a:schemeClr val="accent1"/>
-          </a:fillRef>
-          <a:effectRef idx="2">
-            <a:schemeClr val="accent1"/>
-          </a:effectRef>
-          <a:fontRef idx="minor">
-            <a:schemeClr val="lt1"/>
-          </a:fontRef>
-        </p:style>
-        <p:txBody>
-          <a:bodyPr rtlCol="0" anchor="ctr"/>
-          <a:lstStyle/>
-          <a:p>
-            <a:pPr algn="ctr"/>
-            <a:endParaRPr/>
-          </a:p>
-        </p:txBody>
-      </p:sp>
-      <p:sp>
-        <p:nvSpPr>
-          <p:cNvPr id="14" name="Rounded Rectangle 13"/>
-          <p:cNvSpPr/>
-          <p:nvPr/>
-        </p:nvSpPr>
-        <p:spPr>
-          <a:xfrm>
-            <a:off x="6464807" y="2011680"/>
-            <a:ext cx="502920" cy="109728"/>
-          </a:xfrm>
-          <a:prstGeom prst="roundRect">
-            <a:avLst/>
-          </a:prstGeom>
-          <a:solidFill>
-            <a:srgbClr val="A48BD6"/>
-          </a:solidFill>
-          <a:ln>
-            <a:noFill/>
-          </a:ln>
-        </p:spPr>
-        <p:style>
-          <a:lnRef idx="1">
-            <a:schemeClr val="accent1"/>
-          </a:lnRef>
-          <a:fillRef idx="3">
-            <a:schemeClr val="accent1"/>
-          </a:fillRef>
-          <a:effectRef idx="2">
-            <a:schemeClr val="accent1"/>
-          </a:effectRef>
-          <a:fontRef idx="minor">
-            <a:schemeClr val="lt1"/>
-          </a:fontRef>
-        </p:style>
-        <p:txBody>
-          <a:bodyPr rtlCol="0" anchor="ctr"/>
-          <a:lstStyle/>
-          <a:p>
-            <a:pPr algn="ctr"/>
-            <a:endParaRPr/>
-          </a:p>
-        </p:txBody>
-      </p:sp>
-      <p:sp>
-        <p:nvSpPr>
-          <p:cNvPr id="15" name="TextBox 14"/>
-          <p:cNvSpPr txBox="1"/>
-          <p:nvPr/>
-        </p:nvSpPr>
-        <p:spPr>
-          <a:xfrm>
-            <a:off x="6483096" y="2212848"/>
-            <a:ext cx="2167128" cy="411480"/>
-          </a:xfrm>
-          <a:prstGeom prst="rect">
-            <a:avLst/>
-          </a:prstGeom>
-          <a:noFill/>
-          <a:ln>
-            <a:noFill/>
-          </a:ln>
-        </p:spPr>
-        <p:txBody>
-          <a:bodyPr wrap="square" anchor="ctr">
-            <a:spAutoFit/>
-          </a:bodyPr>
-          <a:lstStyle/>
-          <a:p>
-            <a:pPr algn="l"/>
-            <a:r>
-              <a:rPr sz="1700" b="1">
-                <a:solidFill>
-                  <a:srgbClr val="182745"/>
-                </a:solidFill>
-                <a:latin typeface="Aptos"/>
-              </a:rPr>
-              <a:t>Semantic retrieval</a:t>
-            </a:r>
-          </a:p>
-        </p:txBody>
-      </p:sp>
-      <p:sp>
-        <p:nvSpPr>
-          <p:cNvPr id="16" name="TextBox 15"/>
-          <p:cNvSpPr txBox="1"/>
-          <p:nvPr/>
-        </p:nvSpPr>
-        <p:spPr>
-          <a:xfrm>
-            <a:off x="6483096" y="2706624"/>
-            <a:ext cx="2167128" cy="2423160"/>
-          </a:xfrm>
-          <a:prstGeom prst="rect">
-            <a:avLst/>
-          </a:prstGeom>
-          <a:noFill/>
-          <a:ln>
-            <a:noFill/>
-          </a:ln>
-        </p:spPr>
-        <p:txBody>
-          <a:bodyPr wrap="square" anchor="ctr">
-            <a:spAutoFit/>
-          </a:bodyPr>
-          <a:lstStyle/>
-          <a:p>
-            <a:pPr algn="l"/>
-            <a:r>
-              <a:rPr sz="1200" b="0">
-                <a:solidFill>
-                  <a:srgbClr val="1E2739"/>
-                </a:solidFill>
-                <a:latin typeface="Aptos"/>
-              </a:rPr>
-              <a:t>Compare the current interpretable TF-IDF hybrid with embeddings or lexical + semantic retrieval.
-Test improvement rather than assume complexity is better.</a:t>
-            </a:r>
-          </a:p>
-        </p:txBody>
-      </p:sp>
-      <p:sp>
-        <p:nvSpPr>
-          <p:cNvPr id="17" name="Rounded Rectangle 16"/>
-          <p:cNvSpPr/>
-          <p:nvPr/>
-        </p:nvSpPr>
-        <p:spPr>
-          <a:xfrm>
-            <a:off x="9052560" y="1828800"/>
-            <a:ext cx="2606040" cy="3429000"/>
-          </a:xfrm>
-          <a:prstGeom prst="roundRect">
-            <a:avLst/>
-          </a:prstGeom>
-          <a:solidFill>
-            <a:srgbClr val="FFFFFF"/>
-          </a:solidFill>
-          <a:ln>
-            <a:solidFill>
-              <a:srgbClr val="E1E5EF"/>
-            </a:solidFill>
-          </a:ln>
-        </p:spPr>
-        <p:style>
-          <a:lnRef idx="1">
-            <a:schemeClr val="accent1"/>
-          </a:lnRef>
-          <a:fillRef idx="3">
-            <a:schemeClr val="accent1"/>
-          </a:fillRef>
-          <a:effectRef idx="2">
-            <a:schemeClr val="accent1"/>
-          </a:effectRef>
-          <a:fontRef idx="minor">
-            <a:schemeClr val="lt1"/>
-          </a:fontRef>
-        </p:style>
-        <p:txBody>
-          <a:bodyPr rtlCol="0" anchor="ctr"/>
-          <a:lstStyle/>
-          <a:p>
-            <a:pPr algn="ctr"/>
-            <a:endParaRPr/>
-          </a:p>
-        </p:txBody>
-      </p:sp>
-      <p:sp>
-        <p:nvSpPr>
-          <p:cNvPr id="18" name="Rounded Rectangle 17"/>
-          <p:cNvSpPr/>
-          <p:nvPr/>
-        </p:nvSpPr>
-        <p:spPr>
-          <a:xfrm>
-            <a:off x="9253728" y="2011680"/>
-            <a:ext cx="502920" cy="109728"/>
-          </a:xfrm>
-          <a:prstGeom prst="roundRect">
-            <a:avLst/>
-          </a:prstGeom>
-          <a:solidFill>
-            <a:srgbClr val="BEA4DE"/>
-          </a:solidFill>
-          <a:ln>
-            <a:noFill/>
-          </a:ln>
-        </p:spPr>
-        <p:style>
-          <a:lnRef idx="1">
-            <a:schemeClr val="accent1"/>
-          </a:lnRef>
-          <a:fillRef idx="3">
-            <a:schemeClr val="accent1"/>
-          </a:fillRef>
-          <a:effectRef idx="2">
-            <a:schemeClr val="accent1"/>
-          </a:effectRef>
-          <a:fontRef idx="minor">
-            <a:schemeClr val="lt1"/>
-          </a:fontRef>
-        </p:style>
-        <p:txBody>
-          <a:bodyPr rtlCol="0" anchor="ctr"/>
-          <a:lstStyle/>
-          <a:p>
-            <a:pPr algn="ctr"/>
-            <a:endParaRPr/>
-          </a:p>
-        </p:txBody>
-      </p:sp>
-      <p:sp>
-        <p:nvSpPr>
-          <p:cNvPr id="19" name="TextBox 18"/>
-          <p:cNvSpPr txBox="1"/>
-          <p:nvPr/>
-        </p:nvSpPr>
-        <p:spPr>
-          <a:xfrm>
-            <a:off x="9272016" y="2212848"/>
-            <a:ext cx="2167128" cy="411480"/>
-          </a:xfrm>
-          <a:prstGeom prst="rect">
-            <a:avLst/>
-          </a:prstGeom>
-          <a:noFill/>
-          <a:ln>
-            <a:noFill/>
-          </a:ln>
-        </p:spPr>
-        <p:txBody>
-          <a:bodyPr wrap="square" anchor="ctr">
-            <a:spAutoFit/>
-          </a:bodyPr>
-          <a:lstStyle/>
-          <a:p>
-            <a:pPr algn="l"/>
-            <a:r>
-              <a:rPr sz="1700" b="1">
-                <a:solidFill>
-                  <a:srgbClr val="182745"/>
-                </a:solidFill>
-                <a:latin typeface="Aptos"/>
-              </a:rPr>
-              <a:t>Human validation</a:t>
-            </a:r>
-          </a:p>
-        </p:txBody>
-      </p:sp>
-      <p:sp>
-        <p:nvSpPr>
-          <p:cNvPr id="20" name="TextBox 19"/>
-          <p:cNvSpPr txBox="1"/>
-          <p:nvPr/>
-        </p:nvSpPr>
-        <p:spPr>
-          <a:xfrm>
-            <a:off x="9272016" y="2706624"/>
-            <a:ext cx="2167128" cy="2423160"/>
-          </a:xfrm>
-          <a:prstGeom prst="rect">
-            <a:avLst/>
-          </a:prstGeom>
-          <a:noFill/>
-          <a:ln>
-            <a:noFill/>
-          </a:ln>
-        </p:spPr>
-        <p:txBody>
-          <a:bodyPr wrap="square" anchor="ctr">
-            <a:spAutoFit/>
-          </a:bodyPr>
-          <a:lstStyle/>
-          <a:p>
-            <a:pPr algn="l"/>
-            <a:r>
-              <a:rPr sz="1200" b="0">
-                <a:solidFill>
-                  <a:srgbClr val="1E2739"/>
-                </a:solidFill>
-                <a:latin typeface="Aptos"/>
-              </a:rPr>
-              <a:t>Build a larger researcher-labelled relevance benchmark.
-Evaluate whether domain experts consistently find the rankings useful.</a:t>
-            </a:r>
-          </a:p>
-        </p:txBody>
-      </p:sp>
-      <p:sp>
-        <p:nvSpPr>
-          <p:cNvPr id="21" name="TextBox 20"/>
-          <p:cNvSpPr txBox="1"/>
-          <p:nvPr/>
-        </p:nvSpPr>
-        <p:spPr>
-          <a:xfrm>
-            <a:off x="1828800" y="5796959"/>
-            <a:ext cx="8503920" cy="384721"/>
-          </a:xfrm>
-          <a:prstGeom prst="rect">
-            <a:avLst/>
-          </a:prstGeom>
-          <a:noFill/>
-          <a:ln>
-            <a:noFill/>
-          </a:ln>
-        </p:spPr>
-        <p:txBody>
-          <a:bodyPr wrap="square" anchor="ctr">
-            <a:spAutoFit/>
-          </a:bodyPr>
-          <a:lstStyle/>
-          <a:p>
-            <a:pPr algn="ctr"/>
-            <a:r>
-              <a:rPr lang="en-US" sz="1900" b="1" dirty="0">
-                <a:solidFill>
-                  <a:srgbClr val="182745"/>
-                </a:solidFill>
-                <a:latin typeface="Aptos"/>
-              </a:rPr>
-              <a:t>From the past to the current and the Future</a:t>
-            </a:r>
-            <a:endParaRPr sz="1900" b="1" dirty="0">
-              <a:solidFill>
-                <a:srgbClr val="182745"/>
-              </a:solidFill>
-              <a:latin typeface="Aptos"/>
-            </a:endParaRPr>
-          </a:p>
-        </p:txBody>
-      </p:sp>
-      <p:sp>
-        <p:nvSpPr>
-          <p:cNvPr id="22" name="TextBox 21"/>
-          <p:cNvSpPr txBox="1"/>
-          <p:nvPr/>
-        </p:nvSpPr>
-        <p:spPr>
-          <a:xfrm>
-            <a:off x="11301984" y="6428232"/>
-            <a:ext cx="256032" cy="182880"/>
-          </a:xfrm>
-          <a:prstGeom prst="rect">
-            <a:avLst/>
-          </a:prstGeom>
-          <a:noFill/>
-          <a:ln>
-            <a:noFill/>
-          </a:ln>
-        </p:spPr>
-        <p:txBody>
-          <a:bodyPr wrap="square" anchor="ctr">
-            <a:spAutoFit/>
-          </a:bodyPr>
-          <a:lstStyle/>
-          <a:p>
-            <a:pPr algn="r"/>
-            <a:r>
-              <a:rPr sz="900" b="0">
-                <a:solidFill>
-                  <a:srgbClr val="636D82"/>
-                </a:solidFill>
-                <a:latin typeface="Aptos"/>
-              </a:rPr>
-              <a:t>9</a:t>
-            </a:r>
-          </a:p>
-        </p:txBody>
-      </p:sp>
-    </p:spTree>
-  </p:cSld>
-  <p:clrMapOvr>
-    <a:masterClrMapping/>
-  </p:clrMapOvr>
-</p:sld>
-</file>
-
-<file path=ppt/slides/slide11.xml><?xml version="1.0" encoding="utf-8"?>
 <p:sld xmlns:a="http://schemas.openxmlformats.org/drawingml/2006/main" xmlns:r="http://schemas.openxmlformats.org/officeDocument/2006/relationships" xmlns:p="http://schemas.openxmlformats.org/presentationml/2006/main">
   <p:cSld>
     <p:bg>
@@ -5182,8 +4260,8 @@
         </p:nvSpPr>
         <p:spPr>
           <a:xfrm>
-            <a:off x="658368" y="384048"/>
-            <a:ext cx="10789920" cy="548640"/>
+            <a:off x="658368" y="404452"/>
+            <a:ext cx="10789920" cy="507831"/>
           </a:xfrm>
           <a:prstGeom prst="rect">
             <a:avLst/>
@@ -5201,13 +4279,13 @@
           <a:p>
             <a:pPr algn="l"/>
             <a:r>
-              <a:rPr sz="2700" b="1">
+              <a:rPr sz="2700" b="1" dirty="0">
                 <a:solidFill>
                   <a:srgbClr val="182745"/>
                 </a:solidFill>
                 <a:latin typeface="Aptos"/>
               </a:rPr>
-              <a:t>Why I Built GrantScopeAI</a:t>
+              <a:t>Why I Built GrantScope</a:t>
             </a:r>
           </a:p>
         </p:txBody>
@@ -6098,25 +5176,7 @@
                 </a:solidFill>
                 <a:latin typeface="Aptos"/>
               </a:rPr>
-              <a:t>Where does </a:t>
-            </a:r>
-            <a:r>
-              <a:rPr lang="en-US" sz="2700" b="1" dirty="0" err="1">
-                <a:solidFill>
-                  <a:srgbClr val="182745"/>
-                </a:solidFill>
-                <a:latin typeface="Aptos"/>
-              </a:rPr>
-              <a:t>GrantScopeAI</a:t>
-            </a:r>
-            <a:r>
-              <a:rPr lang="en-US" sz="2700" b="1" dirty="0">
-                <a:solidFill>
-                  <a:srgbClr val="182745"/>
-                </a:solidFill>
-                <a:latin typeface="Aptos"/>
-              </a:rPr>
-              <a:t> fit?</a:t>
+              <a:t>Where does GrantScope fit?</a:t>
             </a:r>
             <a:endParaRPr sz="2700" b="1" dirty="0">
               <a:solidFill>
@@ -7571,7 +6631,7 @@
           <a:p>
             <a:pPr algn="l"/>
             <a:r>
-              <a:rPr sz="1700" b="1">
+              <a:rPr sz="1700" b="1" dirty="0" err="1">
                 <a:solidFill>
                   <a:srgbClr val="182745"/>
                 </a:solidFill>
@@ -7579,6 +6639,12 @@
               </a:rPr>
               <a:t>OpenAlex</a:t>
             </a:r>
+            <a:endParaRPr sz="1700" b="1" dirty="0">
+              <a:solidFill>
+                <a:srgbClr val="182745"/>
+              </a:solidFill>
+              <a:latin typeface="Aptos"/>
+            </a:endParaRPr>
           </a:p>
         </p:txBody>
       </p:sp>
@@ -7609,7 +6675,7 @@
           <a:p>
             <a:pPr algn="l"/>
             <a:r>
-              <a:rPr sz="1300" b="0">
+              <a:rPr sz="1300" b="0" dirty="0">
                 <a:solidFill>
                   <a:srgbClr val="1E2739"/>
                 </a:solidFill>
@@ -7712,32 +6778,32 @@
         </p:nvSpPr>
         <p:spPr>
           <a:xfrm>
-            <a:off x="5257800" y="3474720"/>
-            <a:ext cx="5212080" cy="713232"/>
-          </a:xfrm>
-          <a:prstGeom prst="rect">
-            <a:avLst/>
-          </a:prstGeom>
-          <a:noFill/>
-          <a:ln>
-            <a:noFill/>
-          </a:ln>
-        </p:spPr>
-        <p:txBody>
-          <a:bodyPr wrap="square" anchor="ctr">
-            <a:spAutoFit/>
-          </a:bodyPr>
-          <a:lstStyle/>
-          <a:p>
-            <a:pPr algn="ctr"/>
-            <a:r>
-              <a:rPr sz="1500" b="0">
+            <a:off x="5257800" y="3554337"/>
+            <a:ext cx="5212080" cy="553998"/>
+          </a:xfrm>
+          <a:prstGeom prst="rect">
+            <a:avLst/>
+          </a:prstGeom>
+          <a:noFill/>
+          <a:ln>
+            <a:noFill/>
+          </a:ln>
+        </p:spPr>
+        <p:txBody>
+          <a:bodyPr wrap="square" anchor="ctr">
+            <a:spAutoFit/>
+          </a:bodyPr>
+          <a:lstStyle/>
+          <a:p>
+            <a:pPr algn="ctr"/>
+            <a:r>
+              <a:rPr sz="1500" b="0" dirty="0">
                 <a:solidFill>
                   <a:srgbClr val="1E2739"/>
                 </a:solidFill>
                 <a:latin typeface="Aptos"/>
               </a:rPr>
-              <a:t>GrantScopeAI connects funding history with scientific activity instead of treating each source as an isolated dataset.</a:t>
+              <a:t>GrantScope connects funding history with scientific activity instead of treating each source as an isolated dataset.</a:t>
             </a:r>
           </a:p>
         </p:txBody>
@@ -8092,7 +7158,7 @@
                 </a:solidFill>
                 <a:latin typeface="Aptos"/>
               </a:rPr>
-              <a:t>From bootcamp concepts to one data product</a:t>
+              <a:t>Building a trustworthy research landscape</a:t>
             </a:r>
           </a:p>
         </p:txBody>
@@ -8149,8 +7215,8 @@
         </p:nvSpPr>
         <p:spPr>
           <a:xfrm>
-            <a:off x="658368" y="1170432"/>
-            <a:ext cx="10789920" cy="420624"/>
+            <a:off x="658368" y="1226855"/>
+            <a:ext cx="10789920" cy="307777"/>
           </a:xfrm>
           <a:prstGeom prst="rect">
             <a:avLst/>
@@ -8168,33 +7234,51 @@
           <a:p>
             <a:pPr algn="l"/>
             <a:r>
-              <a:rPr sz="1400" b="0">
+              <a:rPr sz="1400" b="0" dirty="0">
                 <a:solidFill>
                   <a:srgbClr val="636D82"/>
                 </a:solidFill>
                 <a:latin typeface="Aptos"/>
               </a:rPr>
-              <a:t>The skills became stages of a single end-to-end workflow.</a:t>
-            </a:r>
-          </a:p>
-        </p:txBody>
-      </p:sp>
-      <p:sp>
-        <p:nvSpPr>
-          <p:cNvPr id="5" name="Oval 4"/>
+              <a:t>The important work was deciding what to harmonize</a:t>
+            </a:r>
+            <a:r>
+              <a:rPr lang="en-US" sz="1400" b="0" dirty="0">
+                <a:solidFill>
+                  <a:srgbClr val="636D82"/>
+                </a:solidFill>
+                <a:latin typeface="Aptos"/>
+              </a:rPr>
+              <a:t> </a:t>
+            </a:r>
+            <a:r>
+              <a:rPr sz="1400" b="0" dirty="0">
+                <a:solidFill>
+                  <a:srgbClr val="636D82"/>
+                </a:solidFill>
+                <a:latin typeface="Aptos"/>
+              </a:rPr>
+              <a:t>and what not to.</a:t>
+            </a:r>
+          </a:p>
+        </p:txBody>
+      </p:sp>
+      <p:sp>
+        <p:nvSpPr>
+          <p:cNvPr id="5" name="Rounded Rectangle 4"/>
           <p:cNvSpPr/>
           <p:nvPr/>
         </p:nvSpPr>
         <p:spPr>
           <a:xfrm>
-            <a:off x="1014984" y="1920240"/>
-            <a:ext cx="749808" cy="749808"/>
-          </a:xfrm>
-          <a:prstGeom prst="ellipse">
+            <a:off x="777240" y="1828800"/>
+            <a:ext cx="10652760" cy="2240280"/>
+          </a:xfrm>
+          <a:prstGeom prst="roundRect">
             <a:avLst/>
           </a:prstGeom>
           <a:solidFill>
-            <a:srgbClr val="7552BE"/>
+            <a:srgbClr val="F2F4FA"/>
           </a:solidFill>
           <a:ln>
             <a:noFill/>
@@ -8231,32 +7315,32 @@
         </p:nvSpPr>
         <p:spPr>
           <a:xfrm>
-            <a:off x="1014984" y="2084831"/>
-            <a:ext cx="749808" cy="274320"/>
-          </a:xfrm>
-          <a:prstGeom prst="rect">
-            <a:avLst/>
-          </a:prstGeom>
-          <a:noFill/>
-          <a:ln>
-            <a:noFill/>
-          </a:ln>
-        </p:spPr>
-        <p:txBody>
-          <a:bodyPr wrap="square" anchor="ctr">
-            <a:spAutoFit/>
-          </a:bodyPr>
-          <a:lstStyle/>
-          <a:p>
-            <a:pPr algn="ctr"/>
-            <a:r>
-              <a:rPr sz="1500" b="1">
-                <a:solidFill>
-                  <a:srgbClr val="FFFFFF"/>
-                </a:solidFill>
-                <a:latin typeface="Aptos"/>
-              </a:rPr>
-              <a:t>1</a:t>
+            <a:off x="987552" y="2267712"/>
+            <a:ext cx="2148840" cy="347472"/>
+          </a:xfrm>
+          <a:prstGeom prst="rect">
+            <a:avLst/>
+          </a:prstGeom>
+          <a:noFill/>
+          <a:ln>
+            <a:noFill/>
+          </a:ln>
+        </p:spPr>
+        <p:txBody>
+          <a:bodyPr wrap="square" anchor="ctr">
+            <a:spAutoFit/>
+          </a:bodyPr>
+          <a:lstStyle/>
+          <a:p>
+            <a:pPr algn="l"/>
+            <a:r>
+              <a:rPr sz="1800" b="1">
+                <a:solidFill>
+                  <a:srgbClr val="182745"/>
+                </a:solidFill>
+                <a:latin typeface="Aptos"/>
+              </a:rPr>
+              <a:t>Acquire</a:t>
             </a:r>
           </a:p>
         </p:txBody>
@@ -8269,129 +7353,477 @@
         </p:nvSpPr>
         <p:spPr>
           <a:xfrm>
-            <a:off x="512064" y="2907792"/>
-            <a:ext cx="1755648" cy="411480"/>
-          </a:xfrm>
-          <a:prstGeom prst="rect">
-            <a:avLst/>
-          </a:prstGeom>
-          <a:noFill/>
-          <a:ln>
-            <a:noFill/>
-          </a:ln>
-        </p:spPr>
-        <p:txBody>
-          <a:bodyPr wrap="square" anchor="ctr">
-            <a:spAutoFit/>
-          </a:bodyPr>
-          <a:lstStyle/>
-          <a:p>
-            <a:pPr algn="ctr"/>
-            <a:r>
-              <a:rPr sz="1500" b="1">
+            <a:off x="987552" y="2724912"/>
+            <a:ext cx="2084831" cy="804672"/>
+          </a:xfrm>
+          <a:prstGeom prst="rect">
+            <a:avLst/>
+          </a:prstGeom>
+          <a:noFill/>
+          <a:ln>
+            <a:noFill/>
+          </a:ln>
+        </p:spPr>
+        <p:txBody>
+          <a:bodyPr wrap="square" anchor="ctr">
+            <a:spAutoFit/>
+          </a:bodyPr>
+          <a:lstStyle/>
+          <a:p>
+            <a:pPr algn="l"/>
+            <a:r>
+              <a:rPr sz="1250" b="0">
+                <a:solidFill>
+                  <a:srgbClr val="1E2739"/>
+                </a:solidFill>
+                <a:latin typeface="Aptos"/>
+              </a:rPr>
+              <a:t>NSF API
+CORDIS bulk CSV
+OpenAlex API</a:t>
+            </a:r>
+          </a:p>
+        </p:txBody>
+      </p:sp>
+      <p:sp>
+        <p:nvSpPr>
+          <p:cNvPr id="8" name="TextBox 7"/>
+          <p:cNvSpPr txBox="1"/>
+          <p:nvPr/>
+        </p:nvSpPr>
+        <p:spPr>
+          <a:xfrm>
+            <a:off x="3136392" y="2615184"/>
+            <a:ext cx="320040" cy="320040"/>
+          </a:xfrm>
+          <a:prstGeom prst="rect">
+            <a:avLst/>
+          </a:prstGeom>
+          <a:noFill/>
+          <a:ln>
+            <a:noFill/>
+          </a:ln>
+        </p:spPr>
+        <p:txBody>
+          <a:bodyPr wrap="square" anchor="ctr">
+            <a:spAutoFit/>
+          </a:bodyPr>
+          <a:lstStyle/>
+          <a:p>
+            <a:pPr algn="ctr"/>
+            <a:r>
+              <a:rPr sz="1800" b="1" dirty="0">
+                <a:solidFill>
+                  <a:srgbClr val="8463C7"/>
+                </a:solidFill>
+                <a:latin typeface="Aptos"/>
+              </a:rPr>
+              <a:t>→</a:t>
+            </a:r>
+          </a:p>
+        </p:txBody>
+      </p:sp>
+      <p:sp>
+        <p:nvSpPr>
+          <p:cNvPr id="9" name="TextBox 8"/>
+          <p:cNvSpPr txBox="1"/>
+          <p:nvPr/>
+        </p:nvSpPr>
+        <p:spPr>
+          <a:xfrm>
+            <a:off x="3621024" y="2267712"/>
+            <a:ext cx="2148840" cy="347472"/>
+          </a:xfrm>
+          <a:prstGeom prst="rect">
+            <a:avLst/>
+          </a:prstGeom>
+          <a:noFill/>
+          <a:ln>
+            <a:noFill/>
+          </a:ln>
+        </p:spPr>
+        <p:txBody>
+          <a:bodyPr wrap="square" anchor="ctr">
+            <a:spAutoFit/>
+          </a:bodyPr>
+          <a:lstStyle/>
+          <a:p>
+            <a:pPr algn="l"/>
+            <a:r>
+              <a:rPr sz="1800" b="1">
                 <a:solidFill>
                   <a:srgbClr val="182745"/>
                 </a:solidFill>
                 <a:latin typeface="Aptos"/>
               </a:rPr>
-              <a:t>APIs</a:t>
-            </a:r>
-          </a:p>
-        </p:txBody>
-      </p:sp>
-      <p:sp>
-        <p:nvSpPr>
-          <p:cNvPr id="8" name="TextBox 7"/>
-          <p:cNvSpPr txBox="1"/>
-          <p:nvPr/>
-        </p:nvSpPr>
-        <p:spPr>
-          <a:xfrm>
-            <a:off x="512064" y="3346704"/>
-            <a:ext cx="1755648" cy="530352"/>
-          </a:xfrm>
-          <a:prstGeom prst="rect">
-            <a:avLst/>
-          </a:prstGeom>
-          <a:noFill/>
-          <a:ln>
-            <a:noFill/>
-          </a:ln>
-        </p:spPr>
-        <p:txBody>
-          <a:bodyPr wrap="square" anchor="ctr">
-            <a:spAutoFit/>
-          </a:bodyPr>
-          <a:lstStyle/>
-          <a:p>
-            <a:pPr algn="ctr"/>
-            <a:r>
-              <a:rPr sz="1100" b="0">
+              <a:t>Clean</a:t>
+            </a:r>
+          </a:p>
+        </p:txBody>
+      </p:sp>
+      <p:sp>
+        <p:nvSpPr>
+          <p:cNvPr id="10" name="TextBox 9"/>
+          <p:cNvSpPr txBox="1"/>
+          <p:nvPr/>
+        </p:nvSpPr>
+        <p:spPr>
+          <a:xfrm>
+            <a:off x="3621024" y="2724912"/>
+            <a:ext cx="2084831" cy="804672"/>
+          </a:xfrm>
+          <a:prstGeom prst="rect">
+            <a:avLst/>
+          </a:prstGeom>
+          <a:noFill/>
+          <a:ln>
+            <a:noFill/>
+          </a:ln>
+        </p:spPr>
+        <p:txBody>
+          <a:bodyPr wrap="square" anchor="ctr">
+            <a:spAutoFit/>
+          </a:bodyPr>
+          <a:lstStyle/>
+          <a:p>
+            <a:pPr algn="l"/>
+            <a:r>
+              <a:rPr sz="1250" b="0">
+                <a:solidFill>
+                  <a:srgbClr val="1E2739"/>
+                </a:solidFill>
+                <a:latin typeface="Aptos"/>
+              </a:rPr>
+              <a:t>deduplicate
+normalize text
+select funding fields</a:t>
+            </a:r>
+          </a:p>
+        </p:txBody>
+      </p:sp>
+      <p:sp>
+        <p:nvSpPr>
+          <p:cNvPr id="11" name="TextBox 10"/>
+          <p:cNvSpPr txBox="1"/>
+          <p:nvPr/>
+        </p:nvSpPr>
+        <p:spPr>
+          <a:xfrm>
+            <a:off x="5769864" y="2615184"/>
+            <a:ext cx="320040" cy="320040"/>
+          </a:xfrm>
+          <a:prstGeom prst="rect">
+            <a:avLst/>
+          </a:prstGeom>
+          <a:noFill/>
+          <a:ln>
+            <a:noFill/>
+          </a:ln>
+        </p:spPr>
+        <p:txBody>
+          <a:bodyPr wrap="square" anchor="ctr">
+            <a:spAutoFit/>
+          </a:bodyPr>
+          <a:lstStyle/>
+          <a:p>
+            <a:pPr algn="ctr"/>
+            <a:r>
+              <a:rPr sz="1800" b="1">
+                <a:solidFill>
+                  <a:srgbClr val="8463C7"/>
+                </a:solidFill>
+                <a:latin typeface="Aptos"/>
+              </a:rPr>
+              <a:t>→</a:t>
+            </a:r>
+          </a:p>
+        </p:txBody>
+      </p:sp>
+      <p:sp>
+        <p:nvSpPr>
+          <p:cNvPr id="12" name="TextBox 11"/>
+          <p:cNvSpPr txBox="1"/>
+          <p:nvPr/>
+        </p:nvSpPr>
+        <p:spPr>
+          <a:xfrm>
+            <a:off x="6254496" y="2267712"/>
+            <a:ext cx="2148840" cy="347472"/>
+          </a:xfrm>
+          <a:prstGeom prst="rect">
+            <a:avLst/>
+          </a:prstGeom>
+          <a:noFill/>
+          <a:ln>
+            <a:noFill/>
+          </a:ln>
+        </p:spPr>
+        <p:txBody>
+          <a:bodyPr wrap="square" anchor="ctr">
+            <a:spAutoFit/>
+          </a:bodyPr>
+          <a:lstStyle/>
+          <a:p>
+            <a:pPr algn="l"/>
+            <a:r>
+              <a:rPr sz="1800" b="1">
+                <a:solidFill>
+                  <a:srgbClr val="182745"/>
+                </a:solidFill>
+                <a:latin typeface="Aptos"/>
+              </a:rPr>
+              <a:t>Harmonize</a:t>
+            </a:r>
+          </a:p>
+        </p:txBody>
+      </p:sp>
+      <p:sp>
+        <p:nvSpPr>
+          <p:cNvPr id="13" name="TextBox 12"/>
+          <p:cNvSpPr txBox="1"/>
+          <p:nvPr/>
+        </p:nvSpPr>
+        <p:spPr>
+          <a:xfrm>
+            <a:off x="6254496" y="2724912"/>
+            <a:ext cx="2084831" cy="804672"/>
+          </a:xfrm>
+          <a:prstGeom prst="rect">
+            <a:avLst/>
+          </a:prstGeom>
+          <a:noFill/>
+          <a:ln>
+            <a:noFill/>
+          </a:ln>
+        </p:spPr>
+        <p:txBody>
+          <a:bodyPr wrap="square" anchor="ctr">
+            <a:spAutoFit/>
+          </a:bodyPr>
+          <a:lstStyle/>
+          <a:p>
+            <a:pPr algn="l"/>
+            <a:r>
+              <a:rPr sz="1250" b="0">
+                <a:solidFill>
+                  <a:srgbClr val="1E2739"/>
+                </a:solidFill>
+                <a:latin typeface="Aptos"/>
+              </a:rPr>
+              <a:t>common grant schema
+controlled topic taxonomy</a:t>
+            </a:r>
+          </a:p>
+        </p:txBody>
+      </p:sp>
+      <p:sp>
+        <p:nvSpPr>
+          <p:cNvPr id="14" name="TextBox 13"/>
+          <p:cNvSpPr txBox="1"/>
+          <p:nvPr/>
+        </p:nvSpPr>
+        <p:spPr>
+          <a:xfrm>
+            <a:off x="8403336" y="2615184"/>
+            <a:ext cx="320040" cy="320040"/>
+          </a:xfrm>
+          <a:prstGeom prst="rect">
+            <a:avLst/>
+          </a:prstGeom>
+          <a:noFill/>
+          <a:ln>
+            <a:noFill/>
+          </a:ln>
+        </p:spPr>
+        <p:txBody>
+          <a:bodyPr wrap="square" anchor="ctr">
+            <a:spAutoFit/>
+          </a:bodyPr>
+          <a:lstStyle/>
+          <a:p>
+            <a:pPr algn="ctr"/>
+            <a:r>
+              <a:rPr sz="1800" b="1">
+                <a:solidFill>
+                  <a:srgbClr val="8463C7"/>
+                </a:solidFill>
+                <a:latin typeface="Aptos"/>
+              </a:rPr>
+              <a:t>→</a:t>
+            </a:r>
+          </a:p>
+        </p:txBody>
+      </p:sp>
+      <p:sp>
+        <p:nvSpPr>
+          <p:cNvPr id="15" name="TextBox 14"/>
+          <p:cNvSpPr txBox="1"/>
+          <p:nvPr/>
+        </p:nvSpPr>
+        <p:spPr>
+          <a:xfrm>
+            <a:off x="8887968" y="2267712"/>
+            <a:ext cx="2148840" cy="347472"/>
+          </a:xfrm>
+          <a:prstGeom prst="rect">
+            <a:avLst/>
+          </a:prstGeom>
+          <a:noFill/>
+          <a:ln>
+            <a:noFill/>
+          </a:ln>
+        </p:spPr>
+        <p:txBody>
+          <a:bodyPr wrap="square" anchor="ctr">
+            <a:spAutoFit/>
+          </a:bodyPr>
+          <a:lstStyle/>
+          <a:p>
+            <a:pPr algn="l"/>
+            <a:r>
+              <a:rPr sz="1800" b="1">
+                <a:solidFill>
+                  <a:srgbClr val="182745"/>
+                </a:solidFill>
+                <a:latin typeface="Aptos"/>
+              </a:rPr>
+              <a:t>Validate</a:t>
+            </a:r>
+          </a:p>
+        </p:txBody>
+      </p:sp>
+      <p:sp>
+        <p:nvSpPr>
+          <p:cNvPr id="16" name="TextBox 15"/>
+          <p:cNvSpPr txBox="1"/>
+          <p:nvPr/>
+        </p:nvSpPr>
+        <p:spPr>
+          <a:xfrm>
+            <a:off x="8887968" y="2724912"/>
+            <a:ext cx="2084831" cy="804672"/>
+          </a:xfrm>
+          <a:prstGeom prst="rect">
+            <a:avLst/>
+          </a:prstGeom>
+          <a:noFill/>
+          <a:ln>
+            <a:noFill/>
+          </a:ln>
+        </p:spPr>
+        <p:txBody>
+          <a:bodyPr wrap="square" anchor="ctr">
+            <a:spAutoFit/>
+          </a:bodyPr>
+          <a:lstStyle/>
+          <a:p>
+            <a:pPr algn="l"/>
+            <a:r>
+              <a:rPr sz="1250" b="0">
+                <a:solidFill>
+                  <a:srgbClr val="1E2739"/>
+                </a:solidFill>
+                <a:latin typeface="Aptos"/>
+              </a:rPr>
+              <a:t>quality rules
+source checks
+model catalogue</a:t>
+            </a:r>
+          </a:p>
+        </p:txBody>
+      </p:sp>
+      <p:sp>
+        <p:nvSpPr>
+          <p:cNvPr id="17" name="TextBox 16"/>
+          <p:cNvSpPr txBox="1"/>
+          <p:nvPr/>
+        </p:nvSpPr>
+        <p:spPr>
+          <a:xfrm>
+            <a:off x="960120" y="4572000"/>
+            <a:ext cx="1417320" cy="502920"/>
+          </a:xfrm>
+          <a:prstGeom prst="rect">
+            <a:avLst/>
+          </a:prstGeom>
+          <a:noFill/>
+          <a:ln>
+            <a:noFill/>
+          </a:ln>
+        </p:spPr>
+        <p:txBody>
+          <a:bodyPr wrap="square" anchor="ctr">
+            <a:spAutoFit/>
+          </a:bodyPr>
+          <a:lstStyle/>
+          <a:p>
+            <a:pPr algn="ctr"/>
+            <a:r>
+              <a:rPr sz="3100" b="1">
+                <a:solidFill>
+                  <a:srgbClr val="182745"/>
+                </a:solidFill>
+                <a:latin typeface="Aptos"/>
+              </a:rPr>
+              <a:t>3,339</a:t>
+            </a:r>
+          </a:p>
+        </p:txBody>
+      </p:sp>
+      <p:sp>
+        <p:nvSpPr>
+          <p:cNvPr id="18" name="TextBox 17"/>
+          <p:cNvSpPr txBox="1"/>
+          <p:nvPr/>
+        </p:nvSpPr>
+        <p:spPr>
+          <a:xfrm>
+            <a:off x="896112" y="5074920"/>
+            <a:ext cx="1554480" cy="274320"/>
+          </a:xfrm>
+          <a:prstGeom prst="rect">
+            <a:avLst/>
+          </a:prstGeom>
+          <a:noFill/>
+          <a:ln>
+            <a:noFill/>
+          </a:ln>
+        </p:spPr>
+        <p:txBody>
+          <a:bodyPr wrap="square" anchor="ctr">
+            <a:spAutoFit/>
+          </a:bodyPr>
+          <a:lstStyle/>
+          <a:p>
+            <a:pPr algn="ctr"/>
+            <a:r>
+              <a:rPr sz="1200" b="0">
                 <a:solidFill>
                   <a:srgbClr val="636D82"/>
                 </a:solidFill>
                 <a:latin typeface="Aptos"/>
               </a:rPr>
-              <a:t>NSF + OpenAlex
-acquisition</a:t>
-            </a:r>
-          </a:p>
-        </p:txBody>
-      </p:sp>
-      <p:sp>
-        <p:nvSpPr>
-          <p:cNvPr id="9" name="TextBox 8"/>
-          <p:cNvSpPr txBox="1"/>
-          <p:nvPr/>
-        </p:nvSpPr>
-        <p:spPr>
-          <a:xfrm>
-            <a:off x="2139696" y="2139696"/>
-            <a:ext cx="320040" cy="320040"/>
-          </a:xfrm>
-          <a:prstGeom prst="rect">
-            <a:avLst/>
-          </a:prstGeom>
-          <a:noFill/>
-          <a:ln>
-            <a:noFill/>
-          </a:ln>
-        </p:spPr>
-        <p:txBody>
-          <a:bodyPr wrap="square" anchor="ctr">
-            <a:spAutoFit/>
-          </a:bodyPr>
-          <a:lstStyle/>
-          <a:p>
-            <a:pPr algn="ctr"/>
-            <a:r>
-              <a:rPr sz="1800" b="1">
-                <a:solidFill>
-                  <a:srgbClr val="8463C7"/>
-                </a:solidFill>
-                <a:latin typeface="Aptos"/>
-              </a:rPr>
-              <a:t>→</a:t>
-            </a:r>
-          </a:p>
-        </p:txBody>
-      </p:sp>
-      <p:sp>
-        <p:nvSpPr>
-          <p:cNvPr id="10" name="Oval 9"/>
+              <a:t>integrated grants</a:t>
+            </a:r>
+          </a:p>
+        </p:txBody>
+      </p:sp>
+      <p:sp>
+        <p:nvSpPr>
+          <p:cNvPr id="19" name="Rounded Rectangle 18"/>
           <p:cNvSpPr/>
           <p:nvPr/>
         </p:nvSpPr>
         <p:spPr>
           <a:xfrm>
-            <a:off x="2916936" y="1920240"/>
-            <a:ext cx="749808" cy="749808"/>
-          </a:xfrm>
-          <a:prstGeom prst="ellipse">
+            <a:off x="2743200" y="4709160"/>
+            <a:ext cx="1508760" cy="420624"/>
+          </a:xfrm>
+          <a:prstGeom prst="roundRect">
             <a:avLst/>
           </a:prstGeom>
           <a:solidFill>
-            <a:srgbClr val="8463C7"/>
+            <a:srgbClr val="E8E8F8"/>
           </a:solidFill>
           <a:ln>
             <a:noFill/>
@@ -8422,173 +7854,58 @@
       </p:sp>
       <p:sp>
         <p:nvSpPr>
-          <p:cNvPr id="11" name="TextBox 10"/>
-          <p:cNvSpPr txBox="1"/>
-          <p:nvPr/>
-        </p:nvSpPr>
-        <p:spPr>
-          <a:xfrm>
-            <a:off x="2916936" y="2084831"/>
-            <a:ext cx="749808" cy="274320"/>
-          </a:xfrm>
-          <a:prstGeom prst="rect">
-            <a:avLst/>
-          </a:prstGeom>
-          <a:noFill/>
-          <a:ln>
-            <a:noFill/>
-          </a:ln>
-        </p:spPr>
-        <p:txBody>
-          <a:bodyPr wrap="square" anchor="ctr">
-            <a:spAutoFit/>
-          </a:bodyPr>
-          <a:lstStyle/>
-          <a:p>
-            <a:pPr algn="ctr"/>
-            <a:r>
-              <a:rPr sz="1500" b="1">
-                <a:solidFill>
-                  <a:srgbClr val="FFFFFF"/>
-                </a:solidFill>
-                <a:latin typeface="Aptos"/>
-              </a:rPr>
-              <a:t>2</a:t>
-            </a:r>
-          </a:p>
-        </p:txBody>
-      </p:sp>
-      <p:sp>
-        <p:nvSpPr>
-          <p:cNvPr id="12" name="TextBox 11"/>
-          <p:cNvSpPr txBox="1"/>
-          <p:nvPr/>
-        </p:nvSpPr>
-        <p:spPr>
-          <a:xfrm>
-            <a:off x="2414016" y="2907792"/>
-            <a:ext cx="1755648" cy="411480"/>
-          </a:xfrm>
-          <a:prstGeom prst="rect">
-            <a:avLst/>
-          </a:prstGeom>
-          <a:noFill/>
-          <a:ln>
-            <a:noFill/>
-          </a:ln>
-        </p:spPr>
-        <p:txBody>
-          <a:bodyPr wrap="square" anchor="ctr">
-            <a:spAutoFit/>
-          </a:bodyPr>
-          <a:lstStyle/>
-          <a:p>
-            <a:pPr algn="ctr"/>
-            <a:r>
-              <a:rPr sz="1500" b="1">
+          <p:cNvPr id="20" name="TextBox 19"/>
+          <p:cNvSpPr txBox="1"/>
+          <p:nvPr/>
+        </p:nvSpPr>
+        <p:spPr>
+          <a:xfrm>
+            <a:off x="2816352" y="4736592"/>
+            <a:ext cx="1362456" cy="338328"/>
+          </a:xfrm>
+          <a:prstGeom prst="rect">
+            <a:avLst/>
+          </a:prstGeom>
+          <a:noFill/>
+          <a:ln>
+            <a:noFill/>
+          </a:ln>
+        </p:spPr>
+        <p:txBody>
+          <a:bodyPr wrap="square" anchor="ctr">
+            <a:spAutoFit/>
+          </a:bodyPr>
+          <a:lstStyle/>
+          <a:p>
+            <a:pPr algn="ctr"/>
+            <a:r>
+              <a:rPr sz="1200" b="1">
                 <a:solidFill>
                   <a:srgbClr val="182745"/>
                 </a:solidFill>
                 <a:latin typeface="Aptos"/>
               </a:rPr>
-              <a:t>Python / pandas</a:t>
-            </a:r>
-          </a:p>
-        </p:txBody>
-      </p:sp>
-      <p:sp>
-        <p:nvSpPr>
-          <p:cNvPr id="13" name="TextBox 12"/>
-          <p:cNvSpPr txBox="1"/>
-          <p:nvPr/>
-        </p:nvSpPr>
-        <p:spPr>
-          <a:xfrm>
-            <a:off x="2414016" y="3346704"/>
-            <a:ext cx="1755648" cy="530352"/>
-          </a:xfrm>
-          <a:prstGeom prst="rect">
-            <a:avLst/>
-          </a:prstGeom>
-          <a:noFill/>
-          <a:ln>
-            <a:noFill/>
-          </a:ln>
-        </p:spPr>
-        <p:txBody>
-          <a:bodyPr wrap="square" anchor="ctr">
-            <a:spAutoFit/>
-          </a:bodyPr>
-          <a:lstStyle/>
-          <a:p>
-            <a:pPr algn="ctr"/>
-            <a:r>
-              <a:rPr sz="1100" b="0">
-                <a:solidFill>
-                  <a:srgbClr val="636D82"/>
-                </a:solidFill>
-                <a:latin typeface="Aptos"/>
-              </a:rPr>
-              <a:t>cleaning +
-harmonisation</a:t>
-            </a:r>
-          </a:p>
-        </p:txBody>
-      </p:sp>
-      <p:sp>
-        <p:nvSpPr>
-          <p:cNvPr id="14" name="TextBox 13"/>
-          <p:cNvSpPr txBox="1"/>
-          <p:nvPr/>
-        </p:nvSpPr>
-        <p:spPr>
-          <a:xfrm>
-            <a:off x="4041648" y="2139696"/>
-            <a:ext cx="320040" cy="320040"/>
-          </a:xfrm>
-          <a:prstGeom prst="rect">
-            <a:avLst/>
-          </a:prstGeom>
-          <a:noFill/>
-          <a:ln>
-            <a:noFill/>
-          </a:ln>
-        </p:spPr>
-        <p:txBody>
-          <a:bodyPr wrap="square" anchor="ctr">
-            <a:spAutoFit/>
-          </a:bodyPr>
-          <a:lstStyle/>
-          <a:p>
-            <a:pPr algn="ctr"/>
-            <a:r>
-              <a:rPr sz="1800" b="1">
-                <a:solidFill>
-                  <a:srgbClr val="8463C7"/>
-                </a:solidFill>
-                <a:latin typeface="Aptos"/>
-              </a:rPr>
-              <a:t>→</a:t>
-            </a:r>
-          </a:p>
-        </p:txBody>
-      </p:sp>
-      <p:sp>
-        <p:nvSpPr>
-          <p:cNvPr id="15" name="Oval 14"/>
+              <a:t>2,664 NSF</a:t>
+            </a:r>
+          </a:p>
+        </p:txBody>
+      </p:sp>
+      <p:sp>
+        <p:nvSpPr>
+          <p:cNvPr id="21" name="Rounded Rectangle 20"/>
           <p:cNvSpPr/>
           <p:nvPr/>
         </p:nvSpPr>
         <p:spPr>
           <a:xfrm>
-            <a:off x="4818888" y="1920240"/>
-            <a:ext cx="749808" cy="749808"/>
-          </a:xfrm>
-          <a:prstGeom prst="ellipse">
+            <a:off x="4480560" y="4709160"/>
+            <a:ext cx="1508760" cy="420624"/>
+          </a:xfrm>
+          <a:prstGeom prst="roundRect">
             <a:avLst/>
           </a:prstGeom>
           <a:solidFill>
-            <a:srgbClr val="9478CF"/>
+            <a:srgbClr val="E8E8F8"/>
           </a:solidFill>
           <a:ln>
             <a:noFill/>
@@ -8619,176 +7936,63 @@
       </p:sp>
       <p:sp>
         <p:nvSpPr>
-          <p:cNvPr id="16" name="TextBox 15"/>
-          <p:cNvSpPr txBox="1"/>
-          <p:nvPr/>
-        </p:nvSpPr>
-        <p:spPr>
-          <a:xfrm>
-            <a:off x="4818888" y="2084831"/>
-            <a:ext cx="749808" cy="274320"/>
-          </a:xfrm>
-          <a:prstGeom prst="rect">
-            <a:avLst/>
-          </a:prstGeom>
-          <a:noFill/>
-          <a:ln>
-            <a:noFill/>
-          </a:ln>
-        </p:spPr>
-        <p:txBody>
-          <a:bodyPr wrap="square" anchor="ctr">
-            <a:spAutoFit/>
-          </a:bodyPr>
-          <a:lstStyle/>
-          <a:p>
-            <a:pPr algn="ctr"/>
-            <a:r>
-              <a:rPr sz="1500" b="1">
-                <a:solidFill>
-                  <a:srgbClr val="FFFFFF"/>
-                </a:solidFill>
-                <a:latin typeface="Aptos"/>
-              </a:rPr>
-              <a:t>3</a:t>
-            </a:r>
-          </a:p>
-        </p:txBody>
-      </p:sp>
-      <p:sp>
-        <p:nvSpPr>
-          <p:cNvPr id="17" name="TextBox 16"/>
-          <p:cNvSpPr txBox="1"/>
-          <p:nvPr/>
-        </p:nvSpPr>
-        <p:spPr>
-          <a:xfrm>
-            <a:off x="4315968" y="2907792"/>
-            <a:ext cx="1755648" cy="411480"/>
-          </a:xfrm>
-          <a:prstGeom prst="rect">
-            <a:avLst/>
-          </a:prstGeom>
-          <a:noFill/>
-          <a:ln>
-            <a:noFill/>
-          </a:ln>
-        </p:spPr>
-        <p:txBody>
-          <a:bodyPr wrap="square" anchor="ctr">
-            <a:spAutoFit/>
-          </a:bodyPr>
-          <a:lstStyle/>
-          <a:p>
-            <a:pPr algn="ctr"/>
-            <a:r>
-              <a:rPr sz="1500" b="1" dirty="0">
+          <p:cNvPr id="22" name="TextBox 21"/>
+          <p:cNvSpPr txBox="1"/>
+          <p:nvPr/>
+        </p:nvSpPr>
+        <p:spPr>
+          <a:xfrm>
+            <a:off x="4553712" y="4736592"/>
+            <a:ext cx="1362456" cy="338328"/>
+          </a:xfrm>
+          <a:prstGeom prst="rect">
+            <a:avLst/>
+          </a:prstGeom>
+          <a:noFill/>
+          <a:ln>
+            <a:noFill/>
+          </a:ln>
+        </p:spPr>
+        <p:txBody>
+          <a:bodyPr wrap="square" anchor="ctr">
+            <a:spAutoFit/>
+          </a:bodyPr>
+          <a:lstStyle/>
+          <a:p>
+            <a:pPr algn="ctr"/>
+            <a:r>
+              <a:rPr sz="1200" b="1">
                 <a:solidFill>
                   <a:srgbClr val="182745"/>
                 </a:solidFill>
                 <a:latin typeface="Aptos"/>
               </a:rPr>
-              <a:t>EDA + quality</a:t>
-            </a:r>
-          </a:p>
-        </p:txBody>
-      </p:sp>
-      <p:sp>
-        <p:nvSpPr>
-          <p:cNvPr id="18" name="TextBox 17"/>
-          <p:cNvSpPr txBox="1"/>
-          <p:nvPr/>
-        </p:nvSpPr>
-        <p:spPr>
-          <a:xfrm>
-            <a:off x="4315968" y="3346704"/>
-            <a:ext cx="1755648" cy="530352"/>
-          </a:xfrm>
-          <a:prstGeom prst="rect">
-            <a:avLst/>
-          </a:prstGeom>
-          <a:noFill/>
-          <a:ln>
-            <a:noFill/>
-          </a:ln>
-        </p:spPr>
-        <p:txBody>
-          <a:bodyPr wrap="square" anchor="ctr">
-            <a:spAutoFit/>
-          </a:bodyPr>
-          <a:lstStyle/>
-          <a:p>
-            <a:pPr algn="ctr"/>
-            <a:r>
-              <a:rPr sz="1100" b="0">
-                <a:solidFill>
-                  <a:srgbClr val="636D82"/>
-                </a:solidFill>
-                <a:latin typeface="Aptos"/>
-              </a:rPr>
-              <a:t>topic/source
-analysis</a:t>
-            </a:r>
-          </a:p>
-        </p:txBody>
-      </p:sp>
-      <p:sp>
-        <p:nvSpPr>
-          <p:cNvPr id="19" name="TextBox 18"/>
-          <p:cNvSpPr txBox="1"/>
-          <p:nvPr/>
-        </p:nvSpPr>
-        <p:spPr>
-          <a:xfrm>
-            <a:off x="5943600" y="2139696"/>
-            <a:ext cx="320040" cy="320040"/>
-          </a:xfrm>
-          <a:prstGeom prst="rect">
-            <a:avLst/>
-          </a:prstGeom>
-          <a:noFill/>
-          <a:ln>
-            <a:noFill/>
-          </a:ln>
-        </p:spPr>
-        <p:txBody>
-          <a:bodyPr wrap="square" anchor="ctr">
-            <a:spAutoFit/>
-          </a:bodyPr>
-          <a:lstStyle/>
-          <a:p>
-            <a:pPr algn="ctr"/>
-            <a:r>
-              <a:rPr sz="1800" b="1">
-                <a:solidFill>
-                  <a:srgbClr val="8463C7"/>
-                </a:solidFill>
-                <a:latin typeface="Aptos"/>
-              </a:rPr>
-              <a:t>→</a:t>
-            </a:r>
-          </a:p>
-        </p:txBody>
-      </p:sp>
-      <p:sp>
-        <p:nvSpPr>
-          <p:cNvPr id="20" name="Oval 19"/>
+              <a:t>675 CORDIS</a:t>
+            </a:r>
+          </a:p>
+        </p:txBody>
+      </p:sp>
+      <p:sp>
+        <p:nvSpPr>
+          <p:cNvPr id="23" name="Rounded Rectangle 22"/>
           <p:cNvSpPr/>
           <p:nvPr/>
         </p:nvSpPr>
         <p:spPr>
           <a:xfrm>
-            <a:off x="6720840" y="1920240"/>
-            <a:ext cx="749808" cy="749808"/>
-          </a:xfrm>
-          <a:prstGeom prst="ellipse">
+            <a:off x="6583680" y="4434840"/>
+            <a:ext cx="4572000" cy="1234440"/>
+          </a:xfrm>
+          <a:prstGeom prst="roundRect">
             <a:avLst/>
           </a:prstGeom>
           <a:solidFill>
-            <a:srgbClr val="A48BD6"/>
+            <a:srgbClr val="FFFFFF"/>
           </a:solidFill>
           <a:ln>
-            <a:noFill/>
+            <a:solidFill>
+              <a:srgbClr val="E1E5EF"/>
+            </a:solidFill>
           </a:ln>
         </p:spPr>
         <p:style>
@@ -8816,196 +8020,20 @@
       </p:sp>
       <p:sp>
         <p:nvSpPr>
-          <p:cNvPr id="21" name="TextBox 20"/>
-          <p:cNvSpPr txBox="1"/>
-          <p:nvPr/>
-        </p:nvSpPr>
-        <p:spPr>
-          <a:xfrm>
-            <a:off x="6720840" y="2084831"/>
-            <a:ext cx="749808" cy="274320"/>
-          </a:xfrm>
-          <a:prstGeom prst="rect">
-            <a:avLst/>
-          </a:prstGeom>
-          <a:noFill/>
-          <a:ln>
-            <a:noFill/>
-          </a:ln>
-        </p:spPr>
-        <p:txBody>
-          <a:bodyPr wrap="square" anchor="ctr">
-            <a:spAutoFit/>
-          </a:bodyPr>
-          <a:lstStyle/>
-          <a:p>
-            <a:pPr algn="ctr"/>
-            <a:r>
-              <a:rPr sz="1500" b="1">
-                <a:solidFill>
-                  <a:srgbClr val="FFFFFF"/>
-                </a:solidFill>
-                <a:latin typeface="Aptos"/>
-              </a:rPr>
-              <a:t>4</a:t>
-            </a:r>
-          </a:p>
-        </p:txBody>
-      </p:sp>
-      <p:sp>
-        <p:nvSpPr>
-          <p:cNvPr id="22" name="TextBox 21"/>
-          <p:cNvSpPr txBox="1"/>
-          <p:nvPr/>
-        </p:nvSpPr>
-        <p:spPr>
-          <a:xfrm>
-            <a:off x="6217920" y="2907792"/>
-            <a:ext cx="1755648" cy="411480"/>
-          </a:xfrm>
-          <a:prstGeom prst="rect">
-            <a:avLst/>
-          </a:prstGeom>
-          <a:noFill/>
-          <a:ln>
-            <a:noFill/>
-          </a:ln>
-        </p:spPr>
-        <p:txBody>
-          <a:bodyPr wrap="square" anchor="ctr">
-            <a:spAutoFit/>
-          </a:bodyPr>
-          <a:lstStyle/>
-          <a:p>
-            <a:pPr algn="ctr"/>
-            <a:r>
-              <a:rPr sz="1500" b="1">
-                <a:solidFill>
-                  <a:srgbClr val="182745"/>
-                </a:solidFill>
-                <a:latin typeface="Aptos"/>
-              </a:rPr>
-              <a:t>ML / NLP</a:t>
-            </a:r>
-          </a:p>
-        </p:txBody>
-      </p:sp>
-      <p:sp>
-        <p:nvSpPr>
-          <p:cNvPr id="23" name="TextBox 22"/>
-          <p:cNvSpPr txBox="1"/>
-          <p:nvPr/>
-        </p:nvSpPr>
-        <p:spPr>
-          <a:xfrm>
-            <a:off x="6217920" y="3481075"/>
-            <a:ext cx="1755648" cy="261610"/>
-          </a:xfrm>
-          <a:prstGeom prst="rect">
-            <a:avLst/>
-          </a:prstGeom>
-          <a:noFill/>
-          <a:ln>
-            <a:noFill/>
-          </a:ln>
-        </p:spPr>
-        <p:txBody>
-          <a:bodyPr wrap="square" anchor="ctr">
-            <a:spAutoFit/>
-          </a:bodyPr>
-          <a:lstStyle/>
-          <a:p>
-            <a:pPr algn="ctr"/>
-            <a:r>
-              <a:rPr sz="1100" b="0" dirty="0">
-                <a:solidFill>
-                  <a:srgbClr val="636D82"/>
-                </a:solidFill>
-                <a:latin typeface="Aptos"/>
-              </a:rPr>
-              <a:t>TF-IDF </a:t>
-            </a:r>
-            <a:r>
-              <a:rPr lang="en-US" sz="1100" dirty="0">
-                <a:solidFill>
-                  <a:srgbClr val="636D82"/>
-                </a:solidFill>
-                <a:latin typeface="Aptos"/>
-              </a:rPr>
-              <a:t> text </a:t>
-            </a:r>
-            <a:r>
-              <a:rPr lang="en-US" sz="1100" dirty="0" err="1">
-                <a:solidFill>
-                  <a:srgbClr val="636D82"/>
-                </a:solidFill>
-                <a:latin typeface="Aptos"/>
-              </a:rPr>
-              <a:t>somilarity</a:t>
-            </a:r>
-            <a:endParaRPr sz="1100" b="0" dirty="0">
-              <a:solidFill>
-                <a:srgbClr val="636D82"/>
-              </a:solidFill>
-              <a:latin typeface="Aptos"/>
-            </a:endParaRPr>
-          </a:p>
-        </p:txBody>
-      </p:sp>
-      <p:sp>
-        <p:nvSpPr>
-          <p:cNvPr id="24" name="TextBox 23"/>
-          <p:cNvSpPr txBox="1"/>
-          <p:nvPr/>
-        </p:nvSpPr>
-        <p:spPr>
-          <a:xfrm>
-            <a:off x="7845552" y="2139696"/>
-            <a:ext cx="320040" cy="320040"/>
-          </a:xfrm>
-          <a:prstGeom prst="rect">
-            <a:avLst/>
-          </a:prstGeom>
-          <a:noFill/>
-          <a:ln>
-            <a:noFill/>
-          </a:ln>
-        </p:spPr>
-        <p:txBody>
-          <a:bodyPr wrap="square" anchor="ctr">
-            <a:spAutoFit/>
-          </a:bodyPr>
-          <a:lstStyle/>
-          <a:p>
-            <a:pPr algn="ctr"/>
-            <a:r>
-              <a:rPr sz="1800" b="1">
-                <a:solidFill>
-                  <a:srgbClr val="8463C7"/>
-                </a:solidFill>
-                <a:latin typeface="Aptos"/>
-              </a:rPr>
-              <a:t>→</a:t>
-            </a:r>
-          </a:p>
-        </p:txBody>
-      </p:sp>
-      <p:sp>
-        <p:nvSpPr>
-          <p:cNvPr id="25" name="Oval 24"/>
+          <p:cNvPr id="24" name="Rounded Rectangle 23"/>
           <p:cNvSpPr/>
           <p:nvPr/>
         </p:nvSpPr>
         <p:spPr>
           <a:xfrm>
-            <a:off x="8622792" y="1920240"/>
-            <a:ext cx="749808" cy="749808"/>
-          </a:xfrm>
-          <a:prstGeom prst="ellipse">
+            <a:off x="6784848" y="4617720"/>
+            <a:ext cx="502920" cy="109728"/>
+          </a:xfrm>
+          <a:prstGeom prst="roundRect">
             <a:avLst/>
           </a:prstGeom>
           <a:solidFill>
-            <a:srgbClr val="B099DB"/>
+            <a:srgbClr val="8463C7"/>
           </a:solidFill>
           <a:ln>
             <a:noFill/>
@@ -9036,38 +8064,76 @@
       </p:sp>
       <p:sp>
         <p:nvSpPr>
+          <p:cNvPr id="25" name="TextBox 24"/>
+          <p:cNvSpPr txBox="1"/>
+          <p:nvPr/>
+        </p:nvSpPr>
+        <p:spPr>
+          <a:xfrm>
+            <a:off x="6803136" y="4818888"/>
+            <a:ext cx="4133087" cy="411480"/>
+          </a:xfrm>
+          <a:prstGeom prst="rect">
+            <a:avLst/>
+          </a:prstGeom>
+          <a:noFill/>
+          <a:ln>
+            <a:noFill/>
+          </a:ln>
+        </p:spPr>
+        <p:txBody>
+          <a:bodyPr wrap="square" anchor="ctr">
+            <a:spAutoFit/>
+          </a:bodyPr>
+          <a:lstStyle/>
+          <a:p>
+            <a:pPr algn="l"/>
+            <a:r>
+              <a:rPr sz="1700" b="1">
+                <a:solidFill>
+                  <a:srgbClr val="182745"/>
+                </a:solidFill>
+                <a:latin typeface="Aptos"/>
+              </a:rPr>
+              <a:t>Deliberate data-quality decision</a:t>
+            </a:r>
+          </a:p>
+        </p:txBody>
+      </p:sp>
+      <p:sp>
+        <p:nvSpPr>
           <p:cNvPr id="26" name="TextBox 25"/>
           <p:cNvSpPr txBox="1"/>
           <p:nvPr/>
         </p:nvSpPr>
         <p:spPr>
           <a:xfrm>
-            <a:off x="8622792" y="2084831"/>
-            <a:ext cx="749808" cy="274320"/>
-          </a:xfrm>
-          <a:prstGeom prst="rect">
-            <a:avLst/>
-          </a:prstGeom>
-          <a:noFill/>
-          <a:ln>
-            <a:noFill/>
-          </a:ln>
-        </p:spPr>
-        <p:txBody>
-          <a:bodyPr wrap="square" anchor="ctr">
-            <a:spAutoFit/>
-          </a:bodyPr>
-          <a:lstStyle/>
-          <a:p>
-            <a:pPr algn="ctr"/>
-            <a:r>
-              <a:rPr sz="1500" b="1">
-                <a:solidFill>
-                  <a:srgbClr val="FFFFFF"/>
-                </a:solidFill>
-                <a:latin typeface="Aptos"/>
-              </a:rPr>
-              <a:t>5</a:t>
+            <a:off x="6803136" y="5284617"/>
+            <a:ext cx="4133087" cy="284693"/>
+          </a:xfrm>
+          <a:prstGeom prst="rect">
+            <a:avLst/>
+          </a:prstGeom>
+          <a:noFill/>
+          <a:ln>
+            <a:noFill/>
+          </a:ln>
+        </p:spPr>
+        <p:txBody>
+          <a:bodyPr wrap="square" anchor="ctr">
+            <a:spAutoFit/>
+          </a:bodyPr>
+          <a:lstStyle/>
+          <a:p>
+            <a:pPr algn="l"/>
+            <a:r>
+              <a:rPr sz="1250" b="0" dirty="0">
+                <a:solidFill>
+                  <a:srgbClr val="1E2739"/>
+                </a:solidFill>
+                <a:latin typeface="Aptos"/>
+              </a:rPr>
+              <a:t>NSF remains USD; CORDIS remains EUR.</a:t>
             </a:r>
           </a:p>
         </p:txBody>
@@ -9075,380 +8141,6 @@
       <p:sp>
         <p:nvSpPr>
           <p:cNvPr id="27" name="TextBox 26"/>
-          <p:cNvSpPr txBox="1"/>
-          <p:nvPr/>
-        </p:nvSpPr>
-        <p:spPr>
-          <a:xfrm>
-            <a:off x="8119872" y="2907792"/>
-            <a:ext cx="1755648" cy="411480"/>
-          </a:xfrm>
-          <a:prstGeom prst="rect">
-            <a:avLst/>
-          </a:prstGeom>
-          <a:noFill/>
-          <a:ln>
-            <a:noFill/>
-          </a:ln>
-        </p:spPr>
-        <p:txBody>
-          <a:bodyPr wrap="square" anchor="ctr">
-            <a:spAutoFit/>
-          </a:bodyPr>
-          <a:lstStyle/>
-          <a:p>
-            <a:pPr algn="ctr"/>
-            <a:r>
-              <a:rPr sz="1500" b="1">
-                <a:solidFill>
-                  <a:srgbClr val="182745"/>
-                </a:solidFill>
-                <a:latin typeface="Aptos"/>
-              </a:rPr>
-              <a:t>Tableau</a:t>
-            </a:r>
-          </a:p>
-        </p:txBody>
-      </p:sp>
-      <p:sp>
-        <p:nvSpPr>
-          <p:cNvPr id="28" name="TextBox 27"/>
-          <p:cNvSpPr txBox="1"/>
-          <p:nvPr/>
-        </p:nvSpPr>
-        <p:spPr>
-          <a:xfrm>
-            <a:off x="8119872" y="3346704"/>
-            <a:ext cx="1755648" cy="530352"/>
-          </a:xfrm>
-          <a:prstGeom prst="rect">
-            <a:avLst/>
-          </a:prstGeom>
-          <a:noFill/>
-          <a:ln>
-            <a:noFill/>
-          </a:ln>
-        </p:spPr>
-        <p:txBody>
-          <a:bodyPr wrap="square" anchor="ctr">
-            <a:spAutoFit/>
-          </a:bodyPr>
-          <a:lstStyle/>
-          <a:p>
-            <a:pPr algn="ctr"/>
-            <a:r>
-              <a:rPr sz="1100" b="0" dirty="0">
-                <a:solidFill>
-                  <a:srgbClr val="636D82"/>
-                </a:solidFill>
-                <a:latin typeface="Aptos"/>
-              </a:rPr>
-              <a:t>funding
-landscape</a:t>
-            </a:r>
-          </a:p>
-        </p:txBody>
-      </p:sp>
-      <p:sp>
-        <p:nvSpPr>
-          <p:cNvPr id="29" name="TextBox 28"/>
-          <p:cNvSpPr txBox="1"/>
-          <p:nvPr/>
-        </p:nvSpPr>
-        <p:spPr>
-          <a:xfrm>
-            <a:off x="9747504" y="2139696"/>
-            <a:ext cx="320040" cy="320040"/>
-          </a:xfrm>
-          <a:prstGeom prst="rect">
-            <a:avLst/>
-          </a:prstGeom>
-          <a:noFill/>
-          <a:ln>
-            <a:noFill/>
-          </a:ln>
-        </p:spPr>
-        <p:txBody>
-          <a:bodyPr wrap="square" anchor="ctr">
-            <a:spAutoFit/>
-          </a:bodyPr>
-          <a:lstStyle/>
-          <a:p>
-            <a:pPr algn="ctr"/>
-            <a:r>
-              <a:rPr sz="1800" b="1">
-                <a:solidFill>
-                  <a:srgbClr val="8463C7"/>
-                </a:solidFill>
-                <a:latin typeface="Aptos"/>
-              </a:rPr>
-              <a:t>→</a:t>
-            </a:r>
-          </a:p>
-        </p:txBody>
-      </p:sp>
-      <p:sp>
-        <p:nvSpPr>
-          <p:cNvPr id="30" name="Oval 29"/>
-          <p:cNvSpPr/>
-          <p:nvPr/>
-        </p:nvSpPr>
-        <p:spPr>
-          <a:xfrm>
-            <a:off x="10524744" y="1920240"/>
-            <a:ext cx="749808" cy="749808"/>
-          </a:xfrm>
-          <a:prstGeom prst="ellipse">
-            <a:avLst/>
-          </a:prstGeom>
-          <a:solidFill>
-            <a:srgbClr val="BEA4DE"/>
-          </a:solidFill>
-          <a:ln>
-            <a:noFill/>
-          </a:ln>
-        </p:spPr>
-        <p:style>
-          <a:lnRef idx="1">
-            <a:schemeClr val="accent1"/>
-          </a:lnRef>
-          <a:fillRef idx="3">
-            <a:schemeClr val="accent1"/>
-          </a:fillRef>
-          <a:effectRef idx="2">
-            <a:schemeClr val="accent1"/>
-          </a:effectRef>
-          <a:fontRef idx="minor">
-            <a:schemeClr val="lt1"/>
-          </a:fontRef>
-        </p:style>
-        <p:txBody>
-          <a:bodyPr rtlCol="0" anchor="ctr"/>
-          <a:lstStyle/>
-          <a:p>
-            <a:pPr algn="ctr"/>
-            <a:endParaRPr/>
-          </a:p>
-        </p:txBody>
-      </p:sp>
-      <p:sp>
-        <p:nvSpPr>
-          <p:cNvPr id="31" name="TextBox 30"/>
-          <p:cNvSpPr txBox="1"/>
-          <p:nvPr/>
-        </p:nvSpPr>
-        <p:spPr>
-          <a:xfrm>
-            <a:off x="10524744" y="2084831"/>
-            <a:ext cx="749808" cy="274320"/>
-          </a:xfrm>
-          <a:prstGeom prst="rect">
-            <a:avLst/>
-          </a:prstGeom>
-          <a:noFill/>
-          <a:ln>
-            <a:noFill/>
-          </a:ln>
-        </p:spPr>
-        <p:txBody>
-          <a:bodyPr wrap="square" anchor="ctr">
-            <a:spAutoFit/>
-          </a:bodyPr>
-          <a:lstStyle/>
-          <a:p>
-            <a:pPr algn="ctr"/>
-            <a:r>
-              <a:rPr sz="1500" b="1">
-                <a:solidFill>
-                  <a:srgbClr val="FFFFFF"/>
-                </a:solidFill>
-                <a:latin typeface="Aptos"/>
-              </a:rPr>
-              <a:t>6</a:t>
-            </a:r>
-          </a:p>
-        </p:txBody>
-      </p:sp>
-      <p:sp>
-        <p:nvSpPr>
-          <p:cNvPr id="32" name="TextBox 31"/>
-          <p:cNvSpPr txBox="1"/>
-          <p:nvPr/>
-        </p:nvSpPr>
-        <p:spPr>
-          <a:xfrm>
-            <a:off x="10021824" y="2907792"/>
-            <a:ext cx="1755648" cy="411480"/>
-          </a:xfrm>
-          <a:prstGeom prst="rect">
-            <a:avLst/>
-          </a:prstGeom>
-          <a:noFill/>
-          <a:ln>
-            <a:noFill/>
-          </a:ln>
-        </p:spPr>
-        <p:txBody>
-          <a:bodyPr wrap="square" anchor="ctr">
-            <a:spAutoFit/>
-          </a:bodyPr>
-          <a:lstStyle/>
-          <a:p>
-            <a:pPr algn="ctr"/>
-            <a:r>
-              <a:rPr sz="1500" b="1">
-                <a:solidFill>
-                  <a:srgbClr val="182745"/>
-                </a:solidFill>
-                <a:latin typeface="Aptos"/>
-              </a:rPr>
-              <a:t>Streamlit</a:t>
-            </a:r>
-          </a:p>
-        </p:txBody>
-      </p:sp>
-      <p:sp>
-        <p:nvSpPr>
-          <p:cNvPr id="33" name="TextBox 32"/>
-          <p:cNvSpPr txBox="1"/>
-          <p:nvPr/>
-        </p:nvSpPr>
-        <p:spPr>
-          <a:xfrm>
-            <a:off x="10021824" y="3346704"/>
-            <a:ext cx="1755648" cy="530352"/>
-          </a:xfrm>
-          <a:prstGeom prst="rect">
-            <a:avLst/>
-          </a:prstGeom>
-          <a:noFill/>
-          <a:ln>
-            <a:noFill/>
-          </a:ln>
-        </p:spPr>
-        <p:txBody>
-          <a:bodyPr wrap="square" anchor="ctr">
-            <a:spAutoFit/>
-          </a:bodyPr>
-          <a:lstStyle/>
-          <a:p>
-            <a:pPr algn="ctr"/>
-            <a:r>
-              <a:rPr sz="1100" b="0">
-                <a:solidFill>
-                  <a:srgbClr val="636D82"/>
-                </a:solidFill>
-                <a:latin typeface="Aptos"/>
-              </a:rPr>
-              <a:t>decision-support
-application</a:t>
-            </a:r>
-          </a:p>
-        </p:txBody>
-      </p:sp>
-      <p:sp>
-        <p:nvSpPr>
-          <p:cNvPr id="35" name="Rounded Rectangle 34"/>
-          <p:cNvSpPr/>
-          <p:nvPr/>
-        </p:nvSpPr>
-        <p:spPr>
-          <a:xfrm>
-            <a:off x="1965960" y="5532120"/>
-            <a:ext cx="8229600" cy="420624"/>
-          </a:xfrm>
-          <a:prstGeom prst="roundRect">
-            <a:avLst/>
-          </a:prstGeom>
-          <a:solidFill>
-            <a:srgbClr val="E8E8F8"/>
-          </a:solidFill>
-          <a:ln>
-            <a:noFill/>
-          </a:ln>
-        </p:spPr>
-        <p:style>
-          <a:lnRef idx="1">
-            <a:schemeClr val="accent1"/>
-          </a:lnRef>
-          <a:fillRef idx="3">
-            <a:schemeClr val="accent1"/>
-          </a:fillRef>
-          <a:effectRef idx="2">
-            <a:schemeClr val="accent1"/>
-          </a:effectRef>
-          <a:fontRef idx="minor">
-            <a:schemeClr val="lt1"/>
-          </a:fontRef>
-        </p:style>
-        <p:txBody>
-          <a:bodyPr rtlCol="0" anchor="ctr"/>
-          <a:lstStyle/>
-          <a:p>
-            <a:pPr algn="ctr"/>
-            <a:endParaRPr/>
-          </a:p>
-        </p:txBody>
-      </p:sp>
-      <p:sp>
-        <p:nvSpPr>
-          <p:cNvPr id="36" name="TextBox 35"/>
-          <p:cNvSpPr txBox="1"/>
-          <p:nvPr/>
-        </p:nvSpPr>
-        <p:spPr>
-          <a:xfrm>
-            <a:off x="2039112" y="5590216"/>
-            <a:ext cx="8083296" cy="276999"/>
-          </a:xfrm>
-          <a:prstGeom prst="rect">
-            <a:avLst/>
-          </a:prstGeom>
-          <a:noFill/>
-          <a:ln>
-            <a:noFill/>
-          </a:ln>
-        </p:spPr>
-        <p:txBody>
-          <a:bodyPr wrap="square" anchor="ctr">
-            <a:spAutoFit/>
-          </a:bodyPr>
-          <a:lstStyle/>
-          <a:p>
-            <a:pPr algn="ctr"/>
-            <a:r>
-              <a:rPr sz="1200" b="1" dirty="0">
-                <a:solidFill>
-                  <a:srgbClr val="182745"/>
-                </a:solidFill>
-                <a:latin typeface="Aptos"/>
-              </a:rPr>
-              <a:t>The concepts became stages of one usable product</a:t>
-            </a:r>
-            <a:r>
-              <a:rPr lang="en-US" sz="1200" b="1" dirty="0">
-                <a:solidFill>
-                  <a:srgbClr val="182745"/>
-                </a:solidFill>
-                <a:latin typeface="Aptos"/>
-              </a:rPr>
-              <a:t>, </a:t>
-            </a:r>
-            <a:r>
-              <a:rPr sz="1200" b="1" dirty="0">
-                <a:solidFill>
-                  <a:srgbClr val="182745"/>
-                </a:solidFill>
-                <a:latin typeface="Aptos"/>
-              </a:rPr>
-              <a:t>not isolated demonstrations.</a:t>
-            </a:r>
-          </a:p>
-        </p:txBody>
-      </p:sp>
-      <p:sp>
-        <p:nvSpPr>
-          <p:cNvPr id="37" name="TextBox 36"/>
           <p:cNvSpPr txBox="1"/>
           <p:nvPr/>
         </p:nvSpPr>
@@ -9479,7 +8171,7 @@
                 </a:solidFill>
                 <a:latin typeface="Aptos"/>
               </a:rPr>
-              <a:t>6</a:t>
+              <a:t>4</a:t>
             </a:r>
           </a:p>
         </p:txBody>
@@ -9550,7 +8242,7 @@
                 </a:solidFill>
                 <a:latin typeface="Aptos"/>
               </a:rPr>
-              <a:t>Building a trustworthy research landscape</a:t>
+              <a:t>From bootcamp concepts to one data product</a:t>
             </a:r>
           </a:p>
         </p:txBody>
@@ -9607,8 +8299,8 @@
         </p:nvSpPr>
         <p:spPr>
           <a:xfrm>
-            <a:off x="658368" y="1226855"/>
-            <a:ext cx="10789920" cy="307777"/>
+            <a:off x="658368" y="1170432"/>
+            <a:ext cx="10789920" cy="420624"/>
           </a:xfrm>
           <a:prstGeom prst="rect">
             <a:avLst/>
@@ -9626,51 +8318,33 @@
           <a:p>
             <a:pPr algn="l"/>
             <a:r>
-              <a:rPr sz="1400" b="0" dirty="0">
+              <a:rPr sz="1400" b="0">
                 <a:solidFill>
                   <a:srgbClr val="636D82"/>
                 </a:solidFill>
                 <a:latin typeface="Aptos"/>
               </a:rPr>
-              <a:t>The important work was deciding what to harmonize</a:t>
-            </a:r>
-            <a:r>
-              <a:rPr lang="en-US" sz="1400" b="0" dirty="0">
-                <a:solidFill>
-                  <a:srgbClr val="636D82"/>
-                </a:solidFill>
-                <a:latin typeface="Aptos"/>
-              </a:rPr>
-              <a:t> </a:t>
-            </a:r>
-            <a:r>
-              <a:rPr sz="1400" b="0" dirty="0">
-                <a:solidFill>
-                  <a:srgbClr val="636D82"/>
-                </a:solidFill>
-                <a:latin typeface="Aptos"/>
-              </a:rPr>
-              <a:t>and what not to.</a:t>
-            </a:r>
-          </a:p>
-        </p:txBody>
-      </p:sp>
-      <p:sp>
-        <p:nvSpPr>
-          <p:cNvPr id="5" name="Rounded Rectangle 4"/>
+              <a:t>The skills became stages of a single end-to-end workflow.</a:t>
+            </a:r>
+          </a:p>
+        </p:txBody>
+      </p:sp>
+      <p:sp>
+        <p:nvSpPr>
+          <p:cNvPr id="5" name="Oval 4"/>
           <p:cNvSpPr/>
           <p:nvPr/>
         </p:nvSpPr>
         <p:spPr>
           <a:xfrm>
-            <a:off x="777240" y="1828800"/>
-            <a:ext cx="10652760" cy="2240280"/>
-          </a:xfrm>
-          <a:prstGeom prst="roundRect">
+            <a:off x="1014984" y="1920240"/>
+            <a:ext cx="749808" cy="749808"/>
+          </a:xfrm>
+          <a:prstGeom prst="ellipse">
             <a:avLst/>
           </a:prstGeom>
           <a:solidFill>
-            <a:srgbClr val="F2F4FA"/>
+            <a:srgbClr val="7552BE"/>
           </a:solidFill>
           <a:ln>
             <a:noFill/>
@@ -9707,105 +8381,142 @@
         </p:nvSpPr>
         <p:spPr>
           <a:xfrm>
-            <a:off x="987552" y="2267712"/>
-            <a:ext cx="2148840" cy="347472"/>
-          </a:xfrm>
-          <a:prstGeom prst="rect">
-            <a:avLst/>
-          </a:prstGeom>
-          <a:noFill/>
-          <a:ln>
-            <a:noFill/>
-          </a:ln>
-        </p:spPr>
-        <p:txBody>
-          <a:bodyPr wrap="square" anchor="ctr">
-            <a:spAutoFit/>
-          </a:bodyPr>
-          <a:lstStyle/>
-          <a:p>
-            <a:pPr algn="l"/>
+            <a:off x="1014984" y="2084831"/>
+            <a:ext cx="749808" cy="274320"/>
+          </a:xfrm>
+          <a:prstGeom prst="rect">
+            <a:avLst/>
+          </a:prstGeom>
+          <a:noFill/>
+          <a:ln>
+            <a:noFill/>
+          </a:ln>
+        </p:spPr>
+        <p:txBody>
+          <a:bodyPr wrap="square" anchor="ctr">
+            <a:spAutoFit/>
+          </a:bodyPr>
+          <a:lstStyle/>
+          <a:p>
+            <a:pPr algn="ctr"/>
+            <a:r>
+              <a:rPr sz="1500" b="1">
+                <a:solidFill>
+                  <a:srgbClr val="FFFFFF"/>
+                </a:solidFill>
+                <a:latin typeface="Aptos"/>
+              </a:rPr>
+              <a:t>1</a:t>
+            </a:r>
+          </a:p>
+        </p:txBody>
+      </p:sp>
+      <p:sp>
+        <p:nvSpPr>
+          <p:cNvPr id="7" name="TextBox 6"/>
+          <p:cNvSpPr txBox="1"/>
+          <p:nvPr/>
+        </p:nvSpPr>
+        <p:spPr>
+          <a:xfrm>
+            <a:off x="512064" y="2907792"/>
+            <a:ext cx="1755648" cy="411480"/>
+          </a:xfrm>
+          <a:prstGeom prst="rect">
+            <a:avLst/>
+          </a:prstGeom>
+          <a:noFill/>
+          <a:ln>
+            <a:noFill/>
+          </a:ln>
+        </p:spPr>
+        <p:txBody>
+          <a:bodyPr wrap="square" anchor="ctr">
+            <a:spAutoFit/>
+          </a:bodyPr>
+          <a:lstStyle/>
+          <a:p>
+            <a:pPr algn="ctr"/>
+            <a:r>
+              <a:rPr sz="1500" b="1">
+                <a:solidFill>
+                  <a:srgbClr val="182745"/>
+                </a:solidFill>
+                <a:latin typeface="Aptos"/>
+              </a:rPr>
+              <a:t>APIs</a:t>
+            </a:r>
+          </a:p>
+        </p:txBody>
+      </p:sp>
+      <p:sp>
+        <p:nvSpPr>
+          <p:cNvPr id="8" name="TextBox 7"/>
+          <p:cNvSpPr txBox="1"/>
+          <p:nvPr/>
+        </p:nvSpPr>
+        <p:spPr>
+          <a:xfrm>
+            <a:off x="512064" y="3346704"/>
+            <a:ext cx="1755648" cy="530352"/>
+          </a:xfrm>
+          <a:prstGeom prst="rect">
+            <a:avLst/>
+          </a:prstGeom>
+          <a:noFill/>
+          <a:ln>
+            <a:noFill/>
+          </a:ln>
+        </p:spPr>
+        <p:txBody>
+          <a:bodyPr wrap="square" anchor="ctr">
+            <a:spAutoFit/>
+          </a:bodyPr>
+          <a:lstStyle/>
+          <a:p>
+            <a:pPr algn="ctr"/>
+            <a:r>
+              <a:rPr sz="1100" b="0">
+                <a:solidFill>
+                  <a:srgbClr val="636D82"/>
+                </a:solidFill>
+                <a:latin typeface="Aptos"/>
+              </a:rPr>
+              <a:t>NSF + OpenAlex
+acquisition</a:t>
+            </a:r>
+          </a:p>
+        </p:txBody>
+      </p:sp>
+      <p:sp>
+        <p:nvSpPr>
+          <p:cNvPr id="9" name="TextBox 8"/>
+          <p:cNvSpPr txBox="1"/>
+          <p:nvPr/>
+        </p:nvSpPr>
+        <p:spPr>
+          <a:xfrm>
+            <a:off x="2139696" y="2139696"/>
+            <a:ext cx="320040" cy="320040"/>
+          </a:xfrm>
+          <a:prstGeom prst="rect">
+            <a:avLst/>
+          </a:prstGeom>
+          <a:noFill/>
+          <a:ln>
+            <a:noFill/>
+          </a:ln>
+        </p:spPr>
+        <p:txBody>
+          <a:bodyPr wrap="square" anchor="ctr">
+            <a:spAutoFit/>
+          </a:bodyPr>
+          <a:lstStyle/>
+          <a:p>
+            <a:pPr algn="ctr"/>
             <a:r>
               <a:rPr sz="1800" b="1">
                 <a:solidFill>
-                  <a:srgbClr val="182745"/>
-                </a:solidFill>
-                <a:latin typeface="Aptos"/>
-              </a:rPr>
-              <a:t>Acquire</a:t>
-            </a:r>
-          </a:p>
-        </p:txBody>
-      </p:sp>
-      <p:sp>
-        <p:nvSpPr>
-          <p:cNvPr id="7" name="TextBox 6"/>
-          <p:cNvSpPr txBox="1"/>
-          <p:nvPr/>
-        </p:nvSpPr>
-        <p:spPr>
-          <a:xfrm>
-            <a:off x="987552" y="2724912"/>
-            <a:ext cx="2084831" cy="804672"/>
-          </a:xfrm>
-          <a:prstGeom prst="rect">
-            <a:avLst/>
-          </a:prstGeom>
-          <a:noFill/>
-          <a:ln>
-            <a:noFill/>
-          </a:ln>
-        </p:spPr>
-        <p:txBody>
-          <a:bodyPr wrap="square" anchor="ctr">
-            <a:spAutoFit/>
-          </a:bodyPr>
-          <a:lstStyle/>
-          <a:p>
-            <a:pPr algn="l"/>
-            <a:r>
-              <a:rPr sz="1250" b="0">
-                <a:solidFill>
-                  <a:srgbClr val="1E2739"/>
-                </a:solidFill>
-                <a:latin typeface="Aptos"/>
-              </a:rPr>
-              <a:t>NSF API
-CORDIS bulk CSV
-OpenAlex API</a:t>
-            </a:r>
-          </a:p>
-        </p:txBody>
-      </p:sp>
-      <p:sp>
-        <p:nvSpPr>
-          <p:cNvPr id="8" name="TextBox 7"/>
-          <p:cNvSpPr txBox="1"/>
-          <p:nvPr/>
-        </p:nvSpPr>
-        <p:spPr>
-          <a:xfrm>
-            <a:off x="3136392" y="2615184"/>
-            <a:ext cx="320040" cy="320040"/>
-          </a:xfrm>
-          <a:prstGeom prst="rect">
-            <a:avLst/>
-          </a:prstGeom>
-          <a:noFill/>
-          <a:ln>
-            <a:noFill/>
-          </a:ln>
-        </p:spPr>
-        <p:txBody>
-          <a:bodyPr wrap="square" anchor="ctr">
-            <a:spAutoFit/>
-          </a:bodyPr>
-          <a:lstStyle/>
-          <a:p>
-            <a:pPr algn="ctr"/>
-            <a:r>
-              <a:rPr sz="1800" b="1" dirty="0">
-                <a:solidFill>
                   <a:srgbClr val="8463C7"/>
                 </a:solidFill>
                 <a:latin typeface="Aptos"/>
@@ -9817,405 +8528,20 @@
       </p:sp>
       <p:sp>
         <p:nvSpPr>
-          <p:cNvPr id="9" name="TextBox 8"/>
-          <p:cNvSpPr txBox="1"/>
-          <p:nvPr/>
-        </p:nvSpPr>
-        <p:spPr>
-          <a:xfrm>
-            <a:off x="3621024" y="2267712"/>
-            <a:ext cx="2148840" cy="347472"/>
-          </a:xfrm>
-          <a:prstGeom prst="rect">
-            <a:avLst/>
-          </a:prstGeom>
-          <a:noFill/>
-          <a:ln>
-            <a:noFill/>
-          </a:ln>
-        </p:spPr>
-        <p:txBody>
-          <a:bodyPr wrap="square" anchor="ctr">
-            <a:spAutoFit/>
-          </a:bodyPr>
-          <a:lstStyle/>
-          <a:p>
-            <a:pPr algn="l"/>
-            <a:r>
-              <a:rPr sz="1800" b="1">
-                <a:solidFill>
-                  <a:srgbClr val="182745"/>
-                </a:solidFill>
-                <a:latin typeface="Aptos"/>
-              </a:rPr>
-              <a:t>Clean</a:t>
-            </a:r>
-          </a:p>
-        </p:txBody>
-      </p:sp>
-      <p:sp>
-        <p:nvSpPr>
-          <p:cNvPr id="10" name="TextBox 9"/>
-          <p:cNvSpPr txBox="1"/>
-          <p:nvPr/>
-        </p:nvSpPr>
-        <p:spPr>
-          <a:xfrm>
-            <a:off x="3621024" y="2724912"/>
-            <a:ext cx="2084831" cy="804672"/>
-          </a:xfrm>
-          <a:prstGeom prst="rect">
-            <a:avLst/>
-          </a:prstGeom>
-          <a:noFill/>
-          <a:ln>
-            <a:noFill/>
-          </a:ln>
-        </p:spPr>
-        <p:txBody>
-          <a:bodyPr wrap="square" anchor="ctr">
-            <a:spAutoFit/>
-          </a:bodyPr>
-          <a:lstStyle/>
-          <a:p>
-            <a:pPr algn="l"/>
-            <a:r>
-              <a:rPr sz="1250" b="0">
-                <a:solidFill>
-                  <a:srgbClr val="1E2739"/>
-                </a:solidFill>
-                <a:latin typeface="Aptos"/>
-              </a:rPr>
-              <a:t>deduplicate
-normalize text
-select funding fields</a:t>
-            </a:r>
-          </a:p>
-        </p:txBody>
-      </p:sp>
-      <p:sp>
-        <p:nvSpPr>
-          <p:cNvPr id="11" name="TextBox 10"/>
-          <p:cNvSpPr txBox="1"/>
-          <p:nvPr/>
-        </p:nvSpPr>
-        <p:spPr>
-          <a:xfrm>
-            <a:off x="5769864" y="2615184"/>
-            <a:ext cx="320040" cy="320040"/>
-          </a:xfrm>
-          <a:prstGeom prst="rect">
-            <a:avLst/>
-          </a:prstGeom>
-          <a:noFill/>
-          <a:ln>
-            <a:noFill/>
-          </a:ln>
-        </p:spPr>
-        <p:txBody>
-          <a:bodyPr wrap="square" anchor="ctr">
-            <a:spAutoFit/>
-          </a:bodyPr>
-          <a:lstStyle/>
-          <a:p>
-            <a:pPr algn="ctr"/>
-            <a:r>
-              <a:rPr sz="1800" b="1">
-                <a:solidFill>
-                  <a:srgbClr val="8463C7"/>
-                </a:solidFill>
-                <a:latin typeface="Aptos"/>
-              </a:rPr>
-              <a:t>→</a:t>
-            </a:r>
-          </a:p>
-        </p:txBody>
-      </p:sp>
-      <p:sp>
-        <p:nvSpPr>
-          <p:cNvPr id="12" name="TextBox 11"/>
-          <p:cNvSpPr txBox="1"/>
-          <p:nvPr/>
-        </p:nvSpPr>
-        <p:spPr>
-          <a:xfrm>
-            <a:off x="6254496" y="2267712"/>
-            <a:ext cx="2148840" cy="347472"/>
-          </a:xfrm>
-          <a:prstGeom prst="rect">
-            <a:avLst/>
-          </a:prstGeom>
-          <a:noFill/>
-          <a:ln>
-            <a:noFill/>
-          </a:ln>
-        </p:spPr>
-        <p:txBody>
-          <a:bodyPr wrap="square" anchor="ctr">
-            <a:spAutoFit/>
-          </a:bodyPr>
-          <a:lstStyle/>
-          <a:p>
-            <a:pPr algn="l"/>
-            <a:r>
-              <a:rPr sz="1800" b="1">
-                <a:solidFill>
-                  <a:srgbClr val="182745"/>
-                </a:solidFill>
-                <a:latin typeface="Aptos"/>
-              </a:rPr>
-              <a:t>Harmonize</a:t>
-            </a:r>
-          </a:p>
-        </p:txBody>
-      </p:sp>
-      <p:sp>
-        <p:nvSpPr>
-          <p:cNvPr id="13" name="TextBox 12"/>
-          <p:cNvSpPr txBox="1"/>
-          <p:nvPr/>
-        </p:nvSpPr>
-        <p:spPr>
-          <a:xfrm>
-            <a:off x="6254496" y="2724912"/>
-            <a:ext cx="2084831" cy="804672"/>
-          </a:xfrm>
-          <a:prstGeom prst="rect">
-            <a:avLst/>
-          </a:prstGeom>
-          <a:noFill/>
-          <a:ln>
-            <a:noFill/>
-          </a:ln>
-        </p:spPr>
-        <p:txBody>
-          <a:bodyPr wrap="square" anchor="ctr">
-            <a:spAutoFit/>
-          </a:bodyPr>
-          <a:lstStyle/>
-          <a:p>
-            <a:pPr algn="l"/>
-            <a:r>
-              <a:rPr sz="1250" b="0">
-                <a:solidFill>
-                  <a:srgbClr val="1E2739"/>
-                </a:solidFill>
-                <a:latin typeface="Aptos"/>
-              </a:rPr>
-              <a:t>common grant schema
-controlled topic taxonomy</a:t>
-            </a:r>
-          </a:p>
-        </p:txBody>
-      </p:sp>
-      <p:sp>
-        <p:nvSpPr>
-          <p:cNvPr id="14" name="TextBox 13"/>
-          <p:cNvSpPr txBox="1"/>
-          <p:nvPr/>
-        </p:nvSpPr>
-        <p:spPr>
-          <a:xfrm>
-            <a:off x="8403336" y="2615184"/>
-            <a:ext cx="320040" cy="320040"/>
-          </a:xfrm>
-          <a:prstGeom prst="rect">
-            <a:avLst/>
-          </a:prstGeom>
-          <a:noFill/>
-          <a:ln>
-            <a:noFill/>
-          </a:ln>
-        </p:spPr>
-        <p:txBody>
-          <a:bodyPr wrap="square" anchor="ctr">
-            <a:spAutoFit/>
-          </a:bodyPr>
-          <a:lstStyle/>
-          <a:p>
-            <a:pPr algn="ctr"/>
-            <a:r>
-              <a:rPr sz="1800" b="1">
-                <a:solidFill>
-                  <a:srgbClr val="8463C7"/>
-                </a:solidFill>
-                <a:latin typeface="Aptos"/>
-              </a:rPr>
-              <a:t>→</a:t>
-            </a:r>
-          </a:p>
-        </p:txBody>
-      </p:sp>
-      <p:sp>
-        <p:nvSpPr>
-          <p:cNvPr id="15" name="TextBox 14"/>
-          <p:cNvSpPr txBox="1"/>
-          <p:nvPr/>
-        </p:nvSpPr>
-        <p:spPr>
-          <a:xfrm>
-            <a:off x="8887968" y="2267712"/>
-            <a:ext cx="2148840" cy="347472"/>
-          </a:xfrm>
-          <a:prstGeom prst="rect">
-            <a:avLst/>
-          </a:prstGeom>
-          <a:noFill/>
-          <a:ln>
-            <a:noFill/>
-          </a:ln>
-        </p:spPr>
-        <p:txBody>
-          <a:bodyPr wrap="square" anchor="ctr">
-            <a:spAutoFit/>
-          </a:bodyPr>
-          <a:lstStyle/>
-          <a:p>
-            <a:pPr algn="l"/>
-            <a:r>
-              <a:rPr sz="1800" b="1">
-                <a:solidFill>
-                  <a:srgbClr val="182745"/>
-                </a:solidFill>
-                <a:latin typeface="Aptos"/>
-              </a:rPr>
-              <a:t>Validate</a:t>
-            </a:r>
-          </a:p>
-        </p:txBody>
-      </p:sp>
-      <p:sp>
-        <p:nvSpPr>
-          <p:cNvPr id="16" name="TextBox 15"/>
-          <p:cNvSpPr txBox="1"/>
-          <p:nvPr/>
-        </p:nvSpPr>
-        <p:spPr>
-          <a:xfrm>
-            <a:off x="8887968" y="2724912"/>
-            <a:ext cx="2084831" cy="804672"/>
-          </a:xfrm>
-          <a:prstGeom prst="rect">
-            <a:avLst/>
-          </a:prstGeom>
-          <a:noFill/>
-          <a:ln>
-            <a:noFill/>
-          </a:ln>
-        </p:spPr>
-        <p:txBody>
-          <a:bodyPr wrap="square" anchor="ctr">
-            <a:spAutoFit/>
-          </a:bodyPr>
-          <a:lstStyle/>
-          <a:p>
-            <a:pPr algn="l"/>
-            <a:r>
-              <a:rPr sz="1250" b="0">
-                <a:solidFill>
-                  <a:srgbClr val="1E2739"/>
-                </a:solidFill>
-                <a:latin typeface="Aptos"/>
-              </a:rPr>
-              <a:t>quality rules
-source checks
-model catalogue</a:t>
-            </a:r>
-          </a:p>
-        </p:txBody>
-      </p:sp>
-      <p:sp>
-        <p:nvSpPr>
-          <p:cNvPr id="17" name="TextBox 16"/>
-          <p:cNvSpPr txBox="1"/>
-          <p:nvPr/>
-        </p:nvSpPr>
-        <p:spPr>
-          <a:xfrm>
-            <a:off x="960120" y="4572000"/>
-            <a:ext cx="1417320" cy="502920"/>
-          </a:xfrm>
-          <a:prstGeom prst="rect">
-            <a:avLst/>
-          </a:prstGeom>
-          <a:noFill/>
-          <a:ln>
-            <a:noFill/>
-          </a:ln>
-        </p:spPr>
-        <p:txBody>
-          <a:bodyPr wrap="square" anchor="ctr">
-            <a:spAutoFit/>
-          </a:bodyPr>
-          <a:lstStyle/>
-          <a:p>
-            <a:pPr algn="ctr"/>
-            <a:r>
-              <a:rPr sz="3100" b="1">
-                <a:solidFill>
-                  <a:srgbClr val="182745"/>
-                </a:solidFill>
-                <a:latin typeface="Aptos"/>
-              </a:rPr>
-              <a:t>3,339</a:t>
-            </a:r>
-          </a:p>
-        </p:txBody>
-      </p:sp>
-      <p:sp>
-        <p:nvSpPr>
-          <p:cNvPr id="18" name="TextBox 17"/>
-          <p:cNvSpPr txBox="1"/>
-          <p:nvPr/>
-        </p:nvSpPr>
-        <p:spPr>
-          <a:xfrm>
-            <a:off x="896112" y="5074920"/>
-            <a:ext cx="1554480" cy="274320"/>
-          </a:xfrm>
-          <a:prstGeom prst="rect">
-            <a:avLst/>
-          </a:prstGeom>
-          <a:noFill/>
-          <a:ln>
-            <a:noFill/>
-          </a:ln>
-        </p:spPr>
-        <p:txBody>
-          <a:bodyPr wrap="square" anchor="ctr">
-            <a:spAutoFit/>
-          </a:bodyPr>
-          <a:lstStyle/>
-          <a:p>
-            <a:pPr algn="ctr"/>
-            <a:r>
-              <a:rPr sz="1200" b="0">
-                <a:solidFill>
-                  <a:srgbClr val="636D82"/>
-                </a:solidFill>
-                <a:latin typeface="Aptos"/>
-              </a:rPr>
-              <a:t>integrated grants</a:t>
-            </a:r>
-          </a:p>
-        </p:txBody>
-      </p:sp>
-      <p:sp>
-        <p:nvSpPr>
-          <p:cNvPr id="19" name="Rounded Rectangle 18"/>
+          <p:cNvPr id="10" name="Oval 9"/>
           <p:cNvSpPr/>
           <p:nvPr/>
         </p:nvSpPr>
         <p:spPr>
           <a:xfrm>
-            <a:off x="2743200" y="4709160"/>
-            <a:ext cx="1508760" cy="420624"/>
-          </a:xfrm>
-          <a:prstGeom prst="roundRect">
+            <a:off x="2916936" y="1920240"/>
+            <a:ext cx="749808" cy="749808"/>
+          </a:xfrm>
+          <a:prstGeom prst="ellipse">
             <a:avLst/>
           </a:prstGeom>
           <a:solidFill>
-            <a:srgbClr val="E8E8F8"/>
+            <a:srgbClr val="8463C7"/>
           </a:solidFill>
           <a:ln>
             <a:noFill/>
@@ -10246,58 +8572,173 @@
       </p:sp>
       <p:sp>
         <p:nvSpPr>
-          <p:cNvPr id="20" name="TextBox 19"/>
-          <p:cNvSpPr txBox="1"/>
-          <p:nvPr/>
-        </p:nvSpPr>
-        <p:spPr>
-          <a:xfrm>
-            <a:off x="2816352" y="4736592"/>
-            <a:ext cx="1362456" cy="338328"/>
-          </a:xfrm>
-          <a:prstGeom prst="rect">
-            <a:avLst/>
-          </a:prstGeom>
-          <a:noFill/>
-          <a:ln>
-            <a:noFill/>
-          </a:ln>
-        </p:spPr>
-        <p:txBody>
-          <a:bodyPr wrap="square" anchor="ctr">
-            <a:spAutoFit/>
-          </a:bodyPr>
-          <a:lstStyle/>
-          <a:p>
-            <a:pPr algn="ctr"/>
-            <a:r>
-              <a:rPr sz="1200" b="1">
+          <p:cNvPr id="11" name="TextBox 10"/>
+          <p:cNvSpPr txBox="1"/>
+          <p:nvPr/>
+        </p:nvSpPr>
+        <p:spPr>
+          <a:xfrm>
+            <a:off x="2916936" y="2084831"/>
+            <a:ext cx="749808" cy="274320"/>
+          </a:xfrm>
+          <a:prstGeom prst="rect">
+            <a:avLst/>
+          </a:prstGeom>
+          <a:noFill/>
+          <a:ln>
+            <a:noFill/>
+          </a:ln>
+        </p:spPr>
+        <p:txBody>
+          <a:bodyPr wrap="square" anchor="ctr">
+            <a:spAutoFit/>
+          </a:bodyPr>
+          <a:lstStyle/>
+          <a:p>
+            <a:pPr algn="ctr"/>
+            <a:r>
+              <a:rPr sz="1500" b="1">
+                <a:solidFill>
+                  <a:srgbClr val="FFFFFF"/>
+                </a:solidFill>
+                <a:latin typeface="Aptos"/>
+              </a:rPr>
+              <a:t>2</a:t>
+            </a:r>
+          </a:p>
+        </p:txBody>
+      </p:sp>
+      <p:sp>
+        <p:nvSpPr>
+          <p:cNvPr id="12" name="TextBox 11"/>
+          <p:cNvSpPr txBox="1"/>
+          <p:nvPr/>
+        </p:nvSpPr>
+        <p:spPr>
+          <a:xfrm>
+            <a:off x="2414016" y="2907792"/>
+            <a:ext cx="1755648" cy="411480"/>
+          </a:xfrm>
+          <a:prstGeom prst="rect">
+            <a:avLst/>
+          </a:prstGeom>
+          <a:noFill/>
+          <a:ln>
+            <a:noFill/>
+          </a:ln>
+        </p:spPr>
+        <p:txBody>
+          <a:bodyPr wrap="square" anchor="ctr">
+            <a:spAutoFit/>
+          </a:bodyPr>
+          <a:lstStyle/>
+          <a:p>
+            <a:pPr algn="ctr"/>
+            <a:r>
+              <a:rPr sz="1500" b="1">
                 <a:solidFill>
                   <a:srgbClr val="182745"/>
                 </a:solidFill>
                 <a:latin typeface="Aptos"/>
               </a:rPr>
-              <a:t>2,664 NSF</a:t>
-            </a:r>
-          </a:p>
-        </p:txBody>
-      </p:sp>
-      <p:sp>
-        <p:nvSpPr>
-          <p:cNvPr id="21" name="Rounded Rectangle 20"/>
+              <a:t>Python / pandas</a:t>
+            </a:r>
+          </a:p>
+        </p:txBody>
+      </p:sp>
+      <p:sp>
+        <p:nvSpPr>
+          <p:cNvPr id="13" name="TextBox 12"/>
+          <p:cNvSpPr txBox="1"/>
+          <p:nvPr/>
+        </p:nvSpPr>
+        <p:spPr>
+          <a:xfrm>
+            <a:off x="2414016" y="3346704"/>
+            <a:ext cx="1755648" cy="530352"/>
+          </a:xfrm>
+          <a:prstGeom prst="rect">
+            <a:avLst/>
+          </a:prstGeom>
+          <a:noFill/>
+          <a:ln>
+            <a:noFill/>
+          </a:ln>
+        </p:spPr>
+        <p:txBody>
+          <a:bodyPr wrap="square" anchor="ctr">
+            <a:spAutoFit/>
+          </a:bodyPr>
+          <a:lstStyle/>
+          <a:p>
+            <a:pPr algn="ctr"/>
+            <a:r>
+              <a:rPr sz="1100" b="0">
+                <a:solidFill>
+                  <a:srgbClr val="636D82"/>
+                </a:solidFill>
+                <a:latin typeface="Aptos"/>
+              </a:rPr>
+              <a:t>cleaning +
+harmonisation</a:t>
+            </a:r>
+          </a:p>
+        </p:txBody>
+      </p:sp>
+      <p:sp>
+        <p:nvSpPr>
+          <p:cNvPr id="14" name="TextBox 13"/>
+          <p:cNvSpPr txBox="1"/>
+          <p:nvPr/>
+        </p:nvSpPr>
+        <p:spPr>
+          <a:xfrm>
+            <a:off x="4041648" y="2139696"/>
+            <a:ext cx="320040" cy="320040"/>
+          </a:xfrm>
+          <a:prstGeom prst="rect">
+            <a:avLst/>
+          </a:prstGeom>
+          <a:noFill/>
+          <a:ln>
+            <a:noFill/>
+          </a:ln>
+        </p:spPr>
+        <p:txBody>
+          <a:bodyPr wrap="square" anchor="ctr">
+            <a:spAutoFit/>
+          </a:bodyPr>
+          <a:lstStyle/>
+          <a:p>
+            <a:pPr algn="ctr"/>
+            <a:r>
+              <a:rPr sz="1800" b="1">
+                <a:solidFill>
+                  <a:srgbClr val="8463C7"/>
+                </a:solidFill>
+                <a:latin typeface="Aptos"/>
+              </a:rPr>
+              <a:t>→</a:t>
+            </a:r>
+          </a:p>
+        </p:txBody>
+      </p:sp>
+      <p:sp>
+        <p:nvSpPr>
+          <p:cNvPr id="15" name="Oval 14"/>
           <p:cNvSpPr/>
           <p:nvPr/>
         </p:nvSpPr>
         <p:spPr>
           <a:xfrm>
-            <a:off x="4480560" y="4709160"/>
-            <a:ext cx="1508760" cy="420624"/>
-          </a:xfrm>
-          <a:prstGeom prst="roundRect">
+            <a:off x="4818888" y="1920240"/>
+            <a:ext cx="749808" cy="749808"/>
+          </a:xfrm>
+          <a:prstGeom prst="ellipse">
             <a:avLst/>
           </a:prstGeom>
           <a:solidFill>
-            <a:srgbClr val="E8E8F8"/>
+            <a:srgbClr val="9478CF"/>
           </a:solidFill>
           <a:ln>
             <a:noFill/>
@@ -10328,63 +8769,176 @@
       </p:sp>
       <p:sp>
         <p:nvSpPr>
-          <p:cNvPr id="22" name="TextBox 21"/>
-          <p:cNvSpPr txBox="1"/>
-          <p:nvPr/>
-        </p:nvSpPr>
-        <p:spPr>
-          <a:xfrm>
-            <a:off x="4553712" y="4736592"/>
-            <a:ext cx="1362456" cy="338328"/>
-          </a:xfrm>
-          <a:prstGeom prst="rect">
-            <a:avLst/>
-          </a:prstGeom>
-          <a:noFill/>
-          <a:ln>
-            <a:noFill/>
-          </a:ln>
-        </p:spPr>
-        <p:txBody>
-          <a:bodyPr wrap="square" anchor="ctr">
-            <a:spAutoFit/>
-          </a:bodyPr>
-          <a:lstStyle/>
-          <a:p>
-            <a:pPr algn="ctr"/>
-            <a:r>
-              <a:rPr sz="1200" b="1">
+          <p:cNvPr id="16" name="TextBox 15"/>
+          <p:cNvSpPr txBox="1"/>
+          <p:nvPr/>
+        </p:nvSpPr>
+        <p:spPr>
+          <a:xfrm>
+            <a:off x="4818888" y="2084831"/>
+            <a:ext cx="749808" cy="274320"/>
+          </a:xfrm>
+          <a:prstGeom prst="rect">
+            <a:avLst/>
+          </a:prstGeom>
+          <a:noFill/>
+          <a:ln>
+            <a:noFill/>
+          </a:ln>
+        </p:spPr>
+        <p:txBody>
+          <a:bodyPr wrap="square" anchor="ctr">
+            <a:spAutoFit/>
+          </a:bodyPr>
+          <a:lstStyle/>
+          <a:p>
+            <a:pPr algn="ctr"/>
+            <a:r>
+              <a:rPr sz="1500" b="1">
+                <a:solidFill>
+                  <a:srgbClr val="FFFFFF"/>
+                </a:solidFill>
+                <a:latin typeface="Aptos"/>
+              </a:rPr>
+              <a:t>3</a:t>
+            </a:r>
+          </a:p>
+        </p:txBody>
+      </p:sp>
+      <p:sp>
+        <p:nvSpPr>
+          <p:cNvPr id="17" name="TextBox 16"/>
+          <p:cNvSpPr txBox="1"/>
+          <p:nvPr/>
+        </p:nvSpPr>
+        <p:spPr>
+          <a:xfrm>
+            <a:off x="4315968" y="2907792"/>
+            <a:ext cx="1755648" cy="411480"/>
+          </a:xfrm>
+          <a:prstGeom prst="rect">
+            <a:avLst/>
+          </a:prstGeom>
+          <a:noFill/>
+          <a:ln>
+            <a:noFill/>
+          </a:ln>
+        </p:spPr>
+        <p:txBody>
+          <a:bodyPr wrap="square" anchor="ctr">
+            <a:spAutoFit/>
+          </a:bodyPr>
+          <a:lstStyle/>
+          <a:p>
+            <a:pPr algn="ctr"/>
+            <a:r>
+              <a:rPr sz="1500" b="1" dirty="0">
                 <a:solidFill>
                   <a:srgbClr val="182745"/>
                 </a:solidFill>
                 <a:latin typeface="Aptos"/>
               </a:rPr>
-              <a:t>675 CORDIS</a:t>
-            </a:r>
-          </a:p>
-        </p:txBody>
-      </p:sp>
-      <p:sp>
-        <p:nvSpPr>
-          <p:cNvPr id="23" name="Rounded Rectangle 22"/>
+              <a:t>EDA + quality</a:t>
+            </a:r>
+          </a:p>
+        </p:txBody>
+      </p:sp>
+      <p:sp>
+        <p:nvSpPr>
+          <p:cNvPr id="18" name="TextBox 17"/>
+          <p:cNvSpPr txBox="1"/>
+          <p:nvPr/>
+        </p:nvSpPr>
+        <p:spPr>
+          <a:xfrm>
+            <a:off x="4315968" y="3346704"/>
+            <a:ext cx="1755648" cy="530352"/>
+          </a:xfrm>
+          <a:prstGeom prst="rect">
+            <a:avLst/>
+          </a:prstGeom>
+          <a:noFill/>
+          <a:ln>
+            <a:noFill/>
+          </a:ln>
+        </p:spPr>
+        <p:txBody>
+          <a:bodyPr wrap="square" anchor="ctr">
+            <a:spAutoFit/>
+          </a:bodyPr>
+          <a:lstStyle/>
+          <a:p>
+            <a:pPr algn="ctr"/>
+            <a:r>
+              <a:rPr sz="1100" b="0">
+                <a:solidFill>
+                  <a:srgbClr val="636D82"/>
+                </a:solidFill>
+                <a:latin typeface="Aptos"/>
+              </a:rPr>
+              <a:t>topic/source
+analysis</a:t>
+            </a:r>
+          </a:p>
+        </p:txBody>
+      </p:sp>
+      <p:sp>
+        <p:nvSpPr>
+          <p:cNvPr id="19" name="TextBox 18"/>
+          <p:cNvSpPr txBox="1"/>
+          <p:nvPr/>
+        </p:nvSpPr>
+        <p:spPr>
+          <a:xfrm>
+            <a:off x="5943600" y="2139696"/>
+            <a:ext cx="320040" cy="320040"/>
+          </a:xfrm>
+          <a:prstGeom prst="rect">
+            <a:avLst/>
+          </a:prstGeom>
+          <a:noFill/>
+          <a:ln>
+            <a:noFill/>
+          </a:ln>
+        </p:spPr>
+        <p:txBody>
+          <a:bodyPr wrap="square" anchor="ctr">
+            <a:spAutoFit/>
+          </a:bodyPr>
+          <a:lstStyle/>
+          <a:p>
+            <a:pPr algn="ctr"/>
+            <a:r>
+              <a:rPr sz="1800" b="1">
+                <a:solidFill>
+                  <a:srgbClr val="8463C7"/>
+                </a:solidFill>
+                <a:latin typeface="Aptos"/>
+              </a:rPr>
+              <a:t>→</a:t>
+            </a:r>
+          </a:p>
+        </p:txBody>
+      </p:sp>
+      <p:sp>
+        <p:nvSpPr>
+          <p:cNvPr id="20" name="Oval 19"/>
           <p:cNvSpPr/>
           <p:nvPr/>
         </p:nvSpPr>
         <p:spPr>
           <a:xfrm>
-            <a:off x="6583680" y="4434840"/>
-            <a:ext cx="4572000" cy="1234440"/>
-          </a:xfrm>
-          <a:prstGeom prst="roundRect">
+            <a:off x="6720840" y="1920240"/>
+            <a:ext cx="749808" cy="749808"/>
+          </a:xfrm>
+          <a:prstGeom prst="ellipse">
             <a:avLst/>
           </a:prstGeom>
           <a:solidFill>
-            <a:srgbClr val="FFFFFF"/>
+            <a:srgbClr val="A48BD6"/>
           </a:solidFill>
           <a:ln>
-            <a:solidFill>
-              <a:srgbClr val="E1E5EF"/>
-            </a:solidFill>
+            <a:noFill/>
           </a:ln>
         </p:spPr>
         <p:style>
@@ -10412,20 +8966,187 @@
       </p:sp>
       <p:sp>
         <p:nvSpPr>
-          <p:cNvPr id="24" name="Rounded Rectangle 23"/>
+          <p:cNvPr id="21" name="TextBox 20"/>
+          <p:cNvSpPr txBox="1"/>
+          <p:nvPr/>
+        </p:nvSpPr>
+        <p:spPr>
+          <a:xfrm>
+            <a:off x="6720840" y="2084831"/>
+            <a:ext cx="749808" cy="274320"/>
+          </a:xfrm>
+          <a:prstGeom prst="rect">
+            <a:avLst/>
+          </a:prstGeom>
+          <a:noFill/>
+          <a:ln>
+            <a:noFill/>
+          </a:ln>
+        </p:spPr>
+        <p:txBody>
+          <a:bodyPr wrap="square" anchor="ctr">
+            <a:spAutoFit/>
+          </a:bodyPr>
+          <a:lstStyle/>
+          <a:p>
+            <a:pPr algn="ctr"/>
+            <a:r>
+              <a:rPr sz="1500" b="1">
+                <a:solidFill>
+                  <a:srgbClr val="FFFFFF"/>
+                </a:solidFill>
+                <a:latin typeface="Aptos"/>
+              </a:rPr>
+              <a:t>4</a:t>
+            </a:r>
+          </a:p>
+        </p:txBody>
+      </p:sp>
+      <p:sp>
+        <p:nvSpPr>
+          <p:cNvPr id="22" name="TextBox 21"/>
+          <p:cNvSpPr txBox="1"/>
+          <p:nvPr/>
+        </p:nvSpPr>
+        <p:spPr>
+          <a:xfrm>
+            <a:off x="6217920" y="2907792"/>
+            <a:ext cx="1755648" cy="411480"/>
+          </a:xfrm>
+          <a:prstGeom prst="rect">
+            <a:avLst/>
+          </a:prstGeom>
+          <a:noFill/>
+          <a:ln>
+            <a:noFill/>
+          </a:ln>
+        </p:spPr>
+        <p:txBody>
+          <a:bodyPr wrap="square" anchor="ctr">
+            <a:spAutoFit/>
+          </a:bodyPr>
+          <a:lstStyle/>
+          <a:p>
+            <a:pPr algn="ctr"/>
+            <a:r>
+              <a:rPr sz="1500" b="1">
+                <a:solidFill>
+                  <a:srgbClr val="182745"/>
+                </a:solidFill>
+                <a:latin typeface="Aptos"/>
+              </a:rPr>
+              <a:t>ML / NLP</a:t>
+            </a:r>
+          </a:p>
+        </p:txBody>
+      </p:sp>
+      <p:sp>
+        <p:nvSpPr>
+          <p:cNvPr id="23" name="TextBox 22"/>
+          <p:cNvSpPr txBox="1"/>
+          <p:nvPr/>
+        </p:nvSpPr>
+        <p:spPr>
+          <a:xfrm>
+            <a:off x="6217920" y="3481075"/>
+            <a:ext cx="1755648" cy="261610"/>
+          </a:xfrm>
+          <a:prstGeom prst="rect">
+            <a:avLst/>
+          </a:prstGeom>
+          <a:noFill/>
+          <a:ln>
+            <a:noFill/>
+          </a:ln>
+        </p:spPr>
+        <p:txBody>
+          <a:bodyPr wrap="square" anchor="ctr">
+            <a:spAutoFit/>
+          </a:bodyPr>
+          <a:lstStyle/>
+          <a:p>
+            <a:pPr algn="ctr"/>
+            <a:r>
+              <a:rPr sz="1100" b="0" dirty="0">
+                <a:solidFill>
+                  <a:srgbClr val="636D82"/>
+                </a:solidFill>
+                <a:latin typeface="Aptos"/>
+              </a:rPr>
+              <a:t>TF-IDF </a:t>
+            </a:r>
+            <a:r>
+              <a:rPr lang="en-US" sz="1100" dirty="0">
+                <a:solidFill>
+                  <a:srgbClr val="636D82"/>
+                </a:solidFill>
+                <a:latin typeface="Aptos"/>
+              </a:rPr>
+              <a:t> text similarity</a:t>
+            </a:r>
+            <a:endParaRPr sz="1100" b="0" dirty="0">
+              <a:solidFill>
+                <a:srgbClr val="636D82"/>
+              </a:solidFill>
+              <a:latin typeface="Aptos"/>
+            </a:endParaRPr>
+          </a:p>
+        </p:txBody>
+      </p:sp>
+      <p:sp>
+        <p:nvSpPr>
+          <p:cNvPr id="24" name="TextBox 23"/>
+          <p:cNvSpPr txBox="1"/>
+          <p:nvPr/>
+        </p:nvSpPr>
+        <p:spPr>
+          <a:xfrm>
+            <a:off x="7845552" y="2139696"/>
+            <a:ext cx="320040" cy="320040"/>
+          </a:xfrm>
+          <a:prstGeom prst="rect">
+            <a:avLst/>
+          </a:prstGeom>
+          <a:noFill/>
+          <a:ln>
+            <a:noFill/>
+          </a:ln>
+        </p:spPr>
+        <p:txBody>
+          <a:bodyPr wrap="square" anchor="ctr">
+            <a:spAutoFit/>
+          </a:bodyPr>
+          <a:lstStyle/>
+          <a:p>
+            <a:pPr algn="ctr"/>
+            <a:r>
+              <a:rPr sz="1800" b="1">
+                <a:solidFill>
+                  <a:srgbClr val="8463C7"/>
+                </a:solidFill>
+                <a:latin typeface="Aptos"/>
+              </a:rPr>
+              <a:t>→</a:t>
+            </a:r>
+          </a:p>
+        </p:txBody>
+      </p:sp>
+      <p:sp>
+        <p:nvSpPr>
+          <p:cNvPr id="25" name="Oval 24"/>
           <p:cNvSpPr/>
           <p:nvPr/>
         </p:nvSpPr>
         <p:spPr>
           <a:xfrm>
-            <a:off x="6784848" y="4617720"/>
-            <a:ext cx="502920" cy="109728"/>
-          </a:xfrm>
-          <a:prstGeom prst="roundRect">
+            <a:off x="8622792" y="1920240"/>
+            <a:ext cx="749808" cy="749808"/>
+          </a:xfrm>
+          <a:prstGeom prst="ellipse">
             <a:avLst/>
           </a:prstGeom>
           <a:solidFill>
-            <a:srgbClr val="8463C7"/>
+            <a:srgbClr val="B099DB"/>
           </a:solidFill>
           <a:ln>
             <a:noFill/>
@@ -10456,83 +9177,419 @@
       </p:sp>
       <p:sp>
         <p:nvSpPr>
-          <p:cNvPr id="25" name="TextBox 24"/>
-          <p:cNvSpPr txBox="1"/>
-          <p:nvPr/>
-        </p:nvSpPr>
-        <p:spPr>
-          <a:xfrm>
-            <a:off x="6803136" y="4818888"/>
-            <a:ext cx="4133087" cy="411480"/>
-          </a:xfrm>
-          <a:prstGeom prst="rect">
-            <a:avLst/>
-          </a:prstGeom>
-          <a:noFill/>
-          <a:ln>
-            <a:noFill/>
-          </a:ln>
-        </p:spPr>
-        <p:txBody>
-          <a:bodyPr wrap="square" anchor="ctr">
-            <a:spAutoFit/>
-          </a:bodyPr>
-          <a:lstStyle/>
-          <a:p>
-            <a:pPr algn="l"/>
-            <a:r>
-              <a:rPr sz="1700" b="1">
+          <p:cNvPr id="26" name="TextBox 25"/>
+          <p:cNvSpPr txBox="1"/>
+          <p:nvPr/>
+        </p:nvSpPr>
+        <p:spPr>
+          <a:xfrm>
+            <a:off x="8622792" y="2084831"/>
+            <a:ext cx="749808" cy="274320"/>
+          </a:xfrm>
+          <a:prstGeom prst="rect">
+            <a:avLst/>
+          </a:prstGeom>
+          <a:noFill/>
+          <a:ln>
+            <a:noFill/>
+          </a:ln>
+        </p:spPr>
+        <p:txBody>
+          <a:bodyPr wrap="square" anchor="ctr">
+            <a:spAutoFit/>
+          </a:bodyPr>
+          <a:lstStyle/>
+          <a:p>
+            <a:pPr algn="ctr"/>
+            <a:r>
+              <a:rPr sz="1500" b="1">
+                <a:solidFill>
+                  <a:srgbClr val="FFFFFF"/>
+                </a:solidFill>
+                <a:latin typeface="Aptos"/>
+              </a:rPr>
+              <a:t>5</a:t>
+            </a:r>
+          </a:p>
+        </p:txBody>
+      </p:sp>
+      <p:sp>
+        <p:nvSpPr>
+          <p:cNvPr id="27" name="TextBox 26"/>
+          <p:cNvSpPr txBox="1"/>
+          <p:nvPr/>
+        </p:nvSpPr>
+        <p:spPr>
+          <a:xfrm>
+            <a:off x="8119872" y="2907792"/>
+            <a:ext cx="1755648" cy="411480"/>
+          </a:xfrm>
+          <a:prstGeom prst="rect">
+            <a:avLst/>
+          </a:prstGeom>
+          <a:noFill/>
+          <a:ln>
+            <a:noFill/>
+          </a:ln>
+        </p:spPr>
+        <p:txBody>
+          <a:bodyPr wrap="square" anchor="ctr">
+            <a:spAutoFit/>
+          </a:bodyPr>
+          <a:lstStyle/>
+          <a:p>
+            <a:pPr algn="ctr"/>
+            <a:r>
+              <a:rPr sz="1500" b="1">
                 <a:solidFill>
                   <a:srgbClr val="182745"/>
                 </a:solidFill>
                 <a:latin typeface="Aptos"/>
               </a:rPr>
-              <a:t>Deliberate data-quality decision</a:t>
-            </a:r>
-          </a:p>
-        </p:txBody>
-      </p:sp>
-      <p:sp>
-        <p:nvSpPr>
-          <p:cNvPr id="26" name="TextBox 25"/>
-          <p:cNvSpPr txBox="1"/>
-          <p:nvPr/>
-        </p:nvSpPr>
-        <p:spPr>
-          <a:xfrm>
-            <a:off x="6803136" y="5284617"/>
-            <a:ext cx="4133087" cy="284693"/>
-          </a:xfrm>
-          <a:prstGeom prst="rect">
-            <a:avLst/>
-          </a:prstGeom>
-          <a:noFill/>
-          <a:ln>
-            <a:noFill/>
-          </a:ln>
-        </p:spPr>
-        <p:txBody>
-          <a:bodyPr wrap="square" anchor="ctr">
-            <a:spAutoFit/>
-          </a:bodyPr>
-          <a:lstStyle/>
-          <a:p>
-            <a:pPr algn="l"/>
-            <a:r>
-              <a:rPr sz="1250" b="0" dirty="0">
-                <a:solidFill>
-                  <a:srgbClr val="1E2739"/>
-                </a:solidFill>
-                <a:latin typeface="Aptos"/>
-              </a:rPr>
-              <a:t>NSF remains USD; CORDIS remains EUR.</a:t>
-            </a:r>
-          </a:p>
-        </p:txBody>
-      </p:sp>
-      <p:sp>
-        <p:nvSpPr>
-          <p:cNvPr id="27" name="TextBox 26"/>
+              <a:t>Tableau</a:t>
+            </a:r>
+          </a:p>
+        </p:txBody>
+      </p:sp>
+      <p:sp>
+        <p:nvSpPr>
+          <p:cNvPr id="28" name="TextBox 27"/>
+          <p:cNvSpPr txBox="1"/>
+          <p:nvPr/>
+        </p:nvSpPr>
+        <p:spPr>
+          <a:xfrm>
+            <a:off x="8119872" y="3346704"/>
+            <a:ext cx="1755648" cy="530352"/>
+          </a:xfrm>
+          <a:prstGeom prst="rect">
+            <a:avLst/>
+          </a:prstGeom>
+          <a:noFill/>
+          <a:ln>
+            <a:noFill/>
+          </a:ln>
+        </p:spPr>
+        <p:txBody>
+          <a:bodyPr wrap="square" anchor="ctr">
+            <a:spAutoFit/>
+          </a:bodyPr>
+          <a:lstStyle/>
+          <a:p>
+            <a:pPr algn="ctr"/>
+            <a:r>
+              <a:rPr sz="1100" b="0" dirty="0">
+                <a:solidFill>
+                  <a:srgbClr val="636D82"/>
+                </a:solidFill>
+                <a:latin typeface="Aptos"/>
+              </a:rPr>
+              <a:t>funding
+landscape</a:t>
+            </a:r>
+          </a:p>
+        </p:txBody>
+      </p:sp>
+      <p:sp>
+        <p:nvSpPr>
+          <p:cNvPr id="29" name="TextBox 28"/>
+          <p:cNvSpPr txBox="1"/>
+          <p:nvPr/>
+        </p:nvSpPr>
+        <p:spPr>
+          <a:xfrm>
+            <a:off x="9747504" y="2139696"/>
+            <a:ext cx="320040" cy="320040"/>
+          </a:xfrm>
+          <a:prstGeom prst="rect">
+            <a:avLst/>
+          </a:prstGeom>
+          <a:noFill/>
+          <a:ln>
+            <a:noFill/>
+          </a:ln>
+        </p:spPr>
+        <p:txBody>
+          <a:bodyPr wrap="square" anchor="ctr">
+            <a:spAutoFit/>
+          </a:bodyPr>
+          <a:lstStyle/>
+          <a:p>
+            <a:pPr algn="ctr"/>
+            <a:r>
+              <a:rPr sz="1800" b="1">
+                <a:solidFill>
+                  <a:srgbClr val="8463C7"/>
+                </a:solidFill>
+                <a:latin typeface="Aptos"/>
+              </a:rPr>
+              <a:t>→</a:t>
+            </a:r>
+          </a:p>
+        </p:txBody>
+      </p:sp>
+      <p:sp>
+        <p:nvSpPr>
+          <p:cNvPr id="30" name="Oval 29"/>
+          <p:cNvSpPr/>
+          <p:nvPr/>
+        </p:nvSpPr>
+        <p:spPr>
+          <a:xfrm>
+            <a:off x="10524744" y="1920240"/>
+            <a:ext cx="749808" cy="749808"/>
+          </a:xfrm>
+          <a:prstGeom prst="ellipse">
+            <a:avLst/>
+          </a:prstGeom>
+          <a:solidFill>
+            <a:srgbClr val="BEA4DE"/>
+          </a:solidFill>
+          <a:ln>
+            <a:noFill/>
+          </a:ln>
+        </p:spPr>
+        <p:style>
+          <a:lnRef idx="1">
+            <a:schemeClr val="accent1"/>
+          </a:lnRef>
+          <a:fillRef idx="3">
+            <a:schemeClr val="accent1"/>
+          </a:fillRef>
+          <a:effectRef idx="2">
+            <a:schemeClr val="accent1"/>
+          </a:effectRef>
+          <a:fontRef idx="minor">
+            <a:schemeClr val="lt1"/>
+          </a:fontRef>
+        </p:style>
+        <p:txBody>
+          <a:bodyPr rtlCol="0" anchor="ctr"/>
+          <a:lstStyle/>
+          <a:p>
+            <a:pPr algn="ctr"/>
+            <a:endParaRPr/>
+          </a:p>
+        </p:txBody>
+      </p:sp>
+      <p:sp>
+        <p:nvSpPr>
+          <p:cNvPr id="31" name="TextBox 30"/>
+          <p:cNvSpPr txBox="1"/>
+          <p:nvPr/>
+        </p:nvSpPr>
+        <p:spPr>
+          <a:xfrm>
+            <a:off x="10524744" y="2084831"/>
+            <a:ext cx="749808" cy="274320"/>
+          </a:xfrm>
+          <a:prstGeom prst="rect">
+            <a:avLst/>
+          </a:prstGeom>
+          <a:noFill/>
+          <a:ln>
+            <a:noFill/>
+          </a:ln>
+        </p:spPr>
+        <p:txBody>
+          <a:bodyPr wrap="square" anchor="ctr">
+            <a:spAutoFit/>
+          </a:bodyPr>
+          <a:lstStyle/>
+          <a:p>
+            <a:pPr algn="ctr"/>
+            <a:r>
+              <a:rPr sz="1500" b="1">
+                <a:solidFill>
+                  <a:srgbClr val="FFFFFF"/>
+                </a:solidFill>
+                <a:latin typeface="Aptos"/>
+              </a:rPr>
+              <a:t>6</a:t>
+            </a:r>
+          </a:p>
+        </p:txBody>
+      </p:sp>
+      <p:sp>
+        <p:nvSpPr>
+          <p:cNvPr id="32" name="TextBox 31"/>
+          <p:cNvSpPr txBox="1"/>
+          <p:nvPr/>
+        </p:nvSpPr>
+        <p:spPr>
+          <a:xfrm>
+            <a:off x="10021824" y="2907792"/>
+            <a:ext cx="1755648" cy="411480"/>
+          </a:xfrm>
+          <a:prstGeom prst="rect">
+            <a:avLst/>
+          </a:prstGeom>
+          <a:noFill/>
+          <a:ln>
+            <a:noFill/>
+          </a:ln>
+        </p:spPr>
+        <p:txBody>
+          <a:bodyPr wrap="square" anchor="ctr">
+            <a:spAutoFit/>
+          </a:bodyPr>
+          <a:lstStyle/>
+          <a:p>
+            <a:pPr algn="ctr"/>
+            <a:r>
+              <a:rPr sz="1500" b="1">
+                <a:solidFill>
+                  <a:srgbClr val="182745"/>
+                </a:solidFill>
+                <a:latin typeface="Aptos"/>
+              </a:rPr>
+              <a:t>Streamlit</a:t>
+            </a:r>
+          </a:p>
+        </p:txBody>
+      </p:sp>
+      <p:sp>
+        <p:nvSpPr>
+          <p:cNvPr id="33" name="TextBox 32"/>
+          <p:cNvSpPr txBox="1"/>
+          <p:nvPr/>
+        </p:nvSpPr>
+        <p:spPr>
+          <a:xfrm>
+            <a:off x="10021824" y="3346704"/>
+            <a:ext cx="1755648" cy="530352"/>
+          </a:xfrm>
+          <a:prstGeom prst="rect">
+            <a:avLst/>
+          </a:prstGeom>
+          <a:noFill/>
+          <a:ln>
+            <a:noFill/>
+          </a:ln>
+        </p:spPr>
+        <p:txBody>
+          <a:bodyPr wrap="square" anchor="ctr">
+            <a:spAutoFit/>
+          </a:bodyPr>
+          <a:lstStyle/>
+          <a:p>
+            <a:pPr algn="ctr"/>
+            <a:r>
+              <a:rPr sz="1100" b="0">
+                <a:solidFill>
+                  <a:srgbClr val="636D82"/>
+                </a:solidFill>
+                <a:latin typeface="Aptos"/>
+              </a:rPr>
+              <a:t>decision-support
+application</a:t>
+            </a:r>
+          </a:p>
+        </p:txBody>
+      </p:sp>
+      <p:sp>
+        <p:nvSpPr>
+          <p:cNvPr id="35" name="Rounded Rectangle 34"/>
+          <p:cNvSpPr/>
+          <p:nvPr/>
+        </p:nvSpPr>
+        <p:spPr>
+          <a:xfrm>
+            <a:off x="1965960" y="5532120"/>
+            <a:ext cx="8229600" cy="420624"/>
+          </a:xfrm>
+          <a:prstGeom prst="roundRect">
+            <a:avLst/>
+          </a:prstGeom>
+          <a:solidFill>
+            <a:srgbClr val="E8E8F8"/>
+          </a:solidFill>
+          <a:ln>
+            <a:noFill/>
+          </a:ln>
+        </p:spPr>
+        <p:style>
+          <a:lnRef idx="1">
+            <a:schemeClr val="accent1"/>
+          </a:lnRef>
+          <a:fillRef idx="3">
+            <a:schemeClr val="accent1"/>
+          </a:fillRef>
+          <a:effectRef idx="2">
+            <a:schemeClr val="accent1"/>
+          </a:effectRef>
+          <a:fontRef idx="minor">
+            <a:schemeClr val="lt1"/>
+          </a:fontRef>
+        </p:style>
+        <p:txBody>
+          <a:bodyPr rtlCol="0" anchor="ctr"/>
+          <a:lstStyle/>
+          <a:p>
+            <a:pPr algn="ctr"/>
+            <a:endParaRPr/>
+          </a:p>
+        </p:txBody>
+      </p:sp>
+      <p:sp>
+        <p:nvSpPr>
+          <p:cNvPr id="36" name="TextBox 35"/>
+          <p:cNvSpPr txBox="1"/>
+          <p:nvPr/>
+        </p:nvSpPr>
+        <p:spPr>
+          <a:xfrm>
+            <a:off x="2039112" y="5590216"/>
+            <a:ext cx="8083296" cy="276999"/>
+          </a:xfrm>
+          <a:prstGeom prst="rect">
+            <a:avLst/>
+          </a:prstGeom>
+          <a:noFill/>
+          <a:ln>
+            <a:noFill/>
+          </a:ln>
+        </p:spPr>
+        <p:txBody>
+          <a:bodyPr wrap="square" anchor="ctr">
+            <a:spAutoFit/>
+          </a:bodyPr>
+          <a:lstStyle/>
+          <a:p>
+            <a:pPr algn="ctr"/>
+            <a:r>
+              <a:rPr sz="1200" b="1" dirty="0">
+                <a:solidFill>
+                  <a:srgbClr val="182745"/>
+                </a:solidFill>
+                <a:latin typeface="Aptos"/>
+              </a:rPr>
+              <a:t>The concepts became stages of one usable product</a:t>
+            </a:r>
+            <a:r>
+              <a:rPr lang="en-US" sz="1200" b="1" dirty="0">
+                <a:solidFill>
+                  <a:srgbClr val="182745"/>
+                </a:solidFill>
+                <a:latin typeface="Aptos"/>
+              </a:rPr>
+              <a:t>, </a:t>
+            </a:r>
+            <a:r>
+              <a:rPr sz="1200" b="1" dirty="0">
+                <a:solidFill>
+                  <a:srgbClr val="182745"/>
+                </a:solidFill>
+                <a:latin typeface="Aptos"/>
+              </a:rPr>
+              <a:t>not isolated demonstrations.</a:t>
+            </a:r>
+          </a:p>
+        </p:txBody>
+      </p:sp>
+      <p:sp>
+        <p:nvSpPr>
+          <p:cNvPr id="37" name="TextBox 36"/>
           <p:cNvSpPr txBox="1"/>
           <p:nvPr/>
         </p:nvSpPr>
@@ -10563,7 +9620,7 @@
                 </a:solidFill>
                 <a:latin typeface="Aptos"/>
               </a:rPr>
-              <a:t>4</a:t>
+              <a:t>6</a:t>
             </a:r>
           </a:p>
         </p:txBody>
@@ -10628,32 +9685,20 @@
           <a:p>
             <a:pPr algn="l"/>
             <a:r>
-              <a:rPr sz="2700" b="1" dirty="0">
+              <a:rPr lang="en-US" sz="2700" b="1" dirty="0">
                 <a:solidFill>
                   <a:srgbClr val="182745"/>
                 </a:solidFill>
                 <a:latin typeface="Aptos"/>
               </a:rPr>
-              <a:t>One </a:t>
-            </a:r>
-            <a:r>
-              <a:rPr lang="en-US" sz="2700" b="1" dirty="0">
-                <a:solidFill>
-                  <a:srgbClr val="182745"/>
-                </a:solidFill>
-                <a:latin typeface="Aptos"/>
-              </a:rPr>
-              <a:t>project</a:t>
-            </a:r>
-            <a:r>
-              <a:rPr sz="2700" b="1" dirty="0">
-                <a:solidFill>
-                  <a:srgbClr val="182745"/>
-                </a:solidFill>
-                <a:latin typeface="Aptos"/>
-              </a:rPr>
-              <a:t>. Two different user questions.</a:t>
-            </a:r>
+              <a:t>One project. Two different use cases.</a:t>
+            </a:r>
+            <a:endParaRPr sz="2700" b="1" dirty="0">
+              <a:solidFill>
+                <a:srgbClr val="182745"/>
+              </a:solidFill>
+              <a:latin typeface="Aptos"/>
+            </a:endParaRPr>
           </a:p>
         </p:txBody>
       </p:sp>
@@ -11291,25 +10336,7 @@
                 </a:solidFill>
                 <a:latin typeface="Aptos"/>
               </a:rPr>
-              <a:t>How does </a:t>
-            </a:r>
-            <a:r>
-              <a:rPr lang="en-US" sz="2700" b="1" dirty="0" err="1">
-                <a:solidFill>
-                  <a:srgbClr val="182745"/>
-                </a:solidFill>
-                <a:latin typeface="Aptos"/>
-              </a:rPr>
-              <a:t>GrantScopeAI</a:t>
-            </a:r>
-            <a:r>
-              <a:rPr lang="en-US" sz="2700" b="1" dirty="0">
-                <a:solidFill>
-                  <a:srgbClr val="182745"/>
-                </a:solidFill>
-                <a:latin typeface="Aptos"/>
-              </a:rPr>
-              <a:t> find relevant research</a:t>
+              <a:t>How does GrantScope find relevant research</a:t>
             </a:r>
             <a:r>
               <a:rPr sz="2700" b="1" dirty="0">
@@ -12530,7 +11557,7 @@
           <a:p>
             <a:pPr algn="l"/>
             <a:r>
-              <a:rPr sz="1300" b="0">
+              <a:rPr sz="1300" b="0" dirty="0">
                 <a:solidFill>
                   <a:srgbClr val="1E2739"/>
                 </a:solidFill>
@@ -12792,6 +11819,100 @@
               </a:solidFill>
               <a:latin typeface="Aptos"/>
             </a:endParaRPr>
+          </a:p>
+        </p:txBody>
+      </p:sp>
+      <p:sp>
+        <p:nvSpPr>
+          <p:cNvPr id="50" name="Rounded Rectangle 12">
+            <a:extLst>
+              <a:ext uri="{FF2B5EF4-FFF2-40B4-BE49-F238E27FC236}">
+                <a16:creationId xmlns:a16="http://schemas.microsoft.com/office/drawing/2014/main" id="{E1A4C969-94D0-E54B-FCBB-BEFABCF005D9}"/>
+              </a:ext>
+            </a:extLst>
+          </p:cNvPr>
+          <p:cNvSpPr/>
+          <p:nvPr/>
+        </p:nvSpPr>
+        <p:spPr>
+          <a:xfrm>
+            <a:off x="2712720" y="6190488"/>
+            <a:ext cx="6766560" cy="420624"/>
+          </a:xfrm>
+          <a:prstGeom prst="roundRect">
+            <a:avLst/>
+          </a:prstGeom>
+          <a:solidFill>
+            <a:srgbClr val="E8E8F8"/>
+          </a:solidFill>
+          <a:ln>
+            <a:noFill/>
+          </a:ln>
+        </p:spPr>
+        <p:style>
+          <a:lnRef idx="1">
+            <a:schemeClr val="accent1"/>
+          </a:lnRef>
+          <a:fillRef idx="3">
+            <a:schemeClr val="accent1"/>
+          </a:fillRef>
+          <a:effectRef idx="2">
+            <a:schemeClr val="accent1"/>
+          </a:effectRef>
+          <a:fontRef idx="minor">
+            <a:schemeClr val="lt1"/>
+          </a:fontRef>
+        </p:style>
+        <p:txBody>
+          <a:bodyPr rtlCol="0" anchor="ctr"/>
+          <a:lstStyle/>
+          <a:p>
+            <a:pPr algn="ctr"/>
+            <a:endParaRPr/>
+          </a:p>
+        </p:txBody>
+      </p:sp>
+      <p:sp>
+        <p:nvSpPr>
+          <p:cNvPr id="48" name="TextBox 47">
+            <a:extLst>
+              <a:ext uri="{FF2B5EF4-FFF2-40B4-BE49-F238E27FC236}">
+                <a16:creationId xmlns:a16="http://schemas.microsoft.com/office/drawing/2014/main" id="{6C8A7C96-0139-86E7-8271-B2574C22AAF1}"/>
+              </a:ext>
+            </a:extLst>
+          </p:cNvPr>
+          <p:cNvSpPr txBox="1"/>
+          <p:nvPr/>
+        </p:nvSpPr>
+        <p:spPr>
+          <a:xfrm>
+            <a:off x="2596896" y="6262300"/>
+            <a:ext cx="6620256" cy="276999"/>
+          </a:xfrm>
+          <a:prstGeom prst="rect">
+            <a:avLst/>
+          </a:prstGeom>
+          <a:noFill/>
+          <a:ln>
+            <a:noFill/>
+          </a:ln>
+        </p:spPr>
+        <p:txBody>
+          <a:bodyPr wrap="square" anchor="ctr">
+            <a:spAutoFit/>
+          </a:bodyPr>
+          <a:lstStyle/>
+          <a:p>
+            <a:pPr algn="ctr"/>
+            <a:r>
+              <a:rPr sz="1200" b="1" dirty="0">
+                <a:solidFill>
+                  <a:srgbClr val="182745"/>
+                </a:solidFill>
+                <a:latin typeface="Aptos"/>
+              </a:rPr>
+              <a:t>LIVE DEMO</a:t>
+            </a:r>
           </a:p>
         </p:txBody>
       </p:sp>
@@ -12861,18 +11982,815 @@
                 </a:solidFill>
                 <a:latin typeface="Aptos"/>
               </a:rPr>
-              <a:t>From</a:t>
-            </a:r>
-            <a:r>
-              <a:rPr lang="en-US" sz="2700" b="1" dirty="0">
+              <a:t>Where could GrantScope go next?</a:t>
+            </a:r>
+          </a:p>
+        </p:txBody>
+      </p:sp>
+      <p:sp>
+        <p:nvSpPr>
+          <p:cNvPr id="3" name="Rounded Rectangle 2"/>
+          <p:cNvSpPr/>
+          <p:nvPr/>
+        </p:nvSpPr>
+        <p:spPr>
+          <a:xfrm>
+            <a:off x="658368" y="1033271"/>
+            <a:ext cx="841248" cy="59436"/>
+          </a:xfrm>
+          <a:prstGeom prst="roundRect">
+            <a:avLst/>
+          </a:prstGeom>
+          <a:solidFill>
+            <a:srgbClr val="7552BE"/>
+          </a:solidFill>
+          <a:ln>
+            <a:noFill/>
+          </a:ln>
+        </p:spPr>
+        <p:style>
+          <a:lnRef idx="1">
+            <a:schemeClr val="accent1"/>
+          </a:lnRef>
+          <a:fillRef idx="3">
+            <a:schemeClr val="accent1"/>
+          </a:fillRef>
+          <a:effectRef idx="2">
+            <a:schemeClr val="accent1"/>
+          </a:effectRef>
+          <a:fontRef idx="minor">
+            <a:schemeClr val="lt1"/>
+          </a:fontRef>
+        </p:style>
+        <p:txBody>
+          <a:bodyPr rtlCol="0" anchor="ctr"/>
+          <a:lstStyle/>
+          <a:p>
+            <a:pPr algn="ctr"/>
+            <a:endParaRPr/>
+          </a:p>
+        </p:txBody>
+      </p:sp>
+      <p:sp>
+        <p:nvSpPr>
+          <p:cNvPr id="4" name="TextBox 3"/>
+          <p:cNvSpPr txBox="1"/>
+          <p:nvPr/>
+        </p:nvSpPr>
+        <p:spPr>
+          <a:xfrm>
+            <a:off x="658368" y="1170432"/>
+            <a:ext cx="10789920" cy="420624"/>
+          </a:xfrm>
+          <a:prstGeom prst="rect">
+            <a:avLst/>
+          </a:prstGeom>
+          <a:noFill/>
+          <a:ln>
+            <a:noFill/>
+          </a:ln>
+        </p:spPr>
+        <p:txBody>
+          <a:bodyPr wrap="square" anchor="ctr">
+            <a:spAutoFit/>
+          </a:bodyPr>
+          <a:lstStyle/>
+          <a:p>
+            <a:pPr algn="l"/>
+            <a:r>
+              <a:rPr sz="1400" b="0">
+                <a:solidFill>
+                  <a:srgbClr val="636D82"/>
+                </a:solidFill>
+                <a:latin typeface="Aptos"/>
+              </a:rPr>
+              <a:t>The next version would move from historical orientation toward richer scientific and funding discovery.</a:t>
+            </a:r>
+          </a:p>
+        </p:txBody>
+      </p:sp>
+      <p:sp>
+        <p:nvSpPr>
+          <p:cNvPr id="5" name="Rounded Rectangle 4"/>
+          <p:cNvSpPr/>
+          <p:nvPr/>
+        </p:nvSpPr>
+        <p:spPr>
+          <a:xfrm>
+            <a:off x="685800" y="1828800"/>
+            <a:ext cx="2606040" cy="3429000"/>
+          </a:xfrm>
+          <a:prstGeom prst="roundRect">
+            <a:avLst/>
+          </a:prstGeom>
+          <a:solidFill>
+            <a:srgbClr val="FFFFFF"/>
+          </a:solidFill>
+          <a:ln>
+            <a:solidFill>
+              <a:srgbClr val="E1E5EF"/>
+            </a:solidFill>
+          </a:ln>
+        </p:spPr>
+        <p:style>
+          <a:lnRef idx="1">
+            <a:schemeClr val="accent1"/>
+          </a:lnRef>
+          <a:fillRef idx="3">
+            <a:schemeClr val="accent1"/>
+          </a:fillRef>
+          <a:effectRef idx="2">
+            <a:schemeClr val="accent1"/>
+          </a:effectRef>
+          <a:fontRef idx="minor">
+            <a:schemeClr val="lt1"/>
+          </a:fontRef>
+        </p:style>
+        <p:txBody>
+          <a:bodyPr rtlCol="0" anchor="ctr"/>
+          <a:lstStyle/>
+          <a:p>
+            <a:pPr algn="ctr"/>
+            <a:endParaRPr/>
+          </a:p>
+        </p:txBody>
+      </p:sp>
+      <p:sp>
+        <p:nvSpPr>
+          <p:cNvPr id="6" name="Rounded Rectangle 5"/>
+          <p:cNvSpPr/>
+          <p:nvPr/>
+        </p:nvSpPr>
+        <p:spPr>
+          <a:xfrm>
+            <a:off x="886968" y="2011680"/>
+            <a:ext cx="502920" cy="109728"/>
+          </a:xfrm>
+          <a:prstGeom prst="roundRect">
+            <a:avLst/>
+          </a:prstGeom>
+          <a:solidFill>
+            <a:srgbClr val="7552BE"/>
+          </a:solidFill>
+          <a:ln>
+            <a:noFill/>
+          </a:ln>
+        </p:spPr>
+        <p:style>
+          <a:lnRef idx="1">
+            <a:schemeClr val="accent1"/>
+          </a:lnRef>
+          <a:fillRef idx="3">
+            <a:schemeClr val="accent1"/>
+          </a:fillRef>
+          <a:effectRef idx="2">
+            <a:schemeClr val="accent1"/>
+          </a:effectRef>
+          <a:fontRef idx="minor">
+            <a:schemeClr val="lt1"/>
+          </a:fontRef>
+        </p:style>
+        <p:txBody>
+          <a:bodyPr rtlCol="0" anchor="ctr"/>
+          <a:lstStyle/>
+          <a:p>
+            <a:pPr algn="ctr"/>
+            <a:endParaRPr/>
+          </a:p>
+        </p:txBody>
+      </p:sp>
+      <p:sp>
+        <p:nvSpPr>
+          <p:cNvPr id="7" name="TextBox 6"/>
+          <p:cNvSpPr txBox="1"/>
+          <p:nvPr/>
+        </p:nvSpPr>
+        <p:spPr>
+          <a:xfrm>
+            <a:off x="905256" y="2212848"/>
+            <a:ext cx="2167128" cy="411480"/>
+          </a:xfrm>
+          <a:prstGeom prst="rect">
+            <a:avLst/>
+          </a:prstGeom>
+          <a:noFill/>
+          <a:ln>
+            <a:noFill/>
+          </a:ln>
+        </p:spPr>
+        <p:txBody>
+          <a:bodyPr wrap="square" anchor="ctr">
+            <a:spAutoFit/>
+          </a:bodyPr>
+          <a:lstStyle/>
+          <a:p>
+            <a:pPr algn="l"/>
+            <a:r>
+              <a:rPr sz="1700" b="1">
                 <a:solidFill>
                   <a:srgbClr val="182745"/>
                 </a:solidFill>
                 <a:latin typeface="Aptos"/>
               </a:rPr>
-              <a:t> Model to a Usable Tool</a:t>
-            </a:r>
-            <a:endParaRPr sz="2700" b="1" dirty="0">
+              <a:t>Live opportunities</a:t>
+            </a:r>
+          </a:p>
+        </p:txBody>
+      </p:sp>
+      <p:sp>
+        <p:nvSpPr>
+          <p:cNvPr id="8" name="TextBox 7"/>
+          <p:cNvSpPr txBox="1"/>
+          <p:nvPr/>
+        </p:nvSpPr>
+        <p:spPr>
+          <a:xfrm>
+            <a:off x="905256" y="3013396"/>
+            <a:ext cx="2167128" cy="1015663"/>
+          </a:xfrm>
+          <a:prstGeom prst="rect">
+            <a:avLst/>
+          </a:prstGeom>
+          <a:noFill/>
+          <a:ln>
+            <a:noFill/>
+          </a:ln>
+        </p:spPr>
+        <p:txBody>
+          <a:bodyPr wrap="square" anchor="ctr">
+            <a:spAutoFit/>
+          </a:bodyPr>
+          <a:lstStyle/>
+          <a:p>
+            <a:pPr algn="l"/>
+            <a:r>
+              <a:rPr sz="1200" b="0" dirty="0">
+                <a:solidFill>
+                  <a:srgbClr val="1E2739"/>
+                </a:solidFill>
+                <a:latin typeface="Aptos"/>
+              </a:rPr>
+              <a:t>Integrate current grant calls, deadlines and eligibility.
+Historical discovery</a:t>
+            </a:r>
+            <a:r>
+              <a:rPr lang="en-US" sz="1200" b="0" dirty="0">
+                <a:solidFill>
+                  <a:srgbClr val="1E2739"/>
+                </a:solidFill>
+                <a:latin typeface="Aptos"/>
+              </a:rPr>
+              <a:t> to</a:t>
+            </a:r>
+            <a:r>
+              <a:rPr sz="1200" b="0" dirty="0">
+                <a:solidFill>
+                  <a:srgbClr val="1E2739"/>
+                </a:solidFill>
+                <a:latin typeface="Aptos"/>
+              </a:rPr>
+              <a:t> actionable funding search.</a:t>
+            </a:r>
+          </a:p>
+        </p:txBody>
+      </p:sp>
+      <p:sp>
+        <p:nvSpPr>
+          <p:cNvPr id="9" name="Rounded Rectangle 8"/>
+          <p:cNvSpPr/>
+          <p:nvPr/>
+        </p:nvSpPr>
+        <p:spPr>
+          <a:xfrm>
+            <a:off x="3474720" y="1828800"/>
+            <a:ext cx="2606040" cy="3429000"/>
+          </a:xfrm>
+          <a:prstGeom prst="roundRect">
+            <a:avLst/>
+          </a:prstGeom>
+          <a:solidFill>
+            <a:srgbClr val="FFFFFF"/>
+          </a:solidFill>
+          <a:ln>
+            <a:solidFill>
+              <a:srgbClr val="E1E5EF"/>
+            </a:solidFill>
+          </a:ln>
+        </p:spPr>
+        <p:style>
+          <a:lnRef idx="1">
+            <a:schemeClr val="accent1"/>
+          </a:lnRef>
+          <a:fillRef idx="3">
+            <a:schemeClr val="accent1"/>
+          </a:fillRef>
+          <a:effectRef idx="2">
+            <a:schemeClr val="accent1"/>
+          </a:effectRef>
+          <a:fontRef idx="minor">
+            <a:schemeClr val="lt1"/>
+          </a:fontRef>
+        </p:style>
+        <p:txBody>
+          <a:bodyPr rtlCol="0" anchor="ctr"/>
+          <a:lstStyle/>
+          <a:p>
+            <a:pPr algn="ctr"/>
+            <a:endParaRPr/>
+          </a:p>
+        </p:txBody>
+      </p:sp>
+      <p:sp>
+        <p:nvSpPr>
+          <p:cNvPr id="10" name="Rounded Rectangle 9"/>
+          <p:cNvSpPr/>
+          <p:nvPr/>
+        </p:nvSpPr>
+        <p:spPr>
+          <a:xfrm>
+            <a:off x="3675887" y="2011680"/>
+            <a:ext cx="502920" cy="109728"/>
+          </a:xfrm>
+          <a:prstGeom prst="roundRect">
+            <a:avLst/>
+          </a:prstGeom>
+          <a:solidFill>
+            <a:srgbClr val="8463C7"/>
+          </a:solidFill>
+          <a:ln>
+            <a:noFill/>
+          </a:ln>
+        </p:spPr>
+        <p:style>
+          <a:lnRef idx="1">
+            <a:schemeClr val="accent1"/>
+          </a:lnRef>
+          <a:fillRef idx="3">
+            <a:schemeClr val="accent1"/>
+          </a:fillRef>
+          <a:effectRef idx="2">
+            <a:schemeClr val="accent1"/>
+          </a:effectRef>
+          <a:fontRef idx="minor">
+            <a:schemeClr val="lt1"/>
+          </a:fontRef>
+        </p:style>
+        <p:txBody>
+          <a:bodyPr rtlCol="0" anchor="ctr"/>
+          <a:lstStyle/>
+          <a:p>
+            <a:pPr algn="ctr"/>
+            <a:endParaRPr/>
+          </a:p>
+        </p:txBody>
+      </p:sp>
+      <p:sp>
+        <p:nvSpPr>
+          <p:cNvPr id="11" name="TextBox 10"/>
+          <p:cNvSpPr txBox="1"/>
+          <p:nvPr/>
+        </p:nvSpPr>
+        <p:spPr>
+          <a:xfrm>
+            <a:off x="3694176" y="2212848"/>
+            <a:ext cx="2167128" cy="411480"/>
+          </a:xfrm>
+          <a:prstGeom prst="rect">
+            <a:avLst/>
+          </a:prstGeom>
+          <a:noFill/>
+          <a:ln>
+            <a:noFill/>
+          </a:ln>
+        </p:spPr>
+        <p:txBody>
+          <a:bodyPr wrap="square" anchor="ctr">
+            <a:spAutoFit/>
+          </a:bodyPr>
+          <a:lstStyle/>
+          <a:p>
+            <a:pPr algn="l"/>
+            <a:r>
+              <a:rPr sz="1700" b="1">
+                <a:solidFill>
+                  <a:srgbClr val="182745"/>
+                </a:solidFill>
+                <a:latin typeface="Aptos"/>
+              </a:rPr>
+              <a:t>Scientific literature</a:t>
+            </a:r>
+          </a:p>
+        </p:txBody>
+      </p:sp>
+      <p:sp>
+        <p:nvSpPr>
+          <p:cNvPr id="12" name="TextBox 11"/>
+          <p:cNvSpPr txBox="1"/>
+          <p:nvPr/>
+        </p:nvSpPr>
+        <p:spPr>
+          <a:xfrm>
+            <a:off x="3803904" y="2624328"/>
+            <a:ext cx="2167128" cy="2423160"/>
+          </a:xfrm>
+          <a:prstGeom prst="rect">
+            <a:avLst/>
+          </a:prstGeom>
+          <a:noFill/>
+          <a:ln>
+            <a:noFill/>
+          </a:ln>
+        </p:spPr>
+        <p:txBody>
+          <a:bodyPr wrap="square" anchor="ctr">
+            <a:spAutoFit/>
+          </a:bodyPr>
+          <a:lstStyle/>
+          <a:p>
+            <a:pPr algn="l"/>
+            <a:r>
+              <a:rPr sz="1200" b="0" dirty="0">
+                <a:solidFill>
+                  <a:srgbClr val="1E2739"/>
+                </a:solidFill>
+                <a:latin typeface="Aptos"/>
+              </a:rPr>
+              <a:t>Connect grants with publications, authors and research outputs.
+Start with metadata/abstracts; full text raises licensing and paywall constraints.</a:t>
+            </a:r>
+          </a:p>
+        </p:txBody>
+      </p:sp>
+      <p:sp>
+        <p:nvSpPr>
+          <p:cNvPr id="13" name="Rounded Rectangle 12"/>
+          <p:cNvSpPr/>
+          <p:nvPr/>
+        </p:nvSpPr>
+        <p:spPr>
+          <a:xfrm>
+            <a:off x="6263640" y="1828800"/>
+            <a:ext cx="2606040" cy="3429000"/>
+          </a:xfrm>
+          <a:prstGeom prst="roundRect">
+            <a:avLst/>
+          </a:prstGeom>
+          <a:solidFill>
+            <a:srgbClr val="FFFFFF"/>
+          </a:solidFill>
+          <a:ln>
+            <a:solidFill>
+              <a:srgbClr val="E1E5EF"/>
+            </a:solidFill>
+          </a:ln>
+        </p:spPr>
+        <p:style>
+          <a:lnRef idx="1">
+            <a:schemeClr val="accent1"/>
+          </a:lnRef>
+          <a:fillRef idx="3">
+            <a:schemeClr val="accent1"/>
+          </a:fillRef>
+          <a:effectRef idx="2">
+            <a:schemeClr val="accent1"/>
+          </a:effectRef>
+          <a:fontRef idx="minor">
+            <a:schemeClr val="lt1"/>
+          </a:fontRef>
+        </p:style>
+        <p:txBody>
+          <a:bodyPr rtlCol="0" anchor="ctr"/>
+          <a:lstStyle/>
+          <a:p>
+            <a:pPr algn="ctr"/>
+            <a:endParaRPr/>
+          </a:p>
+        </p:txBody>
+      </p:sp>
+      <p:sp>
+        <p:nvSpPr>
+          <p:cNvPr id="14" name="Rounded Rectangle 13"/>
+          <p:cNvSpPr/>
+          <p:nvPr/>
+        </p:nvSpPr>
+        <p:spPr>
+          <a:xfrm>
+            <a:off x="6464807" y="2011680"/>
+            <a:ext cx="502920" cy="109728"/>
+          </a:xfrm>
+          <a:prstGeom prst="roundRect">
+            <a:avLst/>
+          </a:prstGeom>
+          <a:solidFill>
+            <a:srgbClr val="A48BD6"/>
+          </a:solidFill>
+          <a:ln>
+            <a:noFill/>
+          </a:ln>
+        </p:spPr>
+        <p:style>
+          <a:lnRef idx="1">
+            <a:schemeClr val="accent1"/>
+          </a:lnRef>
+          <a:fillRef idx="3">
+            <a:schemeClr val="accent1"/>
+          </a:fillRef>
+          <a:effectRef idx="2">
+            <a:schemeClr val="accent1"/>
+          </a:effectRef>
+          <a:fontRef idx="minor">
+            <a:schemeClr val="lt1"/>
+          </a:fontRef>
+        </p:style>
+        <p:txBody>
+          <a:bodyPr rtlCol="0" anchor="ctr"/>
+          <a:lstStyle/>
+          <a:p>
+            <a:pPr algn="ctr"/>
+            <a:endParaRPr/>
+          </a:p>
+        </p:txBody>
+      </p:sp>
+      <p:sp>
+        <p:nvSpPr>
+          <p:cNvPr id="15" name="TextBox 14"/>
+          <p:cNvSpPr txBox="1"/>
+          <p:nvPr/>
+        </p:nvSpPr>
+        <p:spPr>
+          <a:xfrm>
+            <a:off x="6483096" y="2212848"/>
+            <a:ext cx="2167128" cy="411480"/>
+          </a:xfrm>
+          <a:prstGeom prst="rect">
+            <a:avLst/>
+          </a:prstGeom>
+          <a:noFill/>
+          <a:ln>
+            <a:noFill/>
+          </a:ln>
+        </p:spPr>
+        <p:txBody>
+          <a:bodyPr wrap="square" anchor="ctr">
+            <a:spAutoFit/>
+          </a:bodyPr>
+          <a:lstStyle/>
+          <a:p>
+            <a:pPr algn="l"/>
+            <a:r>
+              <a:rPr sz="1700" b="1">
+                <a:solidFill>
+                  <a:srgbClr val="182745"/>
+                </a:solidFill>
+                <a:latin typeface="Aptos"/>
+              </a:rPr>
+              <a:t>Semantic retrieval</a:t>
+            </a:r>
+          </a:p>
+        </p:txBody>
+      </p:sp>
+      <p:sp>
+        <p:nvSpPr>
+          <p:cNvPr id="16" name="TextBox 15"/>
+          <p:cNvSpPr txBox="1"/>
+          <p:nvPr/>
+        </p:nvSpPr>
+        <p:spPr>
+          <a:xfrm>
+            <a:off x="6537960" y="2583180"/>
+            <a:ext cx="2167128" cy="2423160"/>
+          </a:xfrm>
+          <a:prstGeom prst="rect">
+            <a:avLst/>
+          </a:prstGeom>
+          <a:noFill/>
+          <a:ln>
+            <a:noFill/>
+          </a:ln>
+        </p:spPr>
+        <p:txBody>
+          <a:bodyPr wrap="square" anchor="ctr">
+            <a:spAutoFit/>
+          </a:bodyPr>
+          <a:lstStyle/>
+          <a:p>
+            <a:pPr algn="l"/>
+            <a:r>
+              <a:rPr sz="1200" b="0" dirty="0">
+                <a:solidFill>
+                  <a:srgbClr val="1E2739"/>
+                </a:solidFill>
+                <a:latin typeface="Aptos"/>
+              </a:rPr>
+              <a:t>Compare the current interpretable TF-IDF hybrid with embeddings or lexical + semantic retrieval.
+Test improvement rather than assume complexity is better.</a:t>
+            </a:r>
+          </a:p>
+        </p:txBody>
+      </p:sp>
+      <p:sp>
+        <p:nvSpPr>
+          <p:cNvPr id="17" name="Rounded Rectangle 16"/>
+          <p:cNvSpPr/>
+          <p:nvPr/>
+        </p:nvSpPr>
+        <p:spPr>
+          <a:xfrm>
+            <a:off x="9052560" y="1828800"/>
+            <a:ext cx="2606040" cy="3429000"/>
+          </a:xfrm>
+          <a:prstGeom prst="roundRect">
+            <a:avLst/>
+          </a:prstGeom>
+          <a:solidFill>
+            <a:srgbClr val="FFFFFF"/>
+          </a:solidFill>
+          <a:ln>
+            <a:solidFill>
+              <a:srgbClr val="E1E5EF"/>
+            </a:solidFill>
+          </a:ln>
+        </p:spPr>
+        <p:style>
+          <a:lnRef idx="1">
+            <a:schemeClr val="accent1"/>
+          </a:lnRef>
+          <a:fillRef idx="3">
+            <a:schemeClr val="accent1"/>
+          </a:fillRef>
+          <a:effectRef idx="2">
+            <a:schemeClr val="accent1"/>
+          </a:effectRef>
+          <a:fontRef idx="minor">
+            <a:schemeClr val="lt1"/>
+          </a:fontRef>
+        </p:style>
+        <p:txBody>
+          <a:bodyPr rtlCol="0" anchor="ctr"/>
+          <a:lstStyle/>
+          <a:p>
+            <a:pPr algn="ctr"/>
+            <a:endParaRPr/>
+          </a:p>
+        </p:txBody>
+      </p:sp>
+      <p:sp>
+        <p:nvSpPr>
+          <p:cNvPr id="18" name="Rounded Rectangle 17"/>
+          <p:cNvSpPr/>
+          <p:nvPr/>
+        </p:nvSpPr>
+        <p:spPr>
+          <a:xfrm>
+            <a:off x="9253728" y="2011680"/>
+            <a:ext cx="502920" cy="109728"/>
+          </a:xfrm>
+          <a:prstGeom prst="roundRect">
+            <a:avLst/>
+          </a:prstGeom>
+          <a:solidFill>
+            <a:srgbClr val="BEA4DE"/>
+          </a:solidFill>
+          <a:ln>
+            <a:noFill/>
+          </a:ln>
+        </p:spPr>
+        <p:style>
+          <a:lnRef idx="1">
+            <a:schemeClr val="accent1"/>
+          </a:lnRef>
+          <a:fillRef idx="3">
+            <a:schemeClr val="accent1"/>
+          </a:fillRef>
+          <a:effectRef idx="2">
+            <a:schemeClr val="accent1"/>
+          </a:effectRef>
+          <a:fontRef idx="minor">
+            <a:schemeClr val="lt1"/>
+          </a:fontRef>
+        </p:style>
+        <p:txBody>
+          <a:bodyPr rtlCol="0" anchor="ctr"/>
+          <a:lstStyle/>
+          <a:p>
+            <a:pPr algn="ctr"/>
+            <a:endParaRPr/>
+          </a:p>
+        </p:txBody>
+      </p:sp>
+      <p:sp>
+        <p:nvSpPr>
+          <p:cNvPr id="19" name="TextBox 18"/>
+          <p:cNvSpPr txBox="1"/>
+          <p:nvPr/>
+        </p:nvSpPr>
+        <p:spPr>
+          <a:xfrm>
+            <a:off x="9272016" y="2212848"/>
+            <a:ext cx="2167128" cy="411480"/>
+          </a:xfrm>
+          <a:prstGeom prst="rect">
+            <a:avLst/>
+          </a:prstGeom>
+          <a:noFill/>
+          <a:ln>
+            <a:noFill/>
+          </a:ln>
+        </p:spPr>
+        <p:txBody>
+          <a:bodyPr wrap="square" anchor="ctr">
+            <a:spAutoFit/>
+          </a:bodyPr>
+          <a:lstStyle/>
+          <a:p>
+            <a:pPr algn="l"/>
+            <a:r>
+              <a:rPr sz="1700" b="1">
+                <a:solidFill>
+                  <a:srgbClr val="182745"/>
+                </a:solidFill>
+                <a:latin typeface="Aptos"/>
+              </a:rPr>
+              <a:t>Human validation</a:t>
+            </a:r>
+          </a:p>
+        </p:txBody>
+      </p:sp>
+      <p:sp>
+        <p:nvSpPr>
+          <p:cNvPr id="20" name="TextBox 19"/>
+          <p:cNvSpPr txBox="1"/>
+          <p:nvPr/>
+        </p:nvSpPr>
+        <p:spPr>
+          <a:xfrm>
+            <a:off x="9381744" y="2583180"/>
+            <a:ext cx="2167128" cy="2423160"/>
+          </a:xfrm>
+          <a:prstGeom prst="rect">
+            <a:avLst/>
+          </a:prstGeom>
+          <a:noFill/>
+          <a:ln>
+            <a:noFill/>
+          </a:ln>
+        </p:spPr>
+        <p:txBody>
+          <a:bodyPr wrap="square" anchor="ctr">
+            <a:spAutoFit/>
+          </a:bodyPr>
+          <a:lstStyle/>
+          <a:p>
+            <a:pPr algn="l"/>
+            <a:r>
+              <a:rPr sz="1200" b="0" dirty="0">
+                <a:solidFill>
+                  <a:srgbClr val="1E2739"/>
+                </a:solidFill>
+                <a:latin typeface="Aptos"/>
+              </a:rPr>
+              <a:t>Build a larger researcher-labelled relevance benchmark.
+Evaluate whether domain experts consistently find the rankings useful.</a:t>
+            </a:r>
+          </a:p>
+        </p:txBody>
+      </p:sp>
+      <p:sp>
+        <p:nvSpPr>
+          <p:cNvPr id="21" name="TextBox 20"/>
+          <p:cNvSpPr txBox="1"/>
+          <p:nvPr/>
+        </p:nvSpPr>
+        <p:spPr>
+          <a:xfrm>
+            <a:off x="1828800" y="5796959"/>
+            <a:ext cx="8503920" cy="384721"/>
+          </a:xfrm>
+          <a:prstGeom prst="rect">
+            <a:avLst/>
+          </a:prstGeom>
+          <a:noFill/>
+          <a:ln>
+            <a:noFill/>
+          </a:ln>
+        </p:spPr>
+        <p:txBody>
+          <a:bodyPr wrap="square" anchor="ctr">
+            <a:spAutoFit/>
+          </a:bodyPr>
+          <a:lstStyle/>
+          <a:p>
+            <a:pPr algn="ctr"/>
+            <a:r>
+              <a:rPr lang="en-US" sz="1900" b="1">
+                <a:solidFill>
+                  <a:srgbClr val="182745"/>
+                </a:solidFill>
+                <a:latin typeface="Aptos"/>
+              </a:rPr>
+              <a:t>From historical context to current opportunities and future discovery</a:t>
+            </a:r>
+            <a:endParaRPr sz="1900" b="1" dirty="0">
               <a:solidFill>
                 <a:srgbClr val="182745"/>
               </a:solidFill>
@@ -12883,610 +12801,7 @@
       </p:sp>
       <p:sp>
         <p:nvSpPr>
-          <p:cNvPr id="3" name="Rounded Rectangle 2"/>
-          <p:cNvSpPr/>
-          <p:nvPr/>
-        </p:nvSpPr>
-        <p:spPr>
-          <a:xfrm>
-            <a:off x="658368" y="1033271"/>
-            <a:ext cx="841248" cy="59436"/>
-          </a:xfrm>
-          <a:prstGeom prst="roundRect">
-            <a:avLst/>
-          </a:prstGeom>
-          <a:solidFill>
-            <a:srgbClr val="7552BE"/>
-          </a:solidFill>
-          <a:ln>
-            <a:noFill/>
-          </a:ln>
-        </p:spPr>
-        <p:style>
-          <a:lnRef idx="1">
-            <a:schemeClr val="accent1"/>
-          </a:lnRef>
-          <a:fillRef idx="3">
-            <a:schemeClr val="accent1"/>
-          </a:fillRef>
-          <a:effectRef idx="2">
-            <a:schemeClr val="accent1"/>
-          </a:effectRef>
-          <a:fontRef idx="minor">
-            <a:schemeClr val="lt1"/>
-          </a:fontRef>
-        </p:style>
-        <p:txBody>
-          <a:bodyPr rtlCol="0" anchor="ctr"/>
-          <a:lstStyle/>
-          <a:p>
-            <a:pPr algn="ctr"/>
-            <a:endParaRPr/>
-          </a:p>
-        </p:txBody>
-      </p:sp>
-      <p:sp>
-        <p:nvSpPr>
-          <p:cNvPr id="4" name="TextBox 3"/>
-          <p:cNvSpPr txBox="1"/>
-          <p:nvPr/>
-        </p:nvSpPr>
-        <p:spPr>
-          <a:xfrm>
-            <a:off x="658368" y="1226855"/>
-            <a:ext cx="10789920" cy="307777"/>
-          </a:xfrm>
-          <a:prstGeom prst="rect">
-            <a:avLst/>
-          </a:prstGeom>
-          <a:noFill/>
-          <a:ln>
-            <a:noFill/>
-          </a:ln>
-        </p:spPr>
-        <p:txBody>
-          <a:bodyPr wrap="square" anchor="ctr">
-            <a:spAutoFit/>
-          </a:bodyPr>
-          <a:lstStyle/>
-          <a:p>
-            <a:r>
-              <a:rPr lang="en-US" sz="1400" dirty="0"/>
-              <a:t>The goal was useful, explainable research discovery, not funding prediction</a:t>
-            </a:r>
-            <a:endParaRPr sz="1400" b="0" dirty="0">
-              <a:solidFill>
-                <a:srgbClr val="636D82"/>
-              </a:solidFill>
-              <a:latin typeface="Aptos"/>
-            </a:endParaRPr>
-          </a:p>
-        </p:txBody>
-      </p:sp>
-      <p:sp>
-        <p:nvSpPr>
-          <p:cNvPr id="5" name="Rounded Rectangle 4"/>
-          <p:cNvSpPr/>
-          <p:nvPr/>
-        </p:nvSpPr>
-        <p:spPr>
-          <a:xfrm>
-            <a:off x="777240" y="1828800"/>
-            <a:ext cx="3840480" cy="3566160"/>
-          </a:xfrm>
-          <a:prstGeom prst="roundRect">
-            <a:avLst/>
-          </a:prstGeom>
-          <a:solidFill>
-            <a:srgbClr val="FFFFFF"/>
-          </a:solidFill>
-          <a:ln>
-            <a:solidFill>
-              <a:srgbClr val="E1E5EF"/>
-            </a:solidFill>
-          </a:ln>
-        </p:spPr>
-        <p:style>
-          <a:lnRef idx="1">
-            <a:schemeClr val="accent1"/>
-          </a:lnRef>
-          <a:fillRef idx="3">
-            <a:schemeClr val="accent1"/>
-          </a:fillRef>
-          <a:effectRef idx="2">
-            <a:schemeClr val="accent1"/>
-          </a:effectRef>
-          <a:fontRef idx="minor">
-            <a:schemeClr val="lt1"/>
-          </a:fontRef>
-        </p:style>
-        <p:txBody>
-          <a:bodyPr rtlCol="0" anchor="ctr"/>
-          <a:lstStyle/>
-          <a:p>
-            <a:pPr algn="ctr"/>
-            <a:endParaRPr/>
-          </a:p>
-        </p:txBody>
-      </p:sp>
-      <p:sp>
-        <p:nvSpPr>
-          <p:cNvPr id="6" name="Rounded Rectangle 5"/>
-          <p:cNvSpPr/>
-          <p:nvPr/>
-        </p:nvSpPr>
-        <p:spPr>
-          <a:xfrm>
-            <a:off x="978408" y="2011680"/>
-            <a:ext cx="502920" cy="109728"/>
-          </a:xfrm>
-          <a:prstGeom prst="roundRect">
-            <a:avLst/>
-          </a:prstGeom>
-          <a:solidFill>
-            <a:srgbClr val="7552BE"/>
-          </a:solidFill>
-          <a:ln>
-            <a:noFill/>
-          </a:ln>
-        </p:spPr>
-        <p:style>
-          <a:lnRef idx="1">
-            <a:schemeClr val="accent1"/>
-          </a:lnRef>
-          <a:fillRef idx="3">
-            <a:schemeClr val="accent1"/>
-          </a:fillRef>
-          <a:effectRef idx="2">
-            <a:schemeClr val="accent1"/>
-          </a:effectRef>
-          <a:fontRef idx="minor">
-            <a:schemeClr val="lt1"/>
-          </a:fontRef>
-        </p:style>
-        <p:txBody>
-          <a:bodyPr rtlCol="0" anchor="ctr"/>
-          <a:lstStyle/>
-          <a:p>
-            <a:pPr algn="ctr"/>
-            <a:endParaRPr/>
-          </a:p>
-        </p:txBody>
-      </p:sp>
-      <p:sp>
-        <p:nvSpPr>
-          <p:cNvPr id="7" name="TextBox 6"/>
-          <p:cNvSpPr txBox="1"/>
-          <p:nvPr/>
-        </p:nvSpPr>
-        <p:spPr>
-          <a:xfrm>
-            <a:off x="996695" y="2241616"/>
-            <a:ext cx="3401568" cy="353943"/>
-          </a:xfrm>
-          <a:prstGeom prst="rect">
-            <a:avLst/>
-          </a:prstGeom>
-          <a:noFill/>
-          <a:ln>
-            <a:noFill/>
-          </a:ln>
-        </p:spPr>
-        <p:txBody>
-          <a:bodyPr wrap="square" anchor="ctr">
-            <a:spAutoFit/>
-          </a:bodyPr>
-          <a:lstStyle/>
-          <a:p>
-            <a:pPr algn="l"/>
-            <a:r>
-              <a:rPr lang="en-US" sz="1700" b="1" dirty="0">
-                <a:solidFill>
-                  <a:srgbClr val="182745"/>
-                </a:solidFill>
-                <a:latin typeface="Aptos"/>
-              </a:rPr>
-              <a:t>What the Model Does</a:t>
-            </a:r>
-            <a:endParaRPr sz="1700" b="1" dirty="0">
-              <a:solidFill>
-                <a:srgbClr val="182745"/>
-              </a:solidFill>
-              <a:latin typeface="Aptos"/>
-            </a:endParaRPr>
-          </a:p>
-        </p:txBody>
-      </p:sp>
-      <p:sp>
-        <p:nvSpPr>
-          <p:cNvPr id="8" name="TextBox 7"/>
-          <p:cNvSpPr txBox="1"/>
-          <p:nvPr/>
-        </p:nvSpPr>
-        <p:spPr>
-          <a:xfrm>
-            <a:off x="978408" y="2753329"/>
-            <a:ext cx="3401568" cy="1585049"/>
-          </a:xfrm>
-          <a:prstGeom prst="rect">
-            <a:avLst/>
-          </a:prstGeom>
-          <a:noFill/>
-          <a:ln>
-            <a:noFill/>
-          </a:ln>
-        </p:spPr>
-        <p:txBody>
-          <a:bodyPr wrap="square" anchor="ctr">
-            <a:spAutoFit/>
-          </a:bodyPr>
-          <a:lstStyle/>
-          <a:p>
-            <a:pPr marL="285750" lvl="0" indent="-285750">
-              <a:buFont typeface="Arial" panose="020B0604020202020204" pitchFamily="34" charset="0"/>
-              <a:buChar char="•"/>
-            </a:pPr>
-            <a:r>
-              <a:rPr lang="en-US" sz="1400" dirty="0"/>
-              <a:t>Surface scientifically relevant projects </a:t>
-            </a:r>
-          </a:p>
-          <a:p>
-            <a:pPr marL="285750" lvl="0" indent="-285750">
-              <a:buFont typeface="Arial" panose="020B0604020202020204" pitchFamily="34" charset="0"/>
-              <a:buChar char="•"/>
-            </a:pPr>
-            <a:r>
-              <a:rPr lang="en-US" sz="1400" dirty="0"/>
-              <a:t>Make the ranking understandable </a:t>
-            </a:r>
-          </a:p>
-          <a:p>
-            <a:pPr marL="285750" lvl="0" indent="-285750">
-              <a:buFont typeface="Arial" panose="020B0604020202020204" pitchFamily="34" charset="0"/>
-              <a:buChar char="•"/>
-            </a:pPr>
-            <a:r>
-              <a:rPr lang="en-US" sz="1400" dirty="0"/>
-              <a:t>Avoid misleading funding predictions</a:t>
-            </a:r>
-          </a:p>
-          <a:p>
-            <a:pPr marL="285750" lvl="0" indent="-285750">
-              <a:buFont typeface="Arial" panose="020B0604020202020204" pitchFamily="34" charset="0"/>
-              <a:buChar char="•"/>
-            </a:pPr>
-            <a:endParaRPr lang="en-US" sz="1400" dirty="0"/>
-          </a:p>
-          <a:p>
-            <a:pPr marL="285750" lvl="0" indent="-285750">
-              <a:buFont typeface="Arial" panose="020B0604020202020204" pitchFamily="34" charset="0"/>
-              <a:buChar char="•"/>
-            </a:pPr>
-            <a:r>
-              <a:rPr lang="en-US" sz="1400" b="1" dirty="0">
-                <a:solidFill>
-                  <a:srgbClr val="182745"/>
-                </a:solidFill>
-              </a:rPr>
-              <a:t>Focus: useful retrieval, not perfect prediction</a:t>
-            </a:r>
-          </a:p>
-          <a:p>
-            <a:pPr algn="l"/>
-            <a:endParaRPr sz="1300" b="0" dirty="0">
-              <a:solidFill>
-                <a:srgbClr val="1E2739"/>
-              </a:solidFill>
-              <a:latin typeface="Aptos"/>
-            </a:endParaRPr>
-          </a:p>
-        </p:txBody>
-      </p:sp>
-      <p:sp>
-        <p:nvSpPr>
-          <p:cNvPr id="9" name="Rounded Rectangle 8"/>
-          <p:cNvSpPr/>
-          <p:nvPr/>
-        </p:nvSpPr>
-        <p:spPr>
-          <a:xfrm>
-            <a:off x="4919472" y="1828800"/>
-            <a:ext cx="6492240" cy="3566160"/>
-          </a:xfrm>
-          <a:prstGeom prst="roundRect">
-            <a:avLst/>
-          </a:prstGeom>
-          <a:solidFill>
-            <a:srgbClr val="FFFFFF"/>
-          </a:solidFill>
-          <a:ln>
-            <a:solidFill>
-              <a:srgbClr val="E1E5EF"/>
-            </a:solidFill>
-          </a:ln>
-        </p:spPr>
-        <p:style>
-          <a:lnRef idx="1">
-            <a:schemeClr val="accent1"/>
-          </a:lnRef>
-          <a:fillRef idx="3">
-            <a:schemeClr val="accent1"/>
-          </a:fillRef>
-          <a:effectRef idx="2">
-            <a:schemeClr val="accent1"/>
-          </a:effectRef>
-          <a:fontRef idx="minor">
-            <a:schemeClr val="lt1"/>
-          </a:fontRef>
-        </p:style>
-        <p:txBody>
-          <a:bodyPr rtlCol="0" anchor="ctr"/>
-          <a:lstStyle/>
-          <a:p>
-            <a:pPr algn="ctr"/>
-            <a:endParaRPr/>
-          </a:p>
-        </p:txBody>
-      </p:sp>
-      <p:sp>
-        <p:nvSpPr>
-          <p:cNvPr id="10" name="Rounded Rectangle 9"/>
-          <p:cNvSpPr/>
-          <p:nvPr/>
-        </p:nvSpPr>
-        <p:spPr>
-          <a:xfrm>
-            <a:off x="5372100" y="2046027"/>
-            <a:ext cx="502920" cy="109728"/>
-          </a:xfrm>
-          <a:prstGeom prst="roundRect">
-            <a:avLst/>
-          </a:prstGeom>
-          <a:solidFill>
-            <a:srgbClr val="8463C7"/>
-          </a:solidFill>
-          <a:ln>
-            <a:noFill/>
-          </a:ln>
-        </p:spPr>
-        <p:style>
-          <a:lnRef idx="1">
-            <a:schemeClr val="accent1"/>
-          </a:lnRef>
-          <a:fillRef idx="3">
-            <a:schemeClr val="accent1"/>
-          </a:fillRef>
-          <a:effectRef idx="2">
-            <a:schemeClr val="accent1"/>
-          </a:effectRef>
-          <a:fontRef idx="minor">
-            <a:schemeClr val="lt1"/>
-          </a:fontRef>
-        </p:style>
-        <p:txBody>
-          <a:bodyPr rtlCol="0" anchor="ctr"/>
-          <a:lstStyle/>
-          <a:p>
-            <a:pPr algn="ctr"/>
-            <a:endParaRPr/>
-          </a:p>
-        </p:txBody>
-      </p:sp>
-      <p:sp>
-        <p:nvSpPr>
-          <p:cNvPr id="11" name="TextBox 10"/>
-          <p:cNvSpPr txBox="1"/>
-          <p:nvPr/>
-        </p:nvSpPr>
-        <p:spPr>
-          <a:xfrm>
-            <a:off x="5138928" y="2241616"/>
-            <a:ext cx="6053327" cy="353943"/>
-          </a:xfrm>
-          <a:prstGeom prst="rect">
-            <a:avLst/>
-          </a:prstGeom>
-          <a:noFill/>
-          <a:ln>
-            <a:noFill/>
-          </a:ln>
-        </p:spPr>
-        <p:txBody>
-          <a:bodyPr wrap="square" anchor="ctr">
-            <a:spAutoFit/>
-          </a:bodyPr>
-          <a:lstStyle/>
-          <a:p>
-            <a:pPr algn="l"/>
-            <a:r>
-              <a:rPr lang="en-US" sz="1700" b="1" dirty="0">
-                <a:solidFill>
-                  <a:srgbClr val="182745"/>
-                </a:solidFill>
-                <a:latin typeface="Aptos"/>
-              </a:rPr>
-              <a:t>What makes the Tool Usable</a:t>
-            </a:r>
-            <a:endParaRPr sz="1700" b="1" dirty="0">
-              <a:solidFill>
-                <a:srgbClr val="182745"/>
-              </a:solidFill>
-              <a:latin typeface="Aptos"/>
-            </a:endParaRPr>
-          </a:p>
-        </p:txBody>
-      </p:sp>
-      <p:sp>
-        <p:nvSpPr>
-          <p:cNvPr id="12" name="TextBox 11"/>
-          <p:cNvSpPr txBox="1"/>
-          <p:nvPr/>
-        </p:nvSpPr>
-        <p:spPr>
-          <a:xfrm>
-            <a:off x="5120640" y="2892836"/>
-            <a:ext cx="6053327" cy="1369606"/>
-          </a:xfrm>
-          <a:prstGeom prst="rect">
-            <a:avLst/>
-          </a:prstGeom>
-          <a:noFill/>
-          <a:ln>
-            <a:noFill/>
-          </a:ln>
-        </p:spPr>
-        <p:txBody>
-          <a:bodyPr wrap="square" anchor="ctr">
-            <a:spAutoFit/>
-          </a:bodyPr>
-          <a:lstStyle/>
-          <a:p>
-            <a:pPr marL="285750" lvl="0" indent="-285750">
-              <a:buFont typeface="Arial" panose="020B0604020202020204" pitchFamily="34" charset="0"/>
-              <a:buChar char="•"/>
-            </a:pPr>
-            <a:r>
-              <a:rPr lang="en-US" sz="1400" dirty="0"/>
-              <a:t>Clear relevance scores </a:t>
-            </a:r>
-          </a:p>
-          <a:p>
-            <a:pPr marL="285750" lvl="0" indent="-285750">
-              <a:buFont typeface="Arial" panose="020B0604020202020204" pitchFamily="34" charset="0"/>
-              <a:buChar char="•"/>
-            </a:pPr>
-            <a:r>
-              <a:rPr lang="en-US" sz="1400" dirty="0"/>
-              <a:t>Why-it-matched explanations </a:t>
-            </a:r>
-          </a:p>
-          <a:p>
-            <a:pPr marL="285750" lvl="0" indent="-285750">
-              <a:buFont typeface="Arial" panose="020B0604020202020204" pitchFamily="34" charset="0"/>
-              <a:buChar char="•"/>
-            </a:pPr>
-            <a:r>
-              <a:rPr lang="en-US" sz="1400" dirty="0"/>
-              <a:t>Shared concepts and scientific context </a:t>
-            </a:r>
-          </a:p>
-          <a:p>
-            <a:pPr marL="285750" lvl="0" indent="-285750">
-              <a:buFont typeface="Arial" panose="020B0604020202020204" pitchFamily="34" charset="0"/>
-              <a:buChar char="•"/>
-            </a:pPr>
-            <a:r>
-              <a:rPr lang="en-US" sz="1400" dirty="0"/>
-              <a:t>Comparable organizations and programs </a:t>
-            </a:r>
-          </a:p>
-          <a:p>
-            <a:pPr marL="285750" lvl="0" indent="-285750">
-              <a:buFont typeface="Arial" panose="020B0604020202020204" pitchFamily="34" charset="0"/>
-              <a:buChar char="•"/>
-            </a:pPr>
-            <a:r>
-              <a:rPr lang="en-US" sz="1400" dirty="0"/>
-              <a:t>Shortlisting, comparison, and starting points</a:t>
-            </a:r>
-          </a:p>
-          <a:p>
-            <a:pPr algn="l"/>
-            <a:endParaRPr sz="1300" b="0" dirty="0">
-              <a:solidFill>
-                <a:srgbClr val="1E2739"/>
-              </a:solidFill>
-              <a:latin typeface="Aptos"/>
-            </a:endParaRPr>
-          </a:p>
-        </p:txBody>
-      </p:sp>
-      <p:sp>
-        <p:nvSpPr>
-          <p:cNvPr id="13" name="Rounded Rectangle 12"/>
-          <p:cNvSpPr/>
-          <p:nvPr/>
-        </p:nvSpPr>
-        <p:spPr>
-          <a:xfrm>
-            <a:off x="2743200" y="5806440"/>
-            <a:ext cx="6766560" cy="420624"/>
-          </a:xfrm>
-          <a:prstGeom prst="roundRect">
-            <a:avLst/>
-          </a:prstGeom>
-          <a:solidFill>
-            <a:srgbClr val="E8E8F8"/>
-          </a:solidFill>
-          <a:ln>
-            <a:noFill/>
-          </a:ln>
-        </p:spPr>
-        <p:style>
-          <a:lnRef idx="1">
-            <a:schemeClr val="accent1"/>
-          </a:lnRef>
-          <a:fillRef idx="3">
-            <a:schemeClr val="accent1"/>
-          </a:fillRef>
-          <a:effectRef idx="2">
-            <a:schemeClr val="accent1"/>
-          </a:effectRef>
-          <a:fontRef idx="minor">
-            <a:schemeClr val="lt1"/>
-          </a:fontRef>
-        </p:style>
-        <p:txBody>
-          <a:bodyPr rtlCol="0" anchor="ctr"/>
-          <a:lstStyle/>
-          <a:p>
-            <a:pPr algn="ctr"/>
-            <a:endParaRPr/>
-          </a:p>
-        </p:txBody>
-      </p:sp>
-      <p:sp>
-        <p:nvSpPr>
-          <p:cNvPr id="14" name="TextBox 13"/>
-          <p:cNvSpPr txBox="1"/>
-          <p:nvPr/>
-        </p:nvSpPr>
-        <p:spPr>
-          <a:xfrm>
-            <a:off x="2816352" y="5864536"/>
-            <a:ext cx="6620256" cy="276999"/>
-          </a:xfrm>
-          <a:prstGeom prst="rect">
-            <a:avLst/>
-          </a:prstGeom>
-          <a:noFill/>
-          <a:ln>
-            <a:noFill/>
-          </a:ln>
-        </p:spPr>
-        <p:txBody>
-          <a:bodyPr wrap="square" anchor="ctr">
-            <a:spAutoFit/>
-          </a:bodyPr>
-          <a:lstStyle/>
-          <a:p>
-            <a:pPr algn="ctr"/>
-            <a:r>
-              <a:rPr sz="1200" b="1" dirty="0">
-                <a:solidFill>
-                  <a:srgbClr val="182745"/>
-                </a:solidFill>
-                <a:latin typeface="Aptos"/>
-              </a:rPr>
-              <a:t>LIVE DEMO</a:t>
-            </a:r>
-          </a:p>
-        </p:txBody>
-      </p:sp>
-      <p:sp>
-        <p:nvSpPr>
-          <p:cNvPr id="15" name="TextBox 14"/>
+          <p:cNvPr id="22" name="TextBox 21"/>
           <p:cNvSpPr txBox="1"/>
           <p:nvPr/>
         </p:nvSpPr>
@@ -13517,7 +12832,7 @@
                 </a:solidFill>
                 <a:latin typeface="Aptos"/>
               </a:rPr>
-              <a:t>8</a:t>
+              <a:t>9</a:t>
             </a:r>
           </a:p>
         </p:txBody>

--- a/Presentations/Final Project Presentation.pptx
+++ b/Presentations/Final Project Presentation.pptx
@@ -311,7 +311,7 @@
           <a:p>
             <a:fld id="{5BCAD085-E8A6-8845-BD4E-CB4CCA059FC4}" type="datetimeFigureOut">
               <a:rPr lang="en-US" smtClean="0"/>
-              <a:t>8/10/2026</a:t>
+              <a:t>8/12/2026</a:t>
             </a:fld>
             <a:endParaRPr lang="en-US"/>
           </a:p>
@@ -479,7 +479,7 @@
           <a:p>
             <a:fld id="{5BCAD085-E8A6-8845-BD4E-CB4CCA059FC4}" type="datetimeFigureOut">
               <a:rPr lang="en-US" smtClean="0"/>
-              <a:t>8/10/2026</a:t>
+              <a:t>8/12/2026</a:t>
             </a:fld>
             <a:endParaRPr lang="en-US"/>
           </a:p>
@@ -657,7 +657,7 @@
           <a:p>
             <a:fld id="{5BCAD085-E8A6-8845-BD4E-CB4CCA059FC4}" type="datetimeFigureOut">
               <a:rPr lang="en-US" smtClean="0"/>
-              <a:t>8/10/2026</a:t>
+              <a:t>8/12/2026</a:t>
             </a:fld>
             <a:endParaRPr lang="en-US"/>
           </a:p>
@@ -825,7 +825,7 @@
           <a:p>
             <a:fld id="{5BCAD085-E8A6-8845-BD4E-CB4CCA059FC4}" type="datetimeFigureOut">
               <a:rPr lang="en-US" smtClean="0"/>
-              <a:t>8/10/2026</a:t>
+              <a:t>8/12/2026</a:t>
             </a:fld>
             <a:endParaRPr lang="en-US"/>
           </a:p>
@@ -1070,7 +1070,7 @@
           <a:p>
             <a:fld id="{5BCAD085-E8A6-8845-BD4E-CB4CCA059FC4}" type="datetimeFigureOut">
               <a:rPr lang="en-US" smtClean="0"/>
-              <a:t>8/10/2026</a:t>
+              <a:t>8/12/2026</a:t>
             </a:fld>
             <a:endParaRPr lang="en-US"/>
           </a:p>
@@ -1355,7 +1355,7 @@
           <a:p>
             <a:fld id="{5BCAD085-E8A6-8845-BD4E-CB4CCA059FC4}" type="datetimeFigureOut">
               <a:rPr lang="en-US" smtClean="0"/>
-              <a:t>8/10/2026</a:t>
+              <a:t>8/12/2026</a:t>
             </a:fld>
             <a:endParaRPr lang="en-US"/>
           </a:p>
@@ -1774,7 +1774,7 @@
           <a:p>
             <a:fld id="{5BCAD085-E8A6-8845-BD4E-CB4CCA059FC4}" type="datetimeFigureOut">
               <a:rPr lang="en-US" smtClean="0"/>
-              <a:t>8/10/2026</a:t>
+              <a:t>8/12/2026</a:t>
             </a:fld>
             <a:endParaRPr lang="en-US"/>
           </a:p>
@@ -1891,7 +1891,7 @@
           <a:p>
             <a:fld id="{5BCAD085-E8A6-8845-BD4E-CB4CCA059FC4}" type="datetimeFigureOut">
               <a:rPr lang="en-US" smtClean="0"/>
-              <a:t>8/10/2026</a:t>
+              <a:t>8/12/2026</a:t>
             </a:fld>
             <a:endParaRPr lang="en-US"/>
           </a:p>
@@ -1986,7 +1986,7 @@
           <a:p>
             <a:fld id="{5BCAD085-E8A6-8845-BD4E-CB4CCA059FC4}" type="datetimeFigureOut">
               <a:rPr lang="en-US" smtClean="0"/>
-              <a:t>8/10/2026</a:t>
+              <a:t>8/12/2026</a:t>
             </a:fld>
             <a:endParaRPr lang="en-US"/>
           </a:p>
@@ -2261,7 +2261,7 @@
           <a:p>
             <a:fld id="{5BCAD085-E8A6-8845-BD4E-CB4CCA059FC4}" type="datetimeFigureOut">
               <a:rPr lang="en-US" smtClean="0"/>
-              <a:t>8/10/2026</a:t>
+              <a:t>8/12/2026</a:t>
             </a:fld>
             <a:endParaRPr lang="en-US"/>
           </a:p>
@@ -2513,7 +2513,7 @@
           <a:p>
             <a:fld id="{5BCAD085-E8A6-8845-BD4E-CB4CCA059FC4}" type="datetimeFigureOut">
               <a:rPr lang="en-US" smtClean="0"/>
-              <a:t>8/10/2026</a:t>
+              <a:t>8/12/2026</a:t>
             </a:fld>
             <a:endParaRPr lang="en-US"/>
           </a:p>
@@ -2724,7 +2724,7 @@
           <a:p>
             <a:fld id="{5BCAD085-E8A6-8845-BD4E-CB4CCA059FC4}" type="datetimeFigureOut">
               <a:rPr lang="en-US" smtClean="0"/>
-              <a:t>8/10/2026</a:t>
+              <a:t>8/12/2026</a:t>
             </a:fld>
             <a:endParaRPr lang="en-US"/>
           </a:p>
@@ -5351,7 +5351,7 @@
         </p:nvSpPr>
         <p:spPr>
           <a:xfrm>
-            <a:off x="756009" y="2050497"/>
+            <a:off x="756009" y="2232839"/>
             <a:ext cx="2898648" cy="307777"/>
           </a:xfrm>
           <a:prstGeom prst="rect">
@@ -5503,7 +5503,7 @@
         </p:nvSpPr>
         <p:spPr>
           <a:xfrm>
-            <a:off x="4457647" y="2232839"/>
+            <a:off x="4568163" y="2232839"/>
             <a:ext cx="2898648" cy="307777"/>
           </a:xfrm>
           <a:prstGeom prst="rect">
@@ -5553,7 +5553,7 @@
         </p:nvSpPr>
         <p:spPr>
           <a:xfrm>
-            <a:off x="8466609" y="2179370"/>
+            <a:off x="8403336" y="2066544"/>
             <a:ext cx="502920" cy="109728"/>
           </a:xfrm>
           <a:prstGeom prst="roundRect">
@@ -5827,7 +5827,7 @@
         </p:nvSpPr>
         <p:spPr>
           <a:xfrm>
-            <a:off x="4457647" y="4833643"/>
+            <a:off x="4568163" y="4866684"/>
             <a:ext cx="2898648" cy="307777"/>
           </a:xfrm>
           <a:prstGeom prst="rect">
@@ -6015,7 +6015,7 @@
         </p:blipFill>
         <p:spPr>
           <a:xfrm>
-            <a:off x="8466609" y="4513572"/>
+            <a:off x="8403336" y="4562726"/>
             <a:ext cx="591363" cy="195089"/>
           </a:xfrm>
           <a:prstGeom prst="rect">
@@ -6190,7 +6190,7 @@
         <p:spPr>
           <a:xfrm>
             <a:off x="777240" y="1828799"/>
-            <a:ext cx="3017520" cy="1335023"/>
+            <a:ext cx="3017520" cy="1371601"/>
           </a:xfrm>
           <a:prstGeom prst="roundRect">
             <a:avLst/>
@@ -6279,7 +6279,7 @@
         </p:nvSpPr>
         <p:spPr>
           <a:xfrm>
-            <a:off x="996695" y="2212848"/>
+            <a:off x="978408" y="2171699"/>
             <a:ext cx="2578608" cy="411480"/>
           </a:xfrm>
           <a:prstGeom prst="rect">
@@ -6298,7 +6298,7 @@
           <a:p>
             <a:pPr algn="l"/>
             <a:r>
-              <a:rPr sz="1700" b="1">
+              <a:rPr sz="1700" b="1" dirty="0">
                 <a:solidFill>
                   <a:srgbClr val="182745"/>
                 </a:solidFill>
@@ -6446,7 +6446,7 @@
         </p:nvSpPr>
         <p:spPr>
           <a:xfrm>
-            <a:off x="996695" y="3675888"/>
+            <a:off x="978408" y="3630168"/>
             <a:ext cx="2578608" cy="411480"/>
           </a:xfrm>
           <a:prstGeom prst="rect">
@@ -6465,7 +6465,7 @@
           <a:p>
             <a:pPr algn="l"/>
             <a:r>
-              <a:rPr sz="1700" b="1">
+              <a:rPr sz="1700" b="1" dirty="0">
                 <a:solidFill>
                   <a:srgbClr val="182745"/>
                 </a:solidFill>
@@ -6503,7 +6503,7 @@
           <a:p>
             <a:pPr algn="l"/>
             <a:r>
-              <a:rPr sz="1300" b="0">
+              <a:rPr sz="1300" b="0" dirty="0">
                 <a:solidFill>
                   <a:srgbClr val="1E2739"/>
                 </a:solidFill>
@@ -6522,8 +6522,8 @@
         </p:nvSpPr>
         <p:spPr>
           <a:xfrm>
-            <a:off x="777240" y="4572000"/>
-            <a:ext cx="3017520" cy="1355834"/>
+            <a:off x="777240" y="4571999"/>
+            <a:ext cx="3017520" cy="1433945"/>
           </a:xfrm>
           <a:prstGeom prst="roundRect">
             <a:avLst/>
@@ -6612,7 +6612,7 @@
         </p:nvSpPr>
         <p:spPr>
           <a:xfrm>
-            <a:off x="996695" y="4956048"/>
+            <a:off x="996695" y="4911159"/>
             <a:ext cx="2578608" cy="411480"/>
           </a:xfrm>
           <a:prstGeom prst="rect">
@@ -11410,8 +11410,8 @@
         </p:nvSpPr>
         <p:spPr>
           <a:xfrm>
-            <a:off x="1005840" y="4343400"/>
-            <a:ext cx="6446520" cy="1298448"/>
+            <a:off x="1005840" y="4343399"/>
+            <a:ext cx="6446520" cy="1402773"/>
           </a:xfrm>
           <a:prstGeom prst="roundRect">
             <a:avLst/>
@@ -11563,8 +11563,23 @@
                 </a:solidFill>
                 <a:latin typeface="Aptos"/>
               </a:rPr>
-              <a:t>Keep TF-IDF as the transparent foundation, then add scientific ranking signals when lexical overlap alone was not enough.</a:t>
-            </a:r>
+              <a:t>Keep TF-IDF as the transparent foundation, </a:t>
+            </a:r>
+            <a:r>
+              <a:rPr lang="en-US" sz="1300" b="0" dirty="0">
+                <a:solidFill>
+                  <a:srgbClr val="1E2739"/>
+                </a:solidFill>
+                <a:latin typeface="Aptos"/>
+              </a:rPr>
+              <a:t>With keywords for project ranking. </a:t>
+            </a:r>
+            <a:endParaRPr sz="1300" b="0" dirty="0">
+              <a:solidFill>
+                <a:srgbClr val="1E2739"/>
+              </a:solidFill>
+              <a:latin typeface="Aptos"/>
+            </a:endParaRPr>
           </a:p>
         </p:txBody>
       </p:sp>
@@ -12557,8 +12572,8 @@
         </p:nvSpPr>
         <p:spPr>
           <a:xfrm>
-            <a:off x="6537960" y="2583180"/>
-            <a:ext cx="2167128" cy="2423160"/>
+            <a:off x="6702552" y="3105834"/>
+            <a:ext cx="2167128" cy="646331"/>
           </a:xfrm>
           <a:prstGeom prst="rect">
             <a:avLst/>
@@ -12576,15 +12591,20 @@
           <a:p>
             <a:pPr algn="l"/>
             <a:r>
-              <a:rPr sz="1200" b="0" dirty="0">
+              <a:rPr lang="en-US" sz="1200" b="0" dirty="0">
                 <a:solidFill>
                   <a:srgbClr val="1E2739"/>
                 </a:solidFill>
                 <a:latin typeface="Aptos"/>
               </a:rPr>
-              <a:t>Compare the current interpretable TF-IDF hybrid with embeddings or lexical + semantic retrieval.
-Test improvement rather than assume complexity is better.</a:t>
-            </a:r>
+              <a:t>Improve the model with sentence embeddings as an added feature.</a:t>
+            </a:r>
+            <a:endParaRPr sz="1200" b="0" dirty="0">
+              <a:solidFill>
+                <a:srgbClr val="1E2739"/>
+              </a:solidFill>
+              <a:latin typeface="Aptos"/>
+            </a:endParaRPr>
           </a:p>
         </p:txBody>
       </p:sp>

--- a/Presentations/Final Project Presentation.pptx
+++ b/Presentations/Final Project Presentation.pptx
@@ -132,6 +132,152 @@
 </p:presentation>
 </file>
 
+<file path=ppt/changesInfos/changesInfo1.xml><?xml version="1.0" encoding="utf-8"?>
+<pc:chgInfo xmlns:a="http://schemas.openxmlformats.org/drawingml/2006/main" xmlns:r="http://schemas.openxmlformats.org/officeDocument/2006/relationships" xmlns:ac="http://schemas.microsoft.com/office/drawing/2013/main/command" xmlns:pc="http://schemas.microsoft.com/office/powerpoint/2013/main/command">
+  <pc:docChgLst>
+    <pc:chgData name="Kyle Haustein" userId="2449f22f7128ebcc" providerId="LiveId" clId="{5ED12638-68BE-442B-B58B-5EC9C4DF6A52}"/>
+    <pc:docChg chg="modSld">
+      <pc:chgData name="Kyle Haustein" userId="2449f22f7128ebcc" providerId="LiveId" clId="{5ED12638-68BE-442B-B58B-5EC9C4DF6A52}" dt="2026-08-12T13:06:53.076" v="121" actId="1076"/>
+      <pc:docMkLst>
+        <pc:docMk/>
+      </pc:docMkLst>
+      <pc:sldChg chg="modSp mod">
+        <pc:chgData name="Kyle Haustein" userId="2449f22f7128ebcc" providerId="LiveId" clId="{5ED12638-68BE-442B-B58B-5EC9C4DF6A52}" dt="2026-08-12T13:06:53.076" v="121" actId="1076"/>
+        <pc:sldMkLst>
+          <pc:docMk/>
+          <pc:sldMk cId="0" sldId="258"/>
+        </pc:sldMkLst>
+        <pc:spChg chg="mod">
+          <ac:chgData name="Kyle Haustein" userId="2449f22f7128ebcc" providerId="LiveId" clId="{5ED12638-68BE-442B-B58B-5EC9C4DF6A52}" dt="2026-08-12T13:06:26.600" v="116" actId="14100"/>
+          <ac:spMkLst>
+            <pc:docMk/>
+            <pc:sldMk cId="0" sldId="258"/>
+            <ac:spMk id="5" creationId="{00000000-0000-0000-0000-000000000000}"/>
+          </ac:spMkLst>
+        </pc:spChg>
+        <pc:spChg chg="mod">
+          <ac:chgData name="Kyle Haustein" userId="2449f22f7128ebcc" providerId="LiveId" clId="{5ED12638-68BE-442B-B58B-5EC9C4DF6A52}" dt="2026-08-12T13:06:53.076" v="121" actId="1076"/>
+          <ac:spMkLst>
+            <pc:docMk/>
+            <pc:sldMk cId="0" sldId="258"/>
+            <ac:spMk id="7" creationId="{00000000-0000-0000-0000-000000000000}"/>
+          </ac:spMkLst>
+        </pc:spChg>
+        <pc:spChg chg="mod">
+          <ac:chgData name="Kyle Haustein" userId="2449f22f7128ebcc" providerId="LiveId" clId="{5ED12638-68BE-442B-B58B-5EC9C4DF6A52}" dt="2026-08-12T13:06:48.357" v="120" actId="1076"/>
+          <ac:spMkLst>
+            <pc:docMk/>
+            <pc:sldMk cId="0" sldId="258"/>
+            <ac:spMk id="11" creationId="{00000000-0000-0000-0000-000000000000}"/>
+          </ac:spMkLst>
+        </pc:spChg>
+        <pc:spChg chg="mod">
+          <ac:chgData name="Kyle Haustein" userId="2449f22f7128ebcc" providerId="LiveId" clId="{5ED12638-68BE-442B-B58B-5EC9C4DF6A52}" dt="2026-08-12T13:06:40.925" v="119" actId="14100"/>
+          <ac:spMkLst>
+            <pc:docMk/>
+            <pc:sldMk cId="0" sldId="258"/>
+            <ac:spMk id="13" creationId="{00000000-0000-0000-0000-000000000000}"/>
+          </ac:spMkLst>
+        </pc:spChg>
+        <pc:spChg chg="mod">
+          <ac:chgData name="Kyle Haustein" userId="2449f22f7128ebcc" providerId="LiveId" clId="{5ED12638-68BE-442B-B58B-5EC9C4DF6A52}" dt="2026-08-12T13:06:34.551" v="118" actId="1076"/>
+          <ac:spMkLst>
+            <pc:docMk/>
+            <pc:sldMk cId="0" sldId="258"/>
+            <ac:spMk id="15" creationId="{00000000-0000-0000-0000-000000000000}"/>
+          </ac:spMkLst>
+        </pc:spChg>
+      </pc:sldChg>
+      <pc:sldChg chg="modSp mod">
+        <pc:chgData name="Kyle Haustein" userId="2449f22f7128ebcc" providerId="LiveId" clId="{5ED12638-68BE-442B-B58B-5EC9C4DF6A52}" dt="2026-08-12T12:56:23.727" v="41" actId="20577"/>
+        <pc:sldMkLst>
+          <pc:docMk/>
+          <pc:sldMk cId="0" sldId="262"/>
+        </pc:sldMkLst>
+        <pc:spChg chg="mod">
+          <ac:chgData name="Kyle Haustein" userId="2449f22f7128ebcc" providerId="LiveId" clId="{5ED12638-68BE-442B-B58B-5EC9C4DF6A52}" dt="2026-08-12T12:55:40.310" v="5" actId="14100"/>
+          <ac:spMkLst>
+            <pc:docMk/>
+            <pc:sldMk cId="0" sldId="262"/>
+            <ac:spMk id="34" creationId="{00000000-0000-0000-0000-000000000000}"/>
+          </ac:spMkLst>
+        </pc:spChg>
+        <pc:spChg chg="mod">
+          <ac:chgData name="Kyle Haustein" userId="2449f22f7128ebcc" providerId="LiveId" clId="{5ED12638-68BE-442B-B58B-5EC9C4DF6A52}" dt="2026-08-12T12:56:23.727" v="41" actId="20577"/>
+          <ac:spMkLst>
+            <pc:docMk/>
+            <pc:sldMk cId="0" sldId="262"/>
+            <ac:spMk id="37" creationId="{00000000-0000-0000-0000-000000000000}"/>
+          </ac:spMkLst>
+        </pc:spChg>
+      </pc:sldChg>
+      <pc:sldChg chg="modSp mod">
+        <pc:chgData name="Kyle Haustein" userId="2449f22f7128ebcc" providerId="LiveId" clId="{5ED12638-68BE-442B-B58B-5EC9C4DF6A52}" dt="2026-08-12T13:00:55.134" v="114" actId="1076"/>
+        <pc:sldMkLst>
+          <pc:docMk/>
+          <pc:sldMk cId="0" sldId="264"/>
+        </pc:sldMkLst>
+        <pc:spChg chg="mod">
+          <ac:chgData name="Kyle Haustein" userId="2449f22f7128ebcc" providerId="LiveId" clId="{5ED12638-68BE-442B-B58B-5EC9C4DF6A52}" dt="2026-08-12T13:00:55.134" v="114" actId="1076"/>
+          <ac:spMkLst>
+            <pc:docMk/>
+            <pc:sldMk cId="0" sldId="264"/>
+            <ac:spMk id="16" creationId="{00000000-0000-0000-0000-000000000000}"/>
+          </ac:spMkLst>
+        </pc:spChg>
+      </pc:sldChg>
+      <pc:sldChg chg="modSp mod">
+        <pc:chgData name="Kyle Haustein" userId="2449f22f7128ebcc" providerId="LiveId" clId="{5ED12638-68BE-442B-B58B-5EC9C4DF6A52}" dt="2026-08-12T12:55:28.202" v="4" actId="1076"/>
+        <pc:sldMkLst>
+          <pc:docMk/>
+          <pc:sldMk cId="679326677" sldId="266"/>
+        </pc:sldMkLst>
+        <pc:spChg chg="mod">
+          <ac:chgData name="Kyle Haustein" userId="2449f22f7128ebcc" providerId="LiveId" clId="{5ED12638-68BE-442B-B58B-5EC9C4DF6A52}" dt="2026-08-12T12:54:47.622" v="0" actId="1076"/>
+          <ac:spMkLst>
+            <pc:docMk/>
+            <pc:sldMk cId="679326677" sldId="266"/>
+            <ac:spMk id="7" creationId="{D3EE5F5C-3851-F6D9-CC6C-4C216E028757}"/>
+          </ac:spMkLst>
+        </pc:spChg>
+        <pc:spChg chg="mod">
+          <ac:chgData name="Kyle Haustein" userId="2449f22f7128ebcc" providerId="LiveId" clId="{5ED12638-68BE-442B-B58B-5EC9C4DF6A52}" dt="2026-08-12T12:54:55.318" v="1" actId="1076"/>
+          <ac:spMkLst>
+            <pc:docMk/>
+            <pc:sldMk cId="679326677" sldId="266"/>
+            <ac:spMk id="11" creationId="{A5E90527-A95B-2DC8-FCA6-AF5279950656}"/>
+          </ac:spMkLst>
+        </pc:spChg>
+        <pc:spChg chg="mod">
+          <ac:chgData name="Kyle Haustein" userId="2449f22f7128ebcc" providerId="LiveId" clId="{5ED12638-68BE-442B-B58B-5EC9C4DF6A52}" dt="2026-08-12T12:55:09.804" v="2" actId="1076"/>
+          <ac:spMkLst>
+            <pc:docMk/>
+            <pc:sldMk cId="679326677" sldId="266"/>
+            <ac:spMk id="14" creationId="{0EE8D648-C28F-1A5F-7AA0-1740C89615AB}"/>
+          </ac:spMkLst>
+        </pc:spChg>
+        <pc:spChg chg="mod">
+          <ac:chgData name="Kyle Haustein" userId="2449f22f7128ebcc" providerId="LiveId" clId="{5ED12638-68BE-442B-B58B-5EC9C4DF6A52}" dt="2026-08-12T12:55:28.202" v="4" actId="1076"/>
+          <ac:spMkLst>
+            <pc:docMk/>
+            <pc:sldMk cId="679326677" sldId="266"/>
+            <ac:spMk id="29" creationId="{CB9BF6D6-2918-9724-C65F-4EBEF11A00B6}"/>
+          </ac:spMkLst>
+        </pc:spChg>
+        <pc:picChg chg="mod">
+          <ac:chgData name="Kyle Haustein" userId="2449f22f7128ebcc" providerId="LiveId" clId="{5ED12638-68BE-442B-B58B-5EC9C4DF6A52}" dt="2026-08-12T12:55:18" v="3" actId="1076"/>
+          <ac:picMkLst>
+            <pc:docMk/>
+            <pc:sldMk cId="679326677" sldId="266"/>
+            <ac:picMk id="45" creationId="{40C73CC9-3E73-3960-B53A-DD7A8034C9CD}"/>
+          </ac:picMkLst>
+        </pc:picChg>
+      </pc:sldChg>
+    </pc:docChg>
+  </pc:docChgLst>
+</pc:chgInfo>
+</file>
+
 <file path=ppt/slideLayouts/slideLayout1.xml><?xml version="1.0" encoding="utf-8"?>
 <p:sldLayout xmlns:a="http://schemas.openxmlformats.org/drawingml/2006/main" xmlns:r="http://schemas.openxmlformats.org/officeDocument/2006/relationships" xmlns:p="http://schemas.openxmlformats.org/presentationml/2006/main" type="title" preserve="1">
   <p:cSld name="Title Slide">
@@ -311,7 +457,7 @@
           <a:p>
             <a:fld id="{5BCAD085-E8A6-8845-BD4E-CB4CCA059FC4}" type="datetimeFigureOut">
               <a:rPr lang="en-US" smtClean="0"/>
-              <a:t>8/10/2026</a:t>
+              <a:t>8/12/2026</a:t>
             </a:fld>
             <a:endParaRPr lang="en-US"/>
           </a:p>
@@ -479,7 +625,7 @@
           <a:p>
             <a:fld id="{5BCAD085-E8A6-8845-BD4E-CB4CCA059FC4}" type="datetimeFigureOut">
               <a:rPr lang="en-US" smtClean="0"/>
-              <a:t>8/10/2026</a:t>
+              <a:t>8/12/2026</a:t>
             </a:fld>
             <a:endParaRPr lang="en-US"/>
           </a:p>
@@ -657,7 +803,7 @@
           <a:p>
             <a:fld id="{5BCAD085-E8A6-8845-BD4E-CB4CCA059FC4}" type="datetimeFigureOut">
               <a:rPr lang="en-US" smtClean="0"/>
-              <a:t>8/10/2026</a:t>
+              <a:t>8/12/2026</a:t>
             </a:fld>
             <a:endParaRPr lang="en-US"/>
           </a:p>
@@ -825,7 +971,7 @@
           <a:p>
             <a:fld id="{5BCAD085-E8A6-8845-BD4E-CB4CCA059FC4}" type="datetimeFigureOut">
               <a:rPr lang="en-US" smtClean="0"/>
-              <a:t>8/10/2026</a:t>
+              <a:t>8/12/2026</a:t>
             </a:fld>
             <a:endParaRPr lang="en-US"/>
           </a:p>
@@ -1070,7 +1216,7 @@
           <a:p>
             <a:fld id="{5BCAD085-E8A6-8845-BD4E-CB4CCA059FC4}" type="datetimeFigureOut">
               <a:rPr lang="en-US" smtClean="0"/>
-              <a:t>8/10/2026</a:t>
+              <a:t>8/12/2026</a:t>
             </a:fld>
             <a:endParaRPr lang="en-US"/>
           </a:p>
@@ -1355,7 +1501,7 @@
           <a:p>
             <a:fld id="{5BCAD085-E8A6-8845-BD4E-CB4CCA059FC4}" type="datetimeFigureOut">
               <a:rPr lang="en-US" smtClean="0"/>
-              <a:t>8/10/2026</a:t>
+              <a:t>8/12/2026</a:t>
             </a:fld>
             <a:endParaRPr lang="en-US"/>
           </a:p>
@@ -1774,7 +1920,7 @@
           <a:p>
             <a:fld id="{5BCAD085-E8A6-8845-BD4E-CB4CCA059FC4}" type="datetimeFigureOut">
               <a:rPr lang="en-US" smtClean="0"/>
-              <a:t>8/10/2026</a:t>
+              <a:t>8/12/2026</a:t>
             </a:fld>
             <a:endParaRPr lang="en-US"/>
           </a:p>
@@ -1891,7 +2037,7 @@
           <a:p>
             <a:fld id="{5BCAD085-E8A6-8845-BD4E-CB4CCA059FC4}" type="datetimeFigureOut">
               <a:rPr lang="en-US" smtClean="0"/>
-              <a:t>8/10/2026</a:t>
+              <a:t>8/12/2026</a:t>
             </a:fld>
             <a:endParaRPr lang="en-US"/>
           </a:p>
@@ -1986,7 +2132,7 @@
           <a:p>
             <a:fld id="{5BCAD085-E8A6-8845-BD4E-CB4CCA059FC4}" type="datetimeFigureOut">
               <a:rPr lang="en-US" smtClean="0"/>
-              <a:t>8/10/2026</a:t>
+              <a:t>8/12/2026</a:t>
             </a:fld>
             <a:endParaRPr lang="en-US"/>
           </a:p>
@@ -2261,7 +2407,7 @@
           <a:p>
             <a:fld id="{5BCAD085-E8A6-8845-BD4E-CB4CCA059FC4}" type="datetimeFigureOut">
               <a:rPr lang="en-US" smtClean="0"/>
-              <a:t>8/10/2026</a:t>
+              <a:t>8/12/2026</a:t>
             </a:fld>
             <a:endParaRPr lang="en-US"/>
           </a:p>
@@ -2513,7 +2659,7 @@
           <a:p>
             <a:fld id="{5BCAD085-E8A6-8845-BD4E-CB4CCA059FC4}" type="datetimeFigureOut">
               <a:rPr lang="en-US" smtClean="0"/>
-              <a:t>8/10/2026</a:t>
+              <a:t>8/12/2026</a:t>
             </a:fld>
             <a:endParaRPr lang="en-US"/>
           </a:p>
@@ -2724,7 +2870,7 @@
           <a:p>
             <a:fld id="{5BCAD085-E8A6-8845-BD4E-CB4CCA059FC4}" type="datetimeFigureOut">
               <a:rPr lang="en-US" smtClean="0"/>
-              <a:t>8/10/2026</a:t>
+              <a:t>8/12/2026</a:t>
             </a:fld>
             <a:endParaRPr lang="en-US"/>
           </a:p>
@@ -5351,7 +5497,7 @@
         </p:nvSpPr>
         <p:spPr>
           <a:xfrm>
-            <a:off x="756009" y="2050497"/>
+            <a:off x="756009" y="2232839"/>
             <a:ext cx="2898648" cy="307777"/>
           </a:xfrm>
           <a:prstGeom prst="rect">
@@ -5503,7 +5649,7 @@
         </p:nvSpPr>
         <p:spPr>
           <a:xfrm>
-            <a:off x="4457647" y="2232839"/>
+            <a:off x="4568163" y="2232839"/>
             <a:ext cx="2898648" cy="307777"/>
           </a:xfrm>
           <a:prstGeom prst="rect">
@@ -5553,7 +5699,7 @@
         </p:nvSpPr>
         <p:spPr>
           <a:xfrm>
-            <a:off x="8466609" y="2179370"/>
+            <a:off x="8403336" y="2066544"/>
             <a:ext cx="502920" cy="109728"/>
           </a:xfrm>
           <a:prstGeom prst="roundRect">
@@ -5827,7 +5973,7 @@
         </p:nvSpPr>
         <p:spPr>
           <a:xfrm>
-            <a:off x="4457647" y="4833643"/>
+            <a:off x="4568163" y="4866684"/>
             <a:ext cx="2898648" cy="307777"/>
           </a:xfrm>
           <a:prstGeom prst="rect">
@@ -6015,7 +6161,7 @@
         </p:blipFill>
         <p:spPr>
           <a:xfrm>
-            <a:off x="8466609" y="4513572"/>
+            <a:off x="8403336" y="4562726"/>
             <a:ext cx="591363" cy="195089"/>
           </a:xfrm>
           <a:prstGeom prst="rect">
@@ -6190,7 +6336,7 @@
         <p:spPr>
           <a:xfrm>
             <a:off x="777240" y="1828799"/>
-            <a:ext cx="3017520" cy="1335023"/>
+            <a:ext cx="3017520" cy="1371601"/>
           </a:xfrm>
           <a:prstGeom prst="roundRect">
             <a:avLst/>
@@ -6279,7 +6425,7 @@
         </p:nvSpPr>
         <p:spPr>
           <a:xfrm>
-            <a:off x="996695" y="2212848"/>
+            <a:off x="978408" y="2171699"/>
             <a:ext cx="2578608" cy="411480"/>
           </a:xfrm>
           <a:prstGeom prst="rect">
@@ -6298,7 +6444,7 @@
           <a:p>
             <a:pPr algn="l"/>
             <a:r>
-              <a:rPr sz="1700" b="1">
+              <a:rPr sz="1700" b="1" dirty="0">
                 <a:solidFill>
                   <a:srgbClr val="182745"/>
                 </a:solidFill>
@@ -6446,7 +6592,7 @@
         </p:nvSpPr>
         <p:spPr>
           <a:xfrm>
-            <a:off x="996695" y="3675888"/>
+            <a:off x="978408" y="3630168"/>
             <a:ext cx="2578608" cy="411480"/>
           </a:xfrm>
           <a:prstGeom prst="rect">
@@ -6465,7 +6611,7 @@
           <a:p>
             <a:pPr algn="l"/>
             <a:r>
-              <a:rPr sz="1700" b="1">
+              <a:rPr sz="1700" b="1" dirty="0">
                 <a:solidFill>
                   <a:srgbClr val="182745"/>
                 </a:solidFill>
@@ -6503,7 +6649,7 @@
           <a:p>
             <a:pPr algn="l"/>
             <a:r>
-              <a:rPr sz="1300" b="0">
+              <a:rPr sz="1300" b="0" dirty="0">
                 <a:solidFill>
                   <a:srgbClr val="1E2739"/>
                 </a:solidFill>
@@ -6522,8 +6668,8 @@
         </p:nvSpPr>
         <p:spPr>
           <a:xfrm>
-            <a:off x="777240" y="4572000"/>
-            <a:ext cx="3017520" cy="1355834"/>
+            <a:off x="777240" y="4571999"/>
+            <a:ext cx="3017520" cy="1433945"/>
           </a:xfrm>
           <a:prstGeom prst="roundRect">
             <a:avLst/>
@@ -6612,7 +6758,7 @@
         </p:nvSpPr>
         <p:spPr>
           <a:xfrm>
-            <a:off x="996695" y="4956048"/>
+            <a:off x="996695" y="4911159"/>
             <a:ext cx="2578608" cy="411480"/>
           </a:xfrm>
           <a:prstGeom prst="rect">
@@ -11410,8 +11556,8 @@
         </p:nvSpPr>
         <p:spPr>
           <a:xfrm>
-            <a:off x="1005840" y="4343400"/>
-            <a:ext cx="6446520" cy="1298448"/>
+            <a:off x="1005840" y="4343399"/>
+            <a:ext cx="6446520" cy="1402773"/>
           </a:xfrm>
           <a:prstGeom prst="roundRect">
             <a:avLst/>
@@ -11563,8 +11709,23 @@
                 </a:solidFill>
                 <a:latin typeface="Aptos"/>
               </a:rPr>
-              <a:t>Keep TF-IDF as the transparent foundation, then add scientific ranking signals when lexical overlap alone was not enough.</a:t>
-            </a:r>
+              <a:t>Keep TF-IDF as the transparent foundation, </a:t>
+            </a:r>
+            <a:r>
+              <a:rPr lang="en-US" sz="1300" b="0" dirty="0">
+                <a:solidFill>
+                  <a:srgbClr val="1E2739"/>
+                </a:solidFill>
+                <a:latin typeface="Aptos"/>
+              </a:rPr>
+              <a:t>With keywords for project ranking. </a:t>
+            </a:r>
+            <a:endParaRPr sz="1300" b="0" dirty="0">
+              <a:solidFill>
+                <a:srgbClr val="1E2739"/>
+              </a:solidFill>
+              <a:latin typeface="Aptos"/>
+            </a:endParaRPr>
           </a:p>
         </p:txBody>
       </p:sp>
@@ -12557,8 +12718,8 @@
         </p:nvSpPr>
         <p:spPr>
           <a:xfrm>
-            <a:off x="6537960" y="2583180"/>
-            <a:ext cx="2167128" cy="2423160"/>
+            <a:off x="6702552" y="3105834"/>
+            <a:ext cx="2167128" cy="646331"/>
           </a:xfrm>
           <a:prstGeom prst="rect">
             <a:avLst/>
@@ -12576,15 +12737,20 @@
           <a:p>
             <a:pPr algn="l"/>
             <a:r>
-              <a:rPr sz="1200" b="0" dirty="0">
+              <a:rPr lang="en-US" sz="1200" b="0" dirty="0">
                 <a:solidFill>
                   <a:srgbClr val="1E2739"/>
                 </a:solidFill>
                 <a:latin typeface="Aptos"/>
               </a:rPr>
-              <a:t>Compare the current interpretable TF-IDF hybrid with embeddings or lexical + semantic retrieval.
-Test improvement rather than assume complexity is better.</a:t>
-            </a:r>
+              <a:t>Improve the model with sentence embeddings as an added feature.</a:t>
+            </a:r>
+            <a:endParaRPr sz="1200" b="0" dirty="0">
+              <a:solidFill>
+                <a:srgbClr val="1E2739"/>
+              </a:solidFill>
+              <a:latin typeface="Aptos"/>
+            </a:endParaRPr>
           </a:p>
         </p:txBody>
       </p:sp>
